--- a/第六单元PPT/第1课时 单元导学.pptx
+++ b/第六单元PPT/第1课时 单元导学.pptx
@@ -14,7 +14,6 @@
     <p:sldId id="262" r:id="rId13"/>
     <p:sldId id="263" r:id="rId14"/>
     <p:sldId id="264" r:id="rId15"/>
-    <p:sldId id="265" r:id="rId16"/>
   </p:sldIdLst>
   <p:sldSz cx="12191695" cy="6858000" type="screen4x3"/>
   <p:notesSz cx="6858000" cy="9144000"/>
@@ -3129,17 +3128,17 @@
         </p:nvSpPr>
         <p:spPr>
           <a:xfrm>
-            <a:off x="0" y="0"/>
-            <a:ext cx="12191695" cy="6858000"/>
-          </a:xfrm>
-          <a:prstGeom prst="rect">
-            <a:avLst/>
-          </a:prstGeom>
-          <a:solidFill>
-            <a:srgbClr val="FCFAF7"/>
-          </a:solidFill>
-          <a:ln>
-            <a:noFill/>
+            <a:off x="292608" y="274320"/>
+            <a:ext cx="11594592" cy="6300216"/>
+          </a:xfrm>
+          <a:prstGeom prst="rect">
+            <a:avLst/>
+          </a:prstGeom>
+          <a:noFill/>
+          <a:ln w="31750">
+            <a:solidFill>
+              <a:srgbClr val="6482AA"/>
+            </a:solidFill>
           </a:ln>
         </p:spPr>
         <p:style>
@@ -3164,25 +3163,73 @@
           </a:p>
         </p:txBody>
       </p:sp>
-      <p:sp>
-        <p:nvSpPr>
-          <p:cNvPr id="4" name="Rectangle 3"/>
+      <p:pic>
+        <p:nvPicPr>
+          <p:cNvPr id="4" name="Picture 3" descr="corner_unit_tl.png"/>
+          <p:cNvPicPr>
+            <a:picLocks noChangeAspect="1"/>
+          </p:cNvPicPr>
+          <p:nvPr/>
+        </p:nvPicPr>
+        <p:blipFill>
+          <a:blip r:embed="rId3"/>
+          <a:stretch>
+            <a:fillRect/>
+          </a:stretch>
+        </p:blipFill>
+        <p:spPr>
+          <a:xfrm>
+            <a:off x="-45720" y="-45720"/>
+            <a:ext cx="2011680" cy="2011680"/>
+          </a:xfrm>
+          <a:prstGeom prst="rect">
+            <a:avLst/>
+          </a:prstGeom>
+        </p:spPr>
+      </p:pic>
+      <p:pic>
+        <p:nvPicPr>
+          <p:cNvPr id="5" name="Picture 4" descr="corner_unit_tr.png"/>
+          <p:cNvPicPr>
+            <a:picLocks noChangeAspect="1"/>
+          </p:cNvPicPr>
+          <p:nvPr/>
+        </p:nvPicPr>
+        <p:blipFill>
+          <a:blip r:embed="rId4"/>
+          <a:stretch>
+            <a:fillRect/>
+          </a:stretch>
+        </p:blipFill>
+        <p:spPr>
+          <a:xfrm>
+            <a:off x="9875520" y="-45720"/>
+            <a:ext cx="2011680" cy="2011680"/>
+          </a:xfrm>
+          <a:prstGeom prst="rect">
+            <a:avLst/>
+          </a:prstGeom>
+        </p:spPr>
+      </p:pic>
+      <p:sp>
+        <p:nvSpPr>
+          <p:cNvPr id="6" name="Rectangle 5"/>
           <p:cNvSpPr/>
           <p:nvPr/>
         </p:nvSpPr>
         <p:spPr>
           <a:xfrm>
-            <a:off x="0" y="2926080"/>
-            <a:ext cx="12191695" cy="73152"/>
-          </a:xfrm>
-          <a:prstGeom prst="rect">
-            <a:avLst/>
-          </a:prstGeom>
-          <a:solidFill>
-            <a:srgbClr val="A4B4C4"/>
-          </a:solidFill>
-          <a:ln>
-            <a:noFill/>
+            <a:off x="292608" y="274320"/>
+            <a:ext cx="11594592" cy="6300216"/>
+          </a:xfrm>
+          <a:prstGeom prst="rect">
+            <a:avLst/>
+          </a:prstGeom>
+          <a:noFill/>
+          <a:ln w="31750">
+            <a:solidFill>
+              <a:srgbClr val="6482AA"/>
+            </a:solidFill>
           </a:ln>
         </p:spPr>
         <p:style>
@@ -3209,135 +3256,23 @@
       </p:sp>
       <p:sp>
         <p:nvSpPr>
-          <p:cNvPr id="5" name="TextBox 4"/>
-          <p:cNvSpPr txBox="1"/>
-          <p:nvPr/>
-        </p:nvSpPr>
-        <p:spPr>
-          <a:xfrm>
-            <a:off x="914400" y="2286000"/>
-            <a:ext cx="10058400" cy="1371600"/>
+          <p:cNvPr id="7" name="Rectangle 6"/>
+          <p:cNvSpPr/>
+          <p:nvPr/>
+        </p:nvSpPr>
+        <p:spPr>
+          <a:xfrm>
+            <a:off x="347472" y="329184"/>
+            <a:ext cx="11484864" cy="6190488"/>
           </a:xfrm>
           <a:prstGeom prst="rect">
             <a:avLst/>
           </a:prstGeom>
           <a:noFill/>
-        </p:spPr>
-        <p:txBody>
-          <a:bodyPr wrap="none">
-            <a:spAutoFit/>
-          </a:bodyPr>
-          <a:lstStyle/>
-          <a:p>
-            <a:pPr algn="ctr"/>
-            <a:r>
-              <a:rPr sz="5200" b="1">
-                <a:solidFill>
-                  <a:srgbClr val="5A606E"/>
-                </a:solidFill>
-                <a:latin typeface="Microsoft YaHei"/>
-              </a:rPr>
-              <a:t>想象力博物馆</a:t>
-            </a:r>
-          </a:p>
-        </p:txBody>
-      </p:sp>
-      <p:sp>
-        <p:nvSpPr>
-          <p:cNvPr id="6" name="TextBox 5"/>
-          <p:cNvSpPr txBox="1"/>
-          <p:nvPr/>
-        </p:nvSpPr>
-        <p:spPr>
-          <a:xfrm>
-            <a:off x="914400" y="3657600"/>
-            <a:ext cx="10058400" cy="914400"/>
-          </a:xfrm>
-          <a:prstGeom prst="rect">
-            <a:avLst/>
-          </a:prstGeom>
-          <a:noFill/>
-        </p:spPr>
-        <p:txBody>
-          <a:bodyPr wrap="none">
-            <a:spAutoFit/>
-          </a:bodyPr>
-          <a:lstStyle/>
-          <a:p>
-            <a:pPr algn="ctr"/>
-            <a:r>
-              <a:rPr sz="2800" b="0">
-                <a:solidFill>
-                  <a:srgbClr val="A4B4C4"/>
-                </a:solidFill>
-                <a:latin typeface="Microsoft YaHei"/>
-              </a:rPr>
-              <a:t>七年级上册 · 第六单元 · 第一课时</a:t>
-            </a:r>
-          </a:p>
-        </p:txBody>
-      </p:sp>
-    </p:spTree>
-  </p:cSld>
-  <p:clrMapOvr>
-    <a:masterClrMapping/>
-  </p:clrMapOvr>
-</p:sld>
-</file>
-
-<file path=ppt/slides/slide10.xml><?xml version="1.0" encoding="utf-8"?>
-<p:sld xmlns:a="http://schemas.openxmlformats.org/drawingml/2006/main" xmlns:p="http://schemas.openxmlformats.org/presentationml/2006/main" xmlns:r="http://schemas.openxmlformats.org/officeDocument/2006/relationships">
-  <p:cSld>
-    <p:spTree>
-      <p:nvGrpSpPr>
-        <p:cNvPr id="1" name=""/>
-        <p:cNvGrpSpPr/>
-        <p:nvPr/>
-      </p:nvGrpSpPr>
-      <p:grpSpPr/>
-      <p:pic>
-        <p:nvPicPr>
-          <p:cNvPr id="2" name="Picture 1" descr="bg_unit.png"/>
-          <p:cNvPicPr>
-            <a:picLocks noChangeAspect="1"/>
-          </p:cNvPicPr>
-          <p:nvPr/>
-        </p:nvPicPr>
-        <p:blipFill>
-          <a:blip r:embed="rId2"/>
-          <a:stretch>
-            <a:fillRect/>
-          </a:stretch>
-        </p:blipFill>
-        <p:spPr>
-          <a:xfrm>
-            <a:off x="0" y="0"/>
-            <a:ext cx="12191695" cy="6858000"/>
-          </a:xfrm>
-          <a:prstGeom prst="rect">
-            <a:avLst/>
-          </a:prstGeom>
-        </p:spPr>
-      </p:pic>
-      <p:sp>
-        <p:nvSpPr>
-          <p:cNvPr id="3" name="Rectangle 2"/>
-          <p:cNvSpPr/>
-          <p:nvPr/>
-        </p:nvSpPr>
-        <p:spPr>
-          <a:xfrm>
-            <a:off x="0" y="0"/>
-            <a:ext cx="12191695" cy="6858000"/>
-          </a:xfrm>
-          <a:prstGeom prst="rect">
-            <a:avLst/>
-          </a:prstGeom>
-          <a:solidFill>
-            <a:srgbClr val="FCFAF7"/>
-          </a:solidFill>
-          <a:ln>
-            <a:noFill/>
+          <a:ln w="12700">
+            <a:solidFill>
+              <a:srgbClr val="A0BEDC"/>
+            </a:solidFill>
           </a:ln>
         </p:spPr>
         <p:style>
@@ -3364,20 +3299,75 @@
       </p:sp>
       <p:sp>
         <p:nvSpPr>
-          <p:cNvPr id="4" name="Rectangle 3"/>
+          <p:cNvPr id="8" name="TextBox 7"/>
+          <p:cNvSpPr txBox="1"/>
+          <p:nvPr/>
+        </p:nvSpPr>
+        <p:spPr>
+          <a:xfrm>
+            <a:off x="1371600" y="2011680"/>
+            <a:ext cx="9418320" cy="1645920"/>
+          </a:xfrm>
+          <a:prstGeom prst="rect">
+            <a:avLst/>
+          </a:prstGeom>
+          <a:noFill/>
+        </p:spPr>
+        <p:txBody>
+          <a:bodyPr wrap="none">
+            <a:spAutoFit/>
+          </a:bodyPr>
+          <a:lstStyle/>
+          <a:p>
+            <a:pPr algn="ctr">
+              <a:spcAft>
+                <a:spcPts val="1000"/>
+              </a:spcAft>
+            </a:pPr>
+            <a:r>
+              <a:rPr sz="5200" b="1">
+                <a:solidFill>
+                  <a:srgbClr val="4678B4"/>
+                </a:solidFill>
+                <a:latin typeface="Microsoft YaHei"/>
+              </a:rPr>
+              <a:t>想象力博物馆</a:t>
+            </a:r>
+          </a:p>
+          <a:p>
+            <a:pPr algn="ctr">
+              <a:spcAft>
+                <a:spcPts val="1000"/>
+              </a:spcAft>
+            </a:pPr>
+            <a:r>
+              <a:rPr sz="2600" b="0">
+                <a:solidFill>
+                  <a:srgbClr val="323C50"/>
+                </a:solidFill>
+                <a:latin typeface="Microsoft YaHei"/>
+              </a:rPr>
+              <a:t>七年级上册 · 第六单元 · 第一课时</a:t>
+            </a:r>
+          </a:p>
+        </p:txBody>
+      </p:sp>
+      <p:sp>
+        <p:nvSpPr>
+          <p:cNvPr id="9" name="Rectangle 8"/>
           <p:cNvSpPr/>
           <p:nvPr/>
         </p:nvSpPr>
         <p:spPr>
           <a:xfrm>
-            <a:off x="0" y="0"/>
-            <a:ext cx="12191695" cy="91440"/>
+            <a:off x="3200400" y="5029200"/>
+            <a:ext cx="5760720" cy="27432"/>
           </a:xfrm>
           <a:prstGeom prst="rect">
             <a:avLst/>
           </a:prstGeom>
           <a:solidFill>
-            <a:srgbClr val="FFB799"/>
+            <a:srgbClr val="A0BEDC"/>
           </a:solidFill>
           <a:ln>
             <a:noFill/>
@@ -3402,147 +3392,6 @@
           <a:lstStyle/>
           <a:p>
             <a:pPr algn="ctr"/>
-          </a:p>
-        </p:txBody>
-      </p:sp>
-      <p:sp>
-        <p:nvSpPr>
-          <p:cNvPr id="5" name="TextBox 4"/>
-          <p:cNvSpPr txBox="1"/>
-          <p:nvPr/>
-        </p:nvSpPr>
-        <p:spPr>
-          <a:xfrm>
-            <a:off x="640080" y="228600"/>
-            <a:ext cx="2743200" cy="457200"/>
-          </a:xfrm>
-          <a:prstGeom prst="rect">
-            <a:avLst/>
-          </a:prstGeom>
-          <a:noFill/>
-        </p:spPr>
-        <p:txBody>
-          <a:bodyPr wrap="none">
-            <a:spAutoFit/>
-          </a:bodyPr>
-          <a:lstStyle/>
-          <a:p>
-            <a:r>
-              <a:rPr sz="2000" b="1">
-                <a:solidFill>
-                  <a:srgbClr val="FFB799"/>
-                </a:solidFill>
-                <a:latin typeface="Microsoft YaHei"/>
-              </a:rPr>
-              <a:t>课后延伸</a:t>
-            </a:r>
-          </a:p>
-        </p:txBody>
-      </p:sp>
-      <p:sp>
-        <p:nvSpPr>
-          <p:cNvPr id="6" name="TextBox 5"/>
-          <p:cNvSpPr txBox="1"/>
-          <p:nvPr/>
-        </p:nvSpPr>
-        <p:spPr>
-          <a:xfrm>
-            <a:off x="640080" y="685800"/>
-            <a:ext cx="10515600" cy="914400"/>
-          </a:xfrm>
-          <a:prstGeom prst="rect">
-            <a:avLst/>
-          </a:prstGeom>
-          <a:noFill/>
-        </p:spPr>
-        <p:txBody>
-          <a:bodyPr wrap="none">
-            <a:spAutoFit/>
-          </a:bodyPr>
-          <a:lstStyle/>
-          <a:p>
-            <a:r>
-              <a:rPr sz="3600" b="1">
-                <a:solidFill>
-                  <a:srgbClr val="5A606E"/>
-                </a:solidFill>
-                <a:latin typeface="Microsoft YaHei"/>
-              </a:rPr>
-              <a:t>作业</a:t>
-            </a:r>
-          </a:p>
-        </p:txBody>
-      </p:sp>
-      <p:sp>
-        <p:nvSpPr>
-          <p:cNvPr id="7" name="TextBox 6"/>
-          <p:cNvSpPr txBox="1"/>
-          <p:nvPr/>
-        </p:nvSpPr>
-        <p:spPr>
-          <a:xfrm>
-            <a:off x="822960" y="1691640"/>
-            <a:ext cx="10241280" cy="4389120"/>
-          </a:xfrm>
-          <a:prstGeom prst="rect">
-            <a:avLst/>
-          </a:prstGeom>
-          <a:noFill/>
-        </p:spPr>
-        <p:txBody>
-          <a:bodyPr wrap="square" anchor="t">
-            <a:spAutoFit/>
-          </a:bodyPr>
-          <a:lstStyle/>
-          <a:p>
-            <a:pPr>
-              <a:spcAft>
-                <a:spcPts val="1600"/>
-              </a:spcAft>
-            </a:pPr>
-            <a:r>
-              <a:rPr sz="2600" b="1">
-                <a:solidFill>
-                  <a:srgbClr val="FFB799"/>
-                </a:solidFill>
-                <a:latin typeface="Microsoft YaHei"/>
-              </a:rPr>
-              <a:t>必做  </a:t>
-            </a:r>
-            <a:r>
-              <a:rPr sz="2600" b="0">
-                <a:solidFill>
-                  <a:srgbClr val="5A606E"/>
-                </a:solidFill>
-                <a:latin typeface="Microsoft YaHei"/>
-              </a:rPr>
-              <a:t>预习一篇课文，写100字以内梗概</a:t>
-            </a:r>
-          </a:p>
-          <a:p>
-            <a:pPr>
-              <a:spcAft>
-                <a:spcPts val="1600"/>
-              </a:spcAft>
-            </a:pPr>
-            <a:r>
-              <a:rPr sz="2600" b="1">
-                <a:solidFill>
-                  <a:srgbClr val="FFB799"/>
-                </a:solidFill>
-                <a:latin typeface="Microsoft YaHei"/>
-              </a:rPr>
-              <a:t>选做  </a:t>
-            </a:r>
-            <a:r>
-              <a:rPr sz="2600" b="0">
-                <a:solidFill>
-                  <a:srgbClr val="5A606E"/>
-                </a:solidFill>
-                <a:latin typeface="Microsoft YaHei"/>
-              </a:rPr>
-              <a:t>记录一个「如果……会怎样」的想象问题</a:t>
-            </a:r>
           </a:p>
         </p:txBody>
       </p:sp>
@@ -3596,17 +3445,17 @@
         </p:nvSpPr>
         <p:spPr>
           <a:xfrm>
-            <a:off x="0" y="0"/>
-            <a:ext cx="12191695" cy="6858000"/>
-          </a:xfrm>
-          <a:prstGeom prst="rect">
-            <a:avLst/>
-          </a:prstGeom>
-          <a:solidFill>
-            <a:srgbClr val="FCFAF7"/>
-          </a:solidFill>
-          <a:ln>
-            <a:noFill/>
+            <a:off x="292608" y="274320"/>
+            <a:ext cx="11594592" cy="6300216"/>
+          </a:xfrm>
+          <a:prstGeom prst="rect">
+            <a:avLst/>
+          </a:prstGeom>
+          <a:noFill/>
+          <a:ln w="31750">
+            <a:solidFill>
+              <a:srgbClr val="6482AA"/>
+            </a:solidFill>
           </a:ln>
         </p:spPr>
         <p:style>
@@ -3631,22 +3480,70 @@
           </a:p>
         </p:txBody>
       </p:sp>
-      <p:sp>
-        <p:nvSpPr>
-          <p:cNvPr id="4" name="Rectangle 3"/>
+      <p:pic>
+        <p:nvPicPr>
+          <p:cNvPr id="4" name="Picture 3" descr="corner_unit_tl.png"/>
+          <p:cNvPicPr>
+            <a:picLocks noChangeAspect="1"/>
+          </p:cNvPicPr>
+          <p:nvPr/>
+        </p:nvPicPr>
+        <p:blipFill>
+          <a:blip r:embed="rId3"/>
+          <a:stretch>
+            <a:fillRect/>
+          </a:stretch>
+        </p:blipFill>
+        <p:spPr>
+          <a:xfrm>
+            <a:off x="-45720" y="-45720"/>
+            <a:ext cx="2011680" cy="2011680"/>
+          </a:xfrm>
+          <a:prstGeom prst="rect">
+            <a:avLst/>
+          </a:prstGeom>
+        </p:spPr>
+      </p:pic>
+      <p:pic>
+        <p:nvPicPr>
+          <p:cNvPr id="5" name="Picture 4" descr="corner_unit_tr.png"/>
+          <p:cNvPicPr>
+            <a:picLocks noChangeAspect="1"/>
+          </p:cNvPicPr>
+          <p:nvPr/>
+        </p:nvPicPr>
+        <p:blipFill>
+          <a:blip r:embed="rId4"/>
+          <a:stretch>
+            <a:fillRect/>
+          </a:stretch>
+        </p:blipFill>
+        <p:spPr>
+          <a:xfrm>
+            <a:off x="9875520" y="-45720"/>
+            <a:ext cx="2011680" cy="2011680"/>
+          </a:xfrm>
+          <a:prstGeom prst="rect">
+            <a:avLst/>
+          </a:prstGeom>
+        </p:spPr>
+      </p:pic>
+      <p:sp>
+        <p:nvSpPr>
+          <p:cNvPr id="6" name="Rounded Rectangle 5"/>
           <p:cNvSpPr/>
           <p:nvPr/>
         </p:nvSpPr>
         <p:spPr>
           <a:xfrm>
-            <a:off x="0" y="0"/>
-            <a:ext cx="12191695" cy="91440"/>
-          </a:xfrm>
-          <a:prstGeom prst="rect">
+            <a:off x="4953304" y="502920"/>
+            <a:ext cx="2286000" cy="411480"/>
+          </a:xfrm>
+          <a:prstGeom prst="roundRect">
             <a:avLst/>
           </a:prstGeom>
           <a:solidFill>
-            <a:srgbClr val="A4B4C4"/>
+            <a:srgbClr val="A0BEDC"/>
           </a:solidFill>
           <a:ln>
             <a:noFill/>
@@ -3676,14 +3573,14 @@
       </p:sp>
       <p:sp>
         <p:nvSpPr>
-          <p:cNvPr id="5" name="TextBox 4"/>
+          <p:cNvPr id="7" name="TextBox 6"/>
           <p:cNvSpPr txBox="1"/>
           <p:nvPr/>
         </p:nvSpPr>
         <p:spPr>
           <a:xfrm>
-            <a:off x="640080" y="228600"/>
-            <a:ext cx="2743200" cy="457200"/>
+            <a:off x="4953304" y="521208"/>
+            <a:ext cx="2286000" cy="384048"/>
           </a:xfrm>
           <a:prstGeom prst="rect">
             <a:avLst/>
@@ -3696,10 +3593,15 @@
           </a:bodyPr>
           <a:lstStyle/>
           <a:p>
-            <a:r>
-              <a:rPr sz="2000" b="1">
+            <a:pPr algn="ctr">
+              <a:spcAft>
+                <a:spcPts val="1000"/>
+              </a:spcAft>
+            </a:pPr>
+            <a:r>
+              <a:rPr sz="1800" b="1">
                 <a:solidFill>
-                  <a:srgbClr val="A4B4C4"/>
+                  <a:srgbClr val="323C50"/>
                 </a:solidFill>
                 <a:latin typeface="Microsoft YaHei"/>
               </a:rPr>
@@ -3710,14 +3612,14 @@
       </p:sp>
       <p:sp>
         <p:nvSpPr>
-          <p:cNvPr id="6" name="TextBox 5"/>
+          <p:cNvPr id="8" name="TextBox 7"/>
           <p:cNvSpPr txBox="1"/>
           <p:nvPr/>
         </p:nvSpPr>
         <p:spPr>
           <a:xfrm>
-            <a:off x="640080" y="685800"/>
-            <a:ext cx="10515600" cy="914400"/>
+            <a:off x="1371600" y="960120"/>
+            <a:ext cx="9418320" cy="822960"/>
           </a:xfrm>
           <a:prstGeom prst="rect">
             <a:avLst/>
@@ -3725,15 +3627,20 @@
           <a:noFill/>
         </p:spPr>
         <p:txBody>
-          <a:bodyPr wrap="none">
+          <a:bodyPr wrap="square">
             <a:spAutoFit/>
           </a:bodyPr>
           <a:lstStyle/>
           <a:p>
+            <a:pPr algn="ctr">
+              <a:spcAft>
+                <a:spcPts val="1000"/>
+              </a:spcAft>
+            </a:pPr>
             <a:r>
               <a:rPr sz="3600" b="1">
                 <a:solidFill>
-                  <a:srgbClr val="5A606E"/>
+                  <a:srgbClr val="4678B4"/>
                 </a:solidFill>
                 <a:latin typeface="Microsoft YaHei"/>
               </a:rPr>
@@ -3744,14 +3651,145 @@
       </p:sp>
       <p:sp>
         <p:nvSpPr>
-          <p:cNvPr id="7" name="TextBox 6"/>
+          <p:cNvPr id="9" name="Rectangle 8"/>
+          <p:cNvSpPr/>
+          <p:nvPr/>
+        </p:nvSpPr>
+        <p:spPr>
+          <a:xfrm>
+            <a:off x="3200400" y="1600200"/>
+            <a:ext cx="5760720" cy="27432"/>
+          </a:xfrm>
+          <a:prstGeom prst="rect">
+            <a:avLst/>
+          </a:prstGeom>
+          <a:solidFill>
+            <a:srgbClr val="A0BEDC"/>
+          </a:solidFill>
+          <a:ln>
+            <a:noFill/>
+          </a:ln>
+        </p:spPr>
+        <p:style>
+          <a:lnRef idx="1">
+            <a:schemeClr val="accent1"/>
+          </a:lnRef>
+          <a:fillRef idx="3">
+            <a:schemeClr val="accent1"/>
+          </a:fillRef>
+          <a:effectRef idx="2">
+            <a:schemeClr val="accent1"/>
+          </a:effectRef>
+          <a:fontRef idx="minor">
+            <a:schemeClr val="lt1"/>
+          </a:fontRef>
+        </p:style>
+        <p:txBody>
+          <a:bodyPr rtlCol="0" anchor="ctr"/>
+          <a:lstStyle/>
+          <a:p>
+            <a:pPr algn="ctr"/>
+          </a:p>
+        </p:txBody>
+      </p:sp>
+      <p:sp>
+        <p:nvSpPr>
+          <p:cNvPr id="10" name="Rounded Rectangle 9"/>
+          <p:cNvSpPr/>
+          <p:nvPr/>
+        </p:nvSpPr>
+        <p:spPr>
+          <a:xfrm>
+            <a:off x="1295704" y="1645920"/>
+            <a:ext cx="9601200" cy="2240280"/>
+          </a:xfrm>
+          <a:prstGeom prst="roundRect">
+            <a:avLst/>
+          </a:prstGeom>
+          <a:solidFill>
+            <a:srgbClr val="F8FAFF"/>
+          </a:solidFill>
+          <a:ln w="19050">
+            <a:solidFill>
+              <a:srgbClr val="A0BEDC"/>
+            </a:solidFill>
+          </a:ln>
+        </p:spPr>
+        <p:style>
+          <a:lnRef idx="1">
+            <a:schemeClr val="accent1"/>
+          </a:lnRef>
+          <a:fillRef idx="3">
+            <a:schemeClr val="accent1"/>
+          </a:fillRef>
+          <a:effectRef idx="2">
+            <a:schemeClr val="accent1"/>
+          </a:effectRef>
+          <a:fontRef idx="minor">
+            <a:schemeClr val="lt1"/>
+          </a:fontRef>
+        </p:style>
+        <p:txBody>
+          <a:bodyPr rtlCol="0" anchor="ctr"/>
+          <a:lstStyle/>
+          <a:p>
+            <a:pPr algn="ctr"/>
+          </a:p>
+        </p:txBody>
+      </p:sp>
+      <p:sp>
+        <p:nvSpPr>
+          <p:cNvPr id="11" name="Oval 10"/>
+          <p:cNvSpPr/>
+          <p:nvPr/>
+        </p:nvSpPr>
+        <p:spPr>
+          <a:xfrm>
+            <a:off x="2255824" y="1828800"/>
+            <a:ext cx="384048" cy="384048"/>
+          </a:xfrm>
+          <a:prstGeom prst="ellipse">
+            <a:avLst/>
+          </a:prstGeom>
+          <a:solidFill>
+            <a:srgbClr val="4678B4"/>
+          </a:solidFill>
+          <a:ln>
+            <a:noFill/>
+          </a:ln>
+        </p:spPr>
+        <p:style>
+          <a:lnRef idx="1">
+            <a:schemeClr val="accent1"/>
+          </a:lnRef>
+          <a:fillRef idx="3">
+            <a:schemeClr val="accent1"/>
+          </a:fillRef>
+          <a:effectRef idx="2">
+            <a:schemeClr val="accent1"/>
+          </a:effectRef>
+          <a:fontRef idx="minor">
+            <a:schemeClr val="lt1"/>
+          </a:fontRef>
+        </p:style>
+        <p:txBody>
+          <a:bodyPr rtlCol="0" anchor="ctr"/>
+          <a:lstStyle/>
+          <a:p>
+            <a:pPr algn="ctr"/>
+          </a:p>
+        </p:txBody>
+      </p:sp>
+      <p:sp>
+        <p:nvSpPr>
+          <p:cNvPr id="12" name="TextBox 11"/>
           <p:cNvSpPr txBox="1"/>
           <p:nvPr/>
         </p:nvSpPr>
         <p:spPr>
           <a:xfrm>
-            <a:off x="822960" y="1691640"/>
-            <a:ext cx="10241280" cy="4389120"/>
+            <a:off x="2255824" y="1847088"/>
+            <a:ext cx="384048" cy="365760"/>
           </a:xfrm>
           <a:prstGeom prst="rect">
             <a:avLst/>
@@ -3759,58 +3797,305 @@
           <a:noFill/>
         </p:spPr>
         <p:txBody>
-          <a:bodyPr wrap="square" anchor="t">
+          <a:bodyPr wrap="none">
             <a:spAutoFit/>
           </a:bodyPr>
           <a:lstStyle/>
           <a:p>
-            <a:pPr>
+            <a:pPr algn="ctr">
               <a:spcAft>
-                <a:spcPts val="1600"/>
+                <a:spcPts val="1000"/>
               </a:spcAft>
             </a:pPr>
             <a:r>
-              <a:rPr sz="2600" b="1">
+              <a:rPr sz="1600" b="1">
                 <a:solidFill>
-                  <a:srgbClr val="A4B4C4"/>
+                  <a:srgbClr val="FFFFFF"/>
                 </a:solidFill>
                 <a:latin typeface="Microsoft YaHei"/>
               </a:rPr>
-              <a:t>目标1  </a:t>
-            </a:r>
-            <a:r>
-              <a:rPr sz="2600" b="0">
+              <a:t>1</a:t>
+            </a:r>
+          </a:p>
+        </p:txBody>
+      </p:sp>
+      <p:sp>
+        <p:nvSpPr>
+          <p:cNvPr id="13" name="TextBox 12"/>
+          <p:cNvSpPr txBox="1"/>
+          <p:nvPr/>
+        </p:nvSpPr>
+        <p:spPr>
+          <a:xfrm>
+            <a:off x="2758744" y="1810512"/>
+            <a:ext cx="7772400" cy="502920"/>
+          </a:xfrm>
+          <a:prstGeom prst="rect">
+            <a:avLst/>
+          </a:prstGeom>
+          <a:noFill/>
+        </p:spPr>
+        <p:txBody>
+          <a:bodyPr wrap="none">
+            <a:spAutoFit/>
+          </a:bodyPr>
+          <a:lstStyle/>
+          <a:p>
+            <a:pPr algn="l">
+              <a:spcAft>
+                <a:spcPts val="1000"/>
+              </a:spcAft>
+            </a:pPr>
+            <a:r>
+              <a:rPr sz="2400" b="0">
                 <a:solidFill>
-                  <a:srgbClr val="5A606E"/>
+                  <a:srgbClr val="323C50"/>
                 </a:solidFill>
                 <a:latin typeface="Microsoft YaHei"/>
               </a:rPr>
               <a:t>感知单元学习目标、文体类型与挑战任务</a:t>
             </a:r>
           </a:p>
-          <a:p>
-            <a:pPr>
+        </p:txBody>
+      </p:sp>
+      <p:sp>
+        <p:nvSpPr>
+          <p:cNvPr id="14" name="Oval 13"/>
+          <p:cNvSpPr/>
+          <p:nvPr/>
+        </p:nvSpPr>
+        <p:spPr>
+          <a:xfrm>
+            <a:off x="2255824" y="2395728"/>
+            <a:ext cx="384048" cy="384048"/>
+          </a:xfrm>
+          <a:prstGeom prst="ellipse">
+            <a:avLst/>
+          </a:prstGeom>
+          <a:solidFill>
+            <a:srgbClr val="4678B4"/>
+          </a:solidFill>
+          <a:ln>
+            <a:noFill/>
+          </a:ln>
+        </p:spPr>
+        <p:style>
+          <a:lnRef idx="1">
+            <a:schemeClr val="accent1"/>
+          </a:lnRef>
+          <a:fillRef idx="3">
+            <a:schemeClr val="accent1"/>
+          </a:fillRef>
+          <a:effectRef idx="2">
+            <a:schemeClr val="accent1"/>
+          </a:effectRef>
+          <a:fontRef idx="minor">
+            <a:schemeClr val="lt1"/>
+          </a:fontRef>
+        </p:style>
+        <p:txBody>
+          <a:bodyPr rtlCol="0" anchor="ctr"/>
+          <a:lstStyle/>
+          <a:p>
+            <a:pPr algn="ctr"/>
+          </a:p>
+        </p:txBody>
+      </p:sp>
+      <p:sp>
+        <p:nvSpPr>
+          <p:cNvPr id="15" name="TextBox 14"/>
+          <p:cNvSpPr txBox="1"/>
+          <p:nvPr/>
+        </p:nvSpPr>
+        <p:spPr>
+          <a:xfrm>
+            <a:off x="2255824" y="2414016"/>
+            <a:ext cx="384048" cy="365760"/>
+          </a:xfrm>
+          <a:prstGeom prst="rect">
+            <a:avLst/>
+          </a:prstGeom>
+          <a:noFill/>
+        </p:spPr>
+        <p:txBody>
+          <a:bodyPr wrap="none">
+            <a:spAutoFit/>
+          </a:bodyPr>
+          <a:lstStyle/>
+          <a:p>
+            <a:pPr algn="ctr">
               <a:spcAft>
-                <a:spcPts val="1600"/>
+                <a:spcPts val="1000"/>
               </a:spcAft>
             </a:pPr>
             <a:r>
-              <a:rPr sz="2600" b="1">
+              <a:rPr sz="1600" b="1">
                 <a:solidFill>
-                  <a:srgbClr val="A4B4C4"/>
+                  <a:srgbClr val="FFFFFF"/>
                 </a:solidFill>
                 <a:latin typeface="Microsoft YaHei"/>
               </a:rPr>
-              <a:t>目标2  </a:t>
-            </a:r>
-            <a:r>
-              <a:rPr sz="2600" b="0">
+              <a:t>2</a:t>
+            </a:r>
+          </a:p>
+        </p:txBody>
+      </p:sp>
+      <p:sp>
+        <p:nvSpPr>
+          <p:cNvPr id="16" name="TextBox 15"/>
+          <p:cNvSpPr txBox="1"/>
+          <p:nvPr/>
+        </p:nvSpPr>
+        <p:spPr>
+          <a:xfrm>
+            <a:off x="2758744" y="2377440"/>
+            <a:ext cx="7772400" cy="502920"/>
+          </a:xfrm>
+          <a:prstGeom prst="rect">
+            <a:avLst/>
+          </a:prstGeom>
+          <a:noFill/>
+        </p:spPr>
+        <p:txBody>
+          <a:bodyPr wrap="none">
+            <a:spAutoFit/>
+          </a:bodyPr>
+          <a:lstStyle/>
+          <a:p>
+            <a:pPr algn="l">
+              <a:spcAft>
+                <a:spcPts val="1000"/>
+              </a:spcAft>
+            </a:pPr>
+            <a:r>
+              <a:rPr sz="2400" b="0">
                 <a:solidFill>
-                  <a:srgbClr val="5A606E"/>
+                  <a:srgbClr val="323C50"/>
                 </a:solidFill>
                 <a:latin typeface="Microsoft YaHei"/>
               </a:rPr>
-              <a:t>快速默读，用关键词概括情节</a:t>
+              <a:t>快速默读，用关键词和情节节点概括故事</a:t>
+            </a:r>
+          </a:p>
+        </p:txBody>
+      </p:sp>
+      <p:sp>
+        <p:nvSpPr>
+          <p:cNvPr id="17" name="Oval 16"/>
+          <p:cNvSpPr/>
+          <p:nvPr/>
+        </p:nvSpPr>
+        <p:spPr>
+          <a:xfrm>
+            <a:off x="2255824" y="2962656"/>
+            <a:ext cx="384048" cy="384048"/>
+          </a:xfrm>
+          <a:prstGeom prst="ellipse">
+            <a:avLst/>
+          </a:prstGeom>
+          <a:solidFill>
+            <a:srgbClr val="4678B4"/>
+          </a:solidFill>
+          <a:ln>
+            <a:noFill/>
+          </a:ln>
+        </p:spPr>
+        <p:style>
+          <a:lnRef idx="1">
+            <a:schemeClr val="accent1"/>
+          </a:lnRef>
+          <a:fillRef idx="3">
+            <a:schemeClr val="accent1"/>
+          </a:fillRef>
+          <a:effectRef idx="2">
+            <a:schemeClr val="accent1"/>
+          </a:effectRef>
+          <a:fontRef idx="minor">
+            <a:schemeClr val="lt1"/>
+          </a:fontRef>
+        </p:style>
+        <p:txBody>
+          <a:bodyPr rtlCol="0" anchor="ctr"/>
+          <a:lstStyle/>
+          <a:p>
+            <a:pPr algn="ctr"/>
+          </a:p>
+        </p:txBody>
+      </p:sp>
+      <p:sp>
+        <p:nvSpPr>
+          <p:cNvPr id="18" name="TextBox 17"/>
+          <p:cNvSpPr txBox="1"/>
+          <p:nvPr/>
+        </p:nvSpPr>
+        <p:spPr>
+          <a:xfrm>
+            <a:off x="2255824" y="2980944"/>
+            <a:ext cx="384048" cy="365760"/>
+          </a:xfrm>
+          <a:prstGeom prst="rect">
+            <a:avLst/>
+          </a:prstGeom>
+          <a:noFill/>
+        </p:spPr>
+        <p:txBody>
+          <a:bodyPr wrap="none">
+            <a:spAutoFit/>
+          </a:bodyPr>
+          <a:lstStyle/>
+          <a:p>
+            <a:pPr algn="ctr">
+              <a:spcAft>
+                <a:spcPts val="1000"/>
+              </a:spcAft>
+            </a:pPr>
+            <a:r>
+              <a:rPr sz="1600" b="1">
+                <a:solidFill>
+                  <a:srgbClr val="FFFFFF"/>
+                </a:solidFill>
+                <a:latin typeface="Microsoft YaHei"/>
+              </a:rPr>
+              <a:t>3</a:t>
+            </a:r>
+          </a:p>
+        </p:txBody>
+      </p:sp>
+      <p:sp>
+        <p:nvSpPr>
+          <p:cNvPr id="19" name="TextBox 18"/>
+          <p:cNvSpPr txBox="1"/>
+          <p:nvPr/>
+        </p:nvSpPr>
+        <p:spPr>
+          <a:xfrm>
+            <a:off x="2758744" y="2944368"/>
+            <a:ext cx="7772400" cy="502920"/>
+          </a:xfrm>
+          <a:prstGeom prst="rect">
+            <a:avLst/>
+          </a:prstGeom>
+          <a:noFill/>
+        </p:spPr>
+        <p:txBody>
+          <a:bodyPr wrap="none">
+            <a:spAutoFit/>
+          </a:bodyPr>
+          <a:lstStyle/>
+          <a:p>
+            <a:pPr algn="l">
+              <a:spcAft>
+                <a:spcPts val="1000"/>
+              </a:spcAft>
+            </a:pPr>
+            <a:r>
+              <a:rPr sz="2400" b="0">
+                <a:solidFill>
+                  <a:srgbClr val="323C50"/>
+                </a:solidFill>
+                <a:latin typeface="Microsoft YaHei"/>
+              </a:rPr>
+              <a:t>每分钟阅读不少于400字</a:t>
             </a:r>
           </a:p>
         </p:txBody>
@@ -3865,17 +4150,17 @@
         </p:nvSpPr>
         <p:spPr>
           <a:xfrm>
-            <a:off x="0" y="0"/>
-            <a:ext cx="12191695" cy="6858000"/>
-          </a:xfrm>
-          <a:prstGeom prst="rect">
-            <a:avLst/>
-          </a:prstGeom>
-          <a:solidFill>
-            <a:srgbClr val="FCFAF7"/>
-          </a:solidFill>
-          <a:ln>
-            <a:noFill/>
+            <a:off x="292608" y="274320"/>
+            <a:ext cx="11594592" cy="6300216"/>
+          </a:xfrm>
+          <a:prstGeom prst="rect">
+            <a:avLst/>
+          </a:prstGeom>
+          <a:noFill/>
+          <a:ln w="31750">
+            <a:solidFill>
+              <a:srgbClr val="6482AA"/>
+            </a:solidFill>
           </a:ln>
         </p:spPr>
         <p:style>
@@ -3900,22 +4185,70 @@
           </a:p>
         </p:txBody>
       </p:sp>
-      <p:sp>
-        <p:nvSpPr>
-          <p:cNvPr id="4" name="Rectangle 3"/>
+      <p:pic>
+        <p:nvPicPr>
+          <p:cNvPr id="4" name="Picture 3" descr="corner_unit_tl.png"/>
+          <p:cNvPicPr>
+            <a:picLocks noChangeAspect="1"/>
+          </p:cNvPicPr>
+          <p:nvPr/>
+        </p:nvPicPr>
+        <p:blipFill>
+          <a:blip r:embed="rId3"/>
+          <a:stretch>
+            <a:fillRect/>
+          </a:stretch>
+        </p:blipFill>
+        <p:spPr>
+          <a:xfrm>
+            <a:off x="-45720" y="-45720"/>
+            <a:ext cx="2011680" cy="2011680"/>
+          </a:xfrm>
+          <a:prstGeom prst="rect">
+            <a:avLst/>
+          </a:prstGeom>
+        </p:spPr>
+      </p:pic>
+      <p:pic>
+        <p:nvPicPr>
+          <p:cNvPr id="5" name="Picture 4" descr="corner_unit_tr.png"/>
+          <p:cNvPicPr>
+            <a:picLocks noChangeAspect="1"/>
+          </p:cNvPicPr>
+          <p:nvPr/>
+        </p:nvPicPr>
+        <p:blipFill>
+          <a:blip r:embed="rId4"/>
+          <a:stretch>
+            <a:fillRect/>
+          </a:stretch>
+        </p:blipFill>
+        <p:spPr>
+          <a:xfrm>
+            <a:off x="9875520" y="-45720"/>
+            <a:ext cx="2011680" cy="2011680"/>
+          </a:xfrm>
+          <a:prstGeom prst="rect">
+            <a:avLst/>
+          </a:prstGeom>
+        </p:spPr>
+      </p:pic>
+      <p:sp>
+        <p:nvSpPr>
+          <p:cNvPr id="6" name="Rounded Rectangle 5"/>
           <p:cNvSpPr/>
           <p:nvPr/>
         </p:nvSpPr>
         <p:spPr>
           <a:xfrm>
-            <a:off x="0" y="0"/>
-            <a:ext cx="12191695" cy="91440"/>
-          </a:xfrm>
-          <a:prstGeom prst="rect">
+            <a:off x="4953304" y="502920"/>
+            <a:ext cx="2286000" cy="411480"/>
+          </a:xfrm>
+          <a:prstGeom prst="roundRect">
             <a:avLst/>
           </a:prstGeom>
           <a:solidFill>
-            <a:srgbClr val="FF7F66"/>
+            <a:srgbClr val="A0BEDC"/>
           </a:solidFill>
           <a:ln>
             <a:noFill/>
@@ -3945,14 +4278,14 @@
       </p:sp>
       <p:sp>
         <p:nvSpPr>
-          <p:cNvPr id="5" name="TextBox 4"/>
+          <p:cNvPr id="7" name="TextBox 6"/>
           <p:cNvSpPr txBox="1"/>
           <p:nvPr/>
         </p:nvSpPr>
         <p:spPr>
           <a:xfrm>
-            <a:off x="640080" y="228600"/>
-            <a:ext cx="2743200" cy="457200"/>
+            <a:off x="4953304" y="521208"/>
+            <a:ext cx="2286000" cy="384048"/>
           </a:xfrm>
           <a:prstGeom prst="rect">
             <a:avLst/>
@@ -3965,10 +4298,15 @@
           </a:bodyPr>
           <a:lstStyle/>
           <a:p>
-            <a:r>
-              <a:rPr sz="2000" b="1">
+            <a:pPr algn="ctr">
+              <a:spcAft>
+                <a:spcPts val="1000"/>
+              </a:spcAft>
+            </a:pPr>
+            <a:r>
+              <a:rPr sz="1800" b="1">
                 <a:solidFill>
-                  <a:srgbClr val="FF7F66"/>
+                  <a:srgbClr val="323C50"/>
                 </a:solidFill>
                 <a:latin typeface="Microsoft YaHei"/>
               </a:rPr>
@@ -3979,14 +4317,184 @@
       </p:sp>
       <p:sp>
         <p:nvSpPr>
-          <p:cNvPr id="6" name="TextBox 5"/>
+          <p:cNvPr id="8" name="TextBox 7"/>
           <p:cNvSpPr txBox="1"/>
           <p:nvPr/>
         </p:nvSpPr>
         <p:spPr>
           <a:xfrm>
-            <a:off x="640080" y="685800"/>
-            <a:ext cx="10515600" cy="914400"/>
+            <a:off x="1371600" y="960120"/>
+            <a:ext cx="9418320" cy="822960"/>
+          </a:xfrm>
+          <a:prstGeom prst="rect">
+            <a:avLst/>
+          </a:prstGeom>
+          <a:noFill/>
+        </p:spPr>
+        <p:txBody>
+          <a:bodyPr wrap="square">
+            <a:spAutoFit/>
+          </a:bodyPr>
+          <a:lstStyle/>
+          <a:p>
+            <a:pPr algn="ctr">
+              <a:spcAft>
+                <a:spcPts val="1000"/>
+              </a:spcAft>
+            </a:pPr>
+            <a:r>
+              <a:rPr sz="3600" b="1">
+                <a:solidFill>
+                  <a:srgbClr val="4678B4"/>
+                </a:solidFill>
+                <a:latin typeface="Microsoft YaHei"/>
+              </a:rPr>
+              <a:t>大任务</a:t>
+            </a:r>
+          </a:p>
+        </p:txBody>
+      </p:sp>
+      <p:sp>
+        <p:nvSpPr>
+          <p:cNvPr id="9" name="Rectangle 8"/>
+          <p:cNvSpPr/>
+          <p:nvPr/>
+        </p:nvSpPr>
+        <p:spPr>
+          <a:xfrm>
+            <a:off x="3200400" y="1600200"/>
+            <a:ext cx="5760720" cy="27432"/>
+          </a:xfrm>
+          <a:prstGeom prst="rect">
+            <a:avLst/>
+          </a:prstGeom>
+          <a:solidFill>
+            <a:srgbClr val="A0BEDC"/>
+          </a:solidFill>
+          <a:ln>
+            <a:noFill/>
+          </a:ln>
+        </p:spPr>
+        <p:style>
+          <a:lnRef idx="1">
+            <a:schemeClr val="accent1"/>
+          </a:lnRef>
+          <a:fillRef idx="3">
+            <a:schemeClr val="accent1"/>
+          </a:fillRef>
+          <a:effectRef idx="2">
+            <a:schemeClr val="accent1"/>
+          </a:effectRef>
+          <a:fontRef idx="minor">
+            <a:schemeClr val="lt1"/>
+          </a:fontRef>
+        </p:style>
+        <p:txBody>
+          <a:bodyPr rtlCol="0" anchor="ctr"/>
+          <a:lstStyle/>
+          <a:p>
+            <a:pPr algn="ctr"/>
+          </a:p>
+        </p:txBody>
+      </p:sp>
+      <p:sp>
+        <p:nvSpPr>
+          <p:cNvPr id="10" name="Rounded Rectangle 9"/>
+          <p:cNvSpPr/>
+          <p:nvPr/>
+        </p:nvSpPr>
+        <p:spPr>
+          <a:xfrm>
+            <a:off x="1295704" y="1645920"/>
+            <a:ext cx="9601200" cy="2240280"/>
+          </a:xfrm>
+          <a:prstGeom prst="roundRect">
+            <a:avLst/>
+          </a:prstGeom>
+          <a:solidFill>
+            <a:srgbClr val="F8FAFF"/>
+          </a:solidFill>
+          <a:ln w="19050">
+            <a:solidFill>
+              <a:srgbClr val="A0BEDC"/>
+            </a:solidFill>
+          </a:ln>
+        </p:spPr>
+        <p:style>
+          <a:lnRef idx="1">
+            <a:schemeClr val="accent1"/>
+          </a:lnRef>
+          <a:fillRef idx="3">
+            <a:schemeClr val="accent1"/>
+          </a:fillRef>
+          <a:effectRef idx="2">
+            <a:schemeClr val="accent1"/>
+          </a:effectRef>
+          <a:fontRef idx="minor">
+            <a:schemeClr val="lt1"/>
+          </a:fontRef>
+        </p:style>
+        <p:txBody>
+          <a:bodyPr rtlCol="0" anchor="ctr"/>
+          <a:lstStyle/>
+          <a:p>
+            <a:pPr algn="ctr"/>
+          </a:p>
+        </p:txBody>
+      </p:sp>
+      <p:sp>
+        <p:nvSpPr>
+          <p:cNvPr id="11" name="Oval 10"/>
+          <p:cNvSpPr/>
+          <p:nvPr/>
+        </p:nvSpPr>
+        <p:spPr>
+          <a:xfrm>
+            <a:off x="2255824" y="1828800"/>
+            <a:ext cx="384048" cy="384048"/>
+          </a:xfrm>
+          <a:prstGeom prst="ellipse">
+            <a:avLst/>
+          </a:prstGeom>
+          <a:solidFill>
+            <a:srgbClr val="4678B4"/>
+          </a:solidFill>
+          <a:ln>
+            <a:noFill/>
+          </a:ln>
+        </p:spPr>
+        <p:style>
+          <a:lnRef idx="1">
+            <a:schemeClr val="accent1"/>
+          </a:lnRef>
+          <a:fillRef idx="3">
+            <a:schemeClr val="accent1"/>
+          </a:fillRef>
+          <a:effectRef idx="2">
+            <a:schemeClr val="accent1"/>
+          </a:effectRef>
+          <a:fontRef idx="minor">
+            <a:schemeClr val="lt1"/>
+          </a:fontRef>
+        </p:style>
+        <p:txBody>
+          <a:bodyPr rtlCol="0" anchor="ctr"/>
+          <a:lstStyle/>
+          <a:p>
+            <a:pPr algn="ctr"/>
+          </a:p>
+        </p:txBody>
+      </p:sp>
+      <p:sp>
+        <p:nvSpPr>
+          <p:cNvPr id="12" name="TextBox 11"/>
+          <p:cNvSpPr txBox="1"/>
+          <p:nvPr/>
+        </p:nvSpPr>
+        <p:spPr>
+          <a:xfrm>
+            <a:off x="2255824" y="1847088"/>
+            <a:ext cx="384048" cy="365760"/>
           </a:xfrm>
           <a:prstGeom prst="rect">
             <a:avLst/>
@@ -3999,28 +4507,33 @@
           </a:bodyPr>
           <a:lstStyle/>
           <a:p>
-            <a:r>
-              <a:rPr sz="3600" b="1">
+            <a:pPr algn="ctr">
+              <a:spcAft>
+                <a:spcPts val="1000"/>
+              </a:spcAft>
+            </a:pPr>
+            <a:r>
+              <a:rPr sz="1600" b="1">
                 <a:solidFill>
-                  <a:srgbClr val="5A606E"/>
+                  <a:srgbClr val="FFFFFF"/>
                 </a:solidFill>
                 <a:latin typeface="Microsoft YaHei"/>
               </a:rPr>
-              <a:t>大任务：想象力博物馆</a:t>
-            </a:r>
-          </a:p>
-        </p:txBody>
-      </p:sp>
-      <p:sp>
-        <p:nvSpPr>
-          <p:cNvPr id="7" name="TextBox 6"/>
+              <a:t>1</a:t>
+            </a:r>
+          </a:p>
+        </p:txBody>
+      </p:sp>
+      <p:sp>
+        <p:nvSpPr>
+          <p:cNvPr id="13" name="TextBox 12"/>
           <p:cNvSpPr txBox="1"/>
           <p:nvPr/>
         </p:nvSpPr>
         <p:spPr>
           <a:xfrm>
-            <a:off x="822960" y="1691640"/>
-            <a:ext cx="10241280" cy="4389120"/>
+            <a:off x="2758744" y="1810512"/>
+            <a:ext cx="7772400" cy="502920"/>
           </a:xfrm>
           <a:prstGeom prst="rect">
             <a:avLst/>
@@ -4028,56 +4541,266 @@
           <a:noFill/>
         </p:spPr>
         <p:txBody>
-          <a:bodyPr wrap="square" anchor="t">
+          <a:bodyPr wrap="none">
             <a:spAutoFit/>
           </a:bodyPr>
           <a:lstStyle/>
           <a:p>
-            <a:pPr>
+            <a:pPr algn="l">
               <a:spcAft>
-                <a:spcPts val="1600"/>
+                <a:spcPts val="1000"/>
               </a:spcAft>
             </a:pPr>
             <a:r>
-              <a:rPr sz="2800" b="0">
+              <a:rPr sz="2400" b="0">
                 <a:solidFill>
-                  <a:srgbClr val="5A606E"/>
+                  <a:srgbClr val="323C50"/>
                 </a:solidFill>
                 <a:latin typeface="Microsoft YaHei"/>
               </a:rPr>
-              <a:t>校园文学社微展览，你是策展人</a:t>
-            </a:r>
-          </a:p>
-          <a:p>
-            <a:pPr>
+              <a:t>校园文学社举办「想象力博物馆」微展览</a:t>
+            </a:r>
+          </a:p>
+        </p:txBody>
+      </p:sp>
+      <p:sp>
+        <p:nvSpPr>
+          <p:cNvPr id="14" name="Oval 13"/>
+          <p:cNvSpPr/>
+          <p:nvPr/>
+        </p:nvSpPr>
+        <p:spPr>
+          <a:xfrm>
+            <a:off x="2255824" y="2395728"/>
+            <a:ext cx="384048" cy="384048"/>
+          </a:xfrm>
+          <a:prstGeom prst="ellipse">
+            <a:avLst/>
+          </a:prstGeom>
+          <a:solidFill>
+            <a:srgbClr val="4678B4"/>
+          </a:solidFill>
+          <a:ln>
+            <a:noFill/>
+          </a:ln>
+        </p:spPr>
+        <p:style>
+          <a:lnRef idx="1">
+            <a:schemeClr val="accent1"/>
+          </a:lnRef>
+          <a:fillRef idx="3">
+            <a:schemeClr val="accent1"/>
+          </a:fillRef>
+          <a:effectRef idx="2">
+            <a:schemeClr val="accent1"/>
+          </a:effectRef>
+          <a:fontRef idx="minor">
+            <a:schemeClr val="lt1"/>
+          </a:fontRef>
+        </p:style>
+        <p:txBody>
+          <a:bodyPr rtlCol="0" anchor="ctr"/>
+          <a:lstStyle/>
+          <a:p>
+            <a:pPr algn="ctr"/>
+          </a:p>
+        </p:txBody>
+      </p:sp>
+      <p:sp>
+        <p:nvSpPr>
+          <p:cNvPr id="15" name="TextBox 14"/>
+          <p:cNvSpPr txBox="1"/>
+          <p:nvPr/>
+        </p:nvSpPr>
+        <p:spPr>
+          <a:xfrm>
+            <a:off x="2255824" y="2414016"/>
+            <a:ext cx="384048" cy="365760"/>
+          </a:xfrm>
+          <a:prstGeom prst="rect">
+            <a:avLst/>
+          </a:prstGeom>
+          <a:noFill/>
+        </p:spPr>
+        <p:txBody>
+          <a:bodyPr wrap="none">
+            <a:spAutoFit/>
+          </a:bodyPr>
+          <a:lstStyle/>
+          <a:p>
+            <a:pPr algn="ctr">
               <a:spcAft>
-                <a:spcPts val="1600"/>
+                <a:spcPts val="1000"/>
               </a:spcAft>
             </a:pPr>
             <a:r>
-              <a:rPr sz="2800" b="0">
+              <a:rPr sz="1600" b="1">
                 <a:solidFill>
-                  <a:srgbClr val="5A606E"/>
+                  <a:srgbClr val="FFFFFF"/>
                 </a:solidFill>
                 <a:latin typeface="Microsoft YaHei"/>
               </a:rPr>
-              <a:t>制作「想象说明卡」</a:t>
-            </a:r>
-          </a:p>
-          <a:p>
-            <a:pPr>
+              <a:t>2</a:t>
+            </a:r>
+          </a:p>
+        </p:txBody>
+      </p:sp>
+      <p:sp>
+        <p:nvSpPr>
+          <p:cNvPr id="16" name="TextBox 15"/>
+          <p:cNvSpPr txBox="1"/>
+          <p:nvPr/>
+        </p:nvSpPr>
+        <p:spPr>
+          <a:xfrm>
+            <a:off x="2758744" y="2377440"/>
+            <a:ext cx="7772400" cy="502920"/>
+          </a:xfrm>
+          <a:prstGeom prst="rect">
+            <a:avLst/>
+          </a:prstGeom>
+          <a:noFill/>
+        </p:spPr>
+        <p:txBody>
+          <a:bodyPr wrap="none">
+            <a:spAutoFit/>
+          </a:bodyPr>
+          <a:lstStyle/>
+          <a:p>
+            <a:pPr algn="l">
               <a:spcAft>
-                <a:spcPts val="1600"/>
+                <a:spcPts val="1000"/>
               </a:spcAft>
             </a:pPr>
             <a:r>
-              <a:rPr sz="2800" b="0">
+              <a:rPr sz="2400" b="0">
                 <a:solidFill>
-                  <a:srgbClr val="5A606E"/>
+                  <a:srgbClr val="323C50"/>
                 </a:solidFill>
                 <a:latin typeface="Microsoft YaHei"/>
               </a:rPr>
-              <a:t>完成原创想象文字或微型课本剧</a:t>
+              <a:t>小组担任策展人，制作「想象说明卡」</a:t>
+            </a:r>
+          </a:p>
+        </p:txBody>
+      </p:sp>
+      <p:sp>
+        <p:nvSpPr>
+          <p:cNvPr id="17" name="Oval 16"/>
+          <p:cNvSpPr/>
+          <p:nvPr/>
+        </p:nvSpPr>
+        <p:spPr>
+          <a:xfrm>
+            <a:off x="2255824" y="2962656"/>
+            <a:ext cx="384048" cy="384048"/>
+          </a:xfrm>
+          <a:prstGeom prst="ellipse">
+            <a:avLst/>
+          </a:prstGeom>
+          <a:solidFill>
+            <a:srgbClr val="4678B4"/>
+          </a:solidFill>
+          <a:ln>
+            <a:noFill/>
+          </a:ln>
+        </p:spPr>
+        <p:style>
+          <a:lnRef idx="1">
+            <a:schemeClr val="accent1"/>
+          </a:lnRef>
+          <a:fillRef idx="3">
+            <a:schemeClr val="accent1"/>
+          </a:fillRef>
+          <a:effectRef idx="2">
+            <a:schemeClr val="accent1"/>
+          </a:effectRef>
+          <a:fontRef idx="minor">
+            <a:schemeClr val="lt1"/>
+          </a:fontRef>
+        </p:style>
+        <p:txBody>
+          <a:bodyPr rtlCol="0" anchor="ctr"/>
+          <a:lstStyle/>
+          <a:p>
+            <a:pPr algn="ctr"/>
+          </a:p>
+        </p:txBody>
+      </p:sp>
+      <p:sp>
+        <p:nvSpPr>
+          <p:cNvPr id="18" name="TextBox 17"/>
+          <p:cNvSpPr txBox="1"/>
+          <p:nvPr/>
+        </p:nvSpPr>
+        <p:spPr>
+          <a:xfrm>
+            <a:off x="2255824" y="2980944"/>
+            <a:ext cx="384048" cy="365760"/>
+          </a:xfrm>
+          <a:prstGeom prst="rect">
+            <a:avLst/>
+          </a:prstGeom>
+          <a:noFill/>
+        </p:spPr>
+        <p:txBody>
+          <a:bodyPr wrap="none">
+            <a:spAutoFit/>
+          </a:bodyPr>
+          <a:lstStyle/>
+          <a:p>
+            <a:pPr algn="ctr">
+              <a:spcAft>
+                <a:spcPts val="1000"/>
+              </a:spcAft>
+            </a:pPr>
+            <a:r>
+              <a:rPr sz="1600" b="1">
+                <a:solidFill>
+                  <a:srgbClr val="FFFFFF"/>
+                </a:solidFill>
+                <a:latin typeface="Microsoft YaHei"/>
+              </a:rPr>
+              <a:t>3</a:t>
+            </a:r>
+          </a:p>
+        </p:txBody>
+      </p:sp>
+      <p:sp>
+        <p:nvSpPr>
+          <p:cNvPr id="19" name="TextBox 18"/>
+          <p:cNvSpPr txBox="1"/>
+          <p:nvPr/>
+        </p:nvSpPr>
+        <p:spPr>
+          <a:xfrm>
+            <a:off x="2758744" y="2944368"/>
+            <a:ext cx="7772400" cy="502920"/>
+          </a:xfrm>
+          <a:prstGeom prst="rect">
+            <a:avLst/>
+          </a:prstGeom>
+          <a:noFill/>
+        </p:spPr>
+        <p:txBody>
+          <a:bodyPr wrap="none">
+            <a:spAutoFit/>
+          </a:bodyPr>
+          <a:lstStyle/>
+          <a:p>
+            <a:pPr algn="l">
+              <a:spcAft>
+                <a:spcPts val="1000"/>
+              </a:spcAft>
+            </a:pPr>
+            <a:r>
+              <a:rPr sz="2400" b="0">
+                <a:solidFill>
+                  <a:srgbClr val="323C50"/>
+                </a:solidFill>
+                <a:latin typeface="Microsoft YaHei"/>
+              </a:rPr>
+              <a:t>完成原创想象文字或一幕微型课本剧</a:t>
             </a:r>
           </a:p>
         </p:txBody>
@@ -4132,17 +4855,17 @@
         </p:nvSpPr>
         <p:spPr>
           <a:xfrm>
-            <a:off x="0" y="0"/>
-            <a:ext cx="12191695" cy="6858000"/>
-          </a:xfrm>
-          <a:prstGeom prst="rect">
-            <a:avLst/>
-          </a:prstGeom>
-          <a:solidFill>
-            <a:srgbClr val="FCFAF7"/>
-          </a:solidFill>
-          <a:ln>
-            <a:noFill/>
+            <a:off x="292608" y="274320"/>
+            <a:ext cx="11594592" cy="6300216"/>
+          </a:xfrm>
+          <a:prstGeom prst="rect">
+            <a:avLst/>
+          </a:prstGeom>
+          <a:noFill/>
+          <a:ln w="31750">
+            <a:solidFill>
+              <a:srgbClr val="6482AA"/>
+            </a:solidFill>
           </a:ln>
         </p:spPr>
         <p:style>
@@ -4167,22 +4890,70 @@
           </a:p>
         </p:txBody>
       </p:sp>
-      <p:sp>
-        <p:nvSpPr>
-          <p:cNvPr id="4" name="Rectangle 3"/>
+      <p:pic>
+        <p:nvPicPr>
+          <p:cNvPr id="4" name="Picture 3" descr="corner_unit_tl.png"/>
+          <p:cNvPicPr>
+            <a:picLocks noChangeAspect="1"/>
+          </p:cNvPicPr>
+          <p:nvPr/>
+        </p:nvPicPr>
+        <p:blipFill>
+          <a:blip r:embed="rId3"/>
+          <a:stretch>
+            <a:fillRect/>
+          </a:stretch>
+        </p:blipFill>
+        <p:spPr>
+          <a:xfrm>
+            <a:off x="-45720" y="-45720"/>
+            <a:ext cx="2011680" cy="2011680"/>
+          </a:xfrm>
+          <a:prstGeom prst="rect">
+            <a:avLst/>
+          </a:prstGeom>
+        </p:spPr>
+      </p:pic>
+      <p:pic>
+        <p:nvPicPr>
+          <p:cNvPr id="5" name="Picture 4" descr="corner_unit_tr.png"/>
+          <p:cNvPicPr>
+            <a:picLocks noChangeAspect="1"/>
+          </p:cNvPicPr>
+          <p:nvPr/>
+        </p:nvPicPr>
+        <p:blipFill>
+          <a:blip r:embed="rId4"/>
+          <a:stretch>
+            <a:fillRect/>
+          </a:stretch>
+        </p:blipFill>
+        <p:spPr>
+          <a:xfrm>
+            <a:off x="9875520" y="-45720"/>
+            <a:ext cx="2011680" cy="2011680"/>
+          </a:xfrm>
+          <a:prstGeom prst="rect">
+            <a:avLst/>
+          </a:prstGeom>
+        </p:spPr>
+      </p:pic>
+      <p:sp>
+        <p:nvSpPr>
+          <p:cNvPr id="6" name="Rounded Rectangle 5"/>
           <p:cNvSpPr/>
           <p:nvPr/>
         </p:nvSpPr>
         <p:spPr>
           <a:xfrm>
-            <a:off x="0" y="0"/>
-            <a:ext cx="12191695" cy="91440"/>
-          </a:xfrm>
-          <a:prstGeom prst="rect">
+            <a:off x="4953304" y="502920"/>
+            <a:ext cx="2286000" cy="411480"/>
+          </a:xfrm>
+          <a:prstGeom prst="roundRect">
             <a:avLst/>
           </a:prstGeom>
           <a:solidFill>
-            <a:srgbClr val="B4AAC4"/>
+            <a:srgbClr val="A0BEDC"/>
           </a:solidFill>
           <a:ln>
             <a:noFill/>
@@ -4212,14 +4983,14 @@
       </p:sp>
       <p:sp>
         <p:nvSpPr>
-          <p:cNvPr id="5" name="TextBox 4"/>
+          <p:cNvPr id="7" name="TextBox 6"/>
           <p:cNvSpPr txBox="1"/>
           <p:nvPr/>
         </p:nvSpPr>
         <p:spPr>
           <a:xfrm>
-            <a:off x="640080" y="228600"/>
-            <a:ext cx="2743200" cy="457200"/>
+            <a:off x="4953304" y="521208"/>
+            <a:ext cx="2286000" cy="384048"/>
           </a:xfrm>
           <a:prstGeom prst="rect">
             <a:avLst/>
@@ -4232,10 +5003,15 @@
           </a:bodyPr>
           <a:lstStyle/>
           <a:p>
-            <a:r>
-              <a:rPr sz="2000" b="1">
+            <a:pPr algn="ctr">
+              <a:spcAft>
+                <a:spcPts val="1000"/>
+              </a:spcAft>
+            </a:pPr>
+            <a:r>
+              <a:rPr sz="1800" b="1">
                 <a:solidFill>
-                  <a:srgbClr val="B4AAC4"/>
+                  <a:srgbClr val="323C50"/>
                 </a:solidFill>
                 <a:latin typeface="Microsoft YaHei"/>
               </a:rPr>
@@ -4246,14 +5022,14 @@
       </p:sp>
       <p:sp>
         <p:nvSpPr>
-          <p:cNvPr id="6" name="TextBox 5"/>
+          <p:cNvPr id="8" name="TextBox 7"/>
           <p:cNvSpPr txBox="1"/>
           <p:nvPr/>
         </p:nvSpPr>
         <p:spPr>
           <a:xfrm>
-            <a:off x="640080" y="685800"/>
-            <a:ext cx="10515600" cy="914400"/>
+            <a:off x="1371600" y="960120"/>
+            <a:ext cx="9418320" cy="822960"/>
           </a:xfrm>
           <a:prstGeom prst="rect">
             <a:avLst/>
@@ -4261,15 +5037,20 @@
           <a:noFill/>
         </p:spPr>
         <p:txBody>
-          <a:bodyPr wrap="none">
+          <a:bodyPr wrap="square">
             <a:spAutoFit/>
           </a:bodyPr>
           <a:lstStyle/>
           <a:p>
+            <a:pPr algn="ctr">
+              <a:spcAft>
+                <a:spcPts val="1000"/>
+              </a:spcAft>
+            </a:pPr>
             <a:r>
               <a:rPr sz="3600" b="1">
                 <a:solidFill>
-                  <a:srgbClr val="5A606E"/>
+                  <a:srgbClr val="4678B4"/>
                 </a:solidFill>
                 <a:latin typeface="Microsoft YaHei"/>
               </a:rPr>
@@ -4280,14 +5061,145 @@
       </p:sp>
       <p:sp>
         <p:nvSpPr>
-          <p:cNvPr id="7" name="TextBox 6"/>
+          <p:cNvPr id="9" name="Rectangle 8"/>
+          <p:cNvSpPr/>
+          <p:nvPr/>
+        </p:nvSpPr>
+        <p:spPr>
+          <a:xfrm>
+            <a:off x="3200400" y="1600200"/>
+            <a:ext cx="5760720" cy="27432"/>
+          </a:xfrm>
+          <a:prstGeom prst="rect">
+            <a:avLst/>
+          </a:prstGeom>
+          <a:solidFill>
+            <a:srgbClr val="A0BEDC"/>
+          </a:solidFill>
+          <a:ln>
+            <a:noFill/>
+          </a:ln>
+        </p:spPr>
+        <p:style>
+          <a:lnRef idx="1">
+            <a:schemeClr val="accent1"/>
+          </a:lnRef>
+          <a:fillRef idx="3">
+            <a:schemeClr val="accent1"/>
+          </a:fillRef>
+          <a:effectRef idx="2">
+            <a:schemeClr val="accent1"/>
+          </a:effectRef>
+          <a:fontRef idx="minor">
+            <a:schemeClr val="lt1"/>
+          </a:fontRef>
+        </p:style>
+        <p:txBody>
+          <a:bodyPr rtlCol="0" anchor="ctr"/>
+          <a:lstStyle/>
+          <a:p>
+            <a:pPr algn="ctr"/>
+          </a:p>
+        </p:txBody>
+      </p:sp>
+      <p:sp>
+        <p:nvSpPr>
+          <p:cNvPr id="10" name="Rounded Rectangle 9"/>
+          <p:cNvSpPr/>
+          <p:nvPr/>
+        </p:nvSpPr>
+        <p:spPr>
+          <a:xfrm>
+            <a:off x="1295704" y="1645920"/>
+            <a:ext cx="9601200" cy="2834640"/>
+          </a:xfrm>
+          <a:prstGeom prst="roundRect">
+            <a:avLst/>
+          </a:prstGeom>
+          <a:solidFill>
+            <a:srgbClr val="F8FAFF"/>
+          </a:solidFill>
+          <a:ln w="19050">
+            <a:solidFill>
+              <a:srgbClr val="A0BEDC"/>
+            </a:solidFill>
+          </a:ln>
+        </p:spPr>
+        <p:style>
+          <a:lnRef idx="1">
+            <a:schemeClr val="accent1"/>
+          </a:lnRef>
+          <a:fillRef idx="3">
+            <a:schemeClr val="accent1"/>
+          </a:fillRef>
+          <a:effectRef idx="2">
+            <a:schemeClr val="accent1"/>
+          </a:effectRef>
+          <a:fontRef idx="minor">
+            <a:schemeClr val="lt1"/>
+          </a:fontRef>
+        </p:style>
+        <p:txBody>
+          <a:bodyPr rtlCol="0" anchor="ctr"/>
+          <a:lstStyle/>
+          <a:p>
+            <a:pPr algn="ctr"/>
+          </a:p>
+        </p:txBody>
+      </p:sp>
+      <p:sp>
+        <p:nvSpPr>
+          <p:cNvPr id="11" name="Oval 10"/>
+          <p:cNvSpPr/>
+          <p:nvPr/>
+        </p:nvSpPr>
+        <p:spPr>
+          <a:xfrm>
+            <a:off x="2255824" y="1828800"/>
+            <a:ext cx="384048" cy="384048"/>
+          </a:xfrm>
+          <a:prstGeom prst="ellipse">
+            <a:avLst/>
+          </a:prstGeom>
+          <a:solidFill>
+            <a:srgbClr val="4678B4"/>
+          </a:solidFill>
+          <a:ln>
+            <a:noFill/>
+          </a:ln>
+        </p:spPr>
+        <p:style>
+          <a:lnRef idx="1">
+            <a:schemeClr val="accent1"/>
+          </a:lnRef>
+          <a:fillRef idx="3">
+            <a:schemeClr val="accent1"/>
+          </a:fillRef>
+          <a:effectRef idx="2">
+            <a:schemeClr val="accent1"/>
+          </a:effectRef>
+          <a:fontRef idx="minor">
+            <a:schemeClr val="lt1"/>
+          </a:fontRef>
+        </p:style>
+        <p:txBody>
+          <a:bodyPr rtlCol="0" anchor="ctr"/>
+          <a:lstStyle/>
+          <a:p>
+            <a:pPr algn="ctr"/>
+          </a:p>
+        </p:txBody>
+      </p:sp>
+      <p:sp>
+        <p:nvSpPr>
+          <p:cNvPr id="12" name="TextBox 11"/>
           <p:cNvSpPr txBox="1"/>
           <p:nvPr/>
         </p:nvSpPr>
         <p:spPr>
           <a:xfrm>
-            <a:off x="822960" y="1691640"/>
-            <a:ext cx="10241280" cy="4389120"/>
+            <a:off x="2255824" y="1847088"/>
+            <a:ext cx="384048" cy="365760"/>
           </a:xfrm>
           <a:prstGeom prst="rect">
             <a:avLst/>
@@ -4295,108 +5207,426 @@
           <a:noFill/>
         </p:spPr>
         <p:txBody>
-          <a:bodyPr wrap="square" anchor="t">
+          <a:bodyPr wrap="none">
             <a:spAutoFit/>
           </a:bodyPr>
           <a:lstStyle/>
           <a:p>
-            <a:pPr>
+            <a:pPr algn="ctr">
               <a:spcAft>
-                <a:spcPts val="1600"/>
+                <a:spcPts val="1000"/>
               </a:spcAft>
             </a:pPr>
             <a:r>
-              <a:rPr sz="2600" b="1">
+              <a:rPr sz="1600" b="1">
                 <a:solidFill>
-                  <a:srgbClr val="B4AAC4"/>
+                  <a:srgbClr val="FFFFFF"/>
                 </a:solidFill>
                 <a:latin typeface="Microsoft YaHei"/>
               </a:rPr>
-              <a:t>自由与规则  </a:t>
-            </a:r>
-            <a:r>
-              <a:rPr sz="2600" b="0">
+              <a:t>1</a:t>
+            </a:r>
+          </a:p>
+        </p:txBody>
+      </p:sp>
+      <p:sp>
+        <p:nvSpPr>
+          <p:cNvPr id="13" name="TextBox 12"/>
+          <p:cNvSpPr txBox="1"/>
+          <p:nvPr/>
+        </p:nvSpPr>
+        <p:spPr>
+          <a:xfrm>
+            <a:off x="2758744" y="1810512"/>
+            <a:ext cx="7772400" cy="502920"/>
+          </a:xfrm>
+          <a:prstGeom prst="rect">
+            <a:avLst/>
+          </a:prstGeom>
+          <a:noFill/>
+        </p:spPr>
+        <p:txBody>
+          <a:bodyPr wrap="none">
+            <a:spAutoFit/>
+          </a:bodyPr>
+          <a:lstStyle/>
+          <a:p>
+            <a:pPr algn="l">
+              <a:spcAft>
+                <a:spcPts val="1000"/>
+              </a:spcAft>
+            </a:pPr>
+            <a:r>
+              <a:rPr sz="2400" b="0">
                 <a:solidFill>
-                  <a:srgbClr val="5A606E"/>
+                  <a:srgbClr val="323C50"/>
                 </a:solidFill>
                 <a:latin typeface="Microsoft YaHei"/>
               </a:rPr>
-              <a:t>《小圣施威降大圣》</a:t>
-            </a:r>
-          </a:p>
-          <a:p>
-            <a:pPr>
+              <a:t>自由与规则：《小圣施威降大圣》</a:t>
+            </a:r>
+          </a:p>
+        </p:txBody>
+      </p:sp>
+      <p:sp>
+        <p:nvSpPr>
+          <p:cNvPr id="14" name="Oval 13"/>
+          <p:cNvSpPr/>
+          <p:nvPr/>
+        </p:nvSpPr>
+        <p:spPr>
+          <a:xfrm>
+            <a:off x="2255824" y="2395728"/>
+            <a:ext cx="384048" cy="384048"/>
+          </a:xfrm>
+          <a:prstGeom prst="ellipse">
+            <a:avLst/>
+          </a:prstGeom>
+          <a:solidFill>
+            <a:srgbClr val="4678B4"/>
+          </a:solidFill>
+          <a:ln>
+            <a:noFill/>
+          </a:ln>
+        </p:spPr>
+        <p:style>
+          <a:lnRef idx="1">
+            <a:schemeClr val="accent1"/>
+          </a:lnRef>
+          <a:fillRef idx="3">
+            <a:schemeClr val="accent1"/>
+          </a:fillRef>
+          <a:effectRef idx="2">
+            <a:schemeClr val="accent1"/>
+          </a:effectRef>
+          <a:fontRef idx="minor">
+            <a:schemeClr val="lt1"/>
+          </a:fontRef>
+        </p:style>
+        <p:txBody>
+          <a:bodyPr rtlCol="0" anchor="ctr"/>
+          <a:lstStyle/>
+          <a:p>
+            <a:pPr algn="ctr"/>
+          </a:p>
+        </p:txBody>
+      </p:sp>
+      <p:sp>
+        <p:nvSpPr>
+          <p:cNvPr id="15" name="TextBox 14"/>
+          <p:cNvSpPr txBox="1"/>
+          <p:nvPr/>
+        </p:nvSpPr>
+        <p:spPr>
+          <a:xfrm>
+            <a:off x="2255824" y="2414016"/>
+            <a:ext cx="384048" cy="365760"/>
+          </a:xfrm>
+          <a:prstGeom prst="rect">
+            <a:avLst/>
+          </a:prstGeom>
+          <a:noFill/>
+        </p:spPr>
+        <p:txBody>
+          <a:bodyPr wrap="none">
+            <a:spAutoFit/>
+          </a:bodyPr>
+          <a:lstStyle/>
+          <a:p>
+            <a:pPr algn="ctr">
               <a:spcAft>
-                <a:spcPts val="1600"/>
+                <a:spcPts val="1000"/>
               </a:spcAft>
             </a:pPr>
             <a:r>
-              <a:rPr sz="2600" b="1">
+              <a:rPr sz="1600" b="1">
                 <a:solidFill>
-                  <a:srgbClr val="B4AAC4"/>
+                  <a:srgbClr val="FFFFFF"/>
                 </a:solidFill>
                 <a:latin typeface="Microsoft YaHei"/>
               </a:rPr>
-              <a:t>真实与虚假  </a:t>
-            </a:r>
-            <a:r>
-              <a:rPr sz="2600" b="0">
+              <a:t>2</a:t>
+            </a:r>
+          </a:p>
+        </p:txBody>
+      </p:sp>
+      <p:sp>
+        <p:nvSpPr>
+          <p:cNvPr id="16" name="TextBox 15"/>
+          <p:cNvSpPr txBox="1"/>
+          <p:nvPr/>
+        </p:nvSpPr>
+        <p:spPr>
+          <a:xfrm>
+            <a:off x="2758744" y="2377440"/>
+            <a:ext cx="7772400" cy="502920"/>
+          </a:xfrm>
+          <a:prstGeom prst="rect">
+            <a:avLst/>
+          </a:prstGeom>
+          <a:noFill/>
+        </p:spPr>
+        <p:txBody>
+          <a:bodyPr wrap="none">
+            <a:spAutoFit/>
+          </a:bodyPr>
+          <a:lstStyle/>
+          <a:p>
+            <a:pPr algn="l">
+              <a:spcAft>
+                <a:spcPts val="1000"/>
+              </a:spcAft>
+            </a:pPr>
+            <a:r>
+              <a:rPr sz="2400" b="0">
                 <a:solidFill>
-                  <a:srgbClr val="5A606E"/>
+                  <a:srgbClr val="323C50"/>
                 </a:solidFill>
                 <a:latin typeface="Microsoft YaHei"/>
               </a:rPr>
-              <a:t>《皇帝的新装》</a:t>
-            </a:r>
-          </a:p>
-          <a:p>
-            <a:pPr>
+              <a:t>真实与虚假：《皇帝的新装》</a:t>
+            </a:r>
+          </a:p>
+        </p:txBody>
+      </p:sp>
+      <p:sp>
+        <p:nvSpPr>
+          <p:cNvPr id="17" name="Oval 16"/>
+          <p:cNvSpPr/>
+          <p:nvPr/>
+        </p:nvSpPr>
+        <p:spPr>
+          <a:xfrm>
+            <a:off x="2255824" y="2962656"/>
+            <a:ext cx="384048" cy="384048"/>
+          </a:xfrm>
+          <a:prstGeom prst="ellipse">
+            <a:avLst/>
+          </a:prstGeom>
+          <a:solidFill>
+            <a:srgbClr val="4678B4"/>
+          </a:solidFill>
+          <a:ln>
+            <a:noFill/>
+          </a:ln>
+        </p:spPr>
+        <p:style>
+          <a:lnRef idx="1">
+            <a:schemeClr val="accent1"/>
+          </a:lnRef>
+          <a:fillRef idx="3">
+            <a:schemeClr val="accent1"/>
+          </a:fillRef>
+          <a:effectRef idx="2">
+            <a:schemeClr val="accent1"/>
+          </a:effectRef>
+          <a:fontRef idx="minor">
+            <a:schemeClr val="lt1"/>
+          </a:fontRef>
+        </p:style>
+        <p:txBody>
+          <a:bodyPr rtlCol="0" anchor="ctr"/>
+          <a:lstStyle/>
+          <a:p>
+            <a:pPr algn="ctr"/>
+          </a:p>
+        </p:txBody>
+      </p:sp>
+      <p:sp>
+        <p:nvSpPr>
+          <p:cNvPr id="18" name="TextBox 17"/>
+          <p:cNvSpPr txBox="1"/>
+          <p:nvPr/>
+        </p:nvSpPr>
+        <p:spPr>
+          <a:xfrm>
+            <a:off x="2255824" y="2980944"/>
+            <a:ext cx="384048" cy="365760"/>
+          </a:xfrm>
+          <a:prstGeom prst="rect">
+            <a:avLst/>
+          </a:prstGeom>
+          <a:noFill/>
+        </p:spPr>
+        <p:txBody>
+          <a:bodyPr wrap="none">
+            <a:spAutoFit/>
+          </a:bodyPr>
+          <a:lstStyle/>
+          <a:p>
+            <a:pPr algn="ctr">
               <a:spcAft>
-                <a:spcPts val="1600"/>
+                <a:spcPts val="1000"/>
               </a:spcAft>
             </a:pPr>
             <a:r>
-              <a:rPr sz="2600" b="1">
+              <a:rPr sz="1600" b="1">
                 <a:solidFill>
-                  <a:srgbClr val="B4AAC4"/>
+                  <a:srgbClr val="FFFFFF"/>
                 </a:solidFill>
                 <a:latin typeface="Microsoft YaHei"/>
               </a:rPr>
-              <a:t>创造与生命  </a:t>
-            </a:r>
-            <a:r>
-              <a:rPr sz="2600" b="0">
+              <a:t>3</a:t>
+            </a:r>
+          </a:p>
+        </p:txBody>
+      </p:sp>
+      <p:sp>
+        <p:nvSpPr>
+          <p:cNvPr id="19" name="TextBox 18"/>
+          <p:cNvSpPr txBox="1"/>
+          <p:nvPr/>
+        </p:nvSpPr>
+        <p:spPr>
+          <a:xfrm>
+            <a:off x="2758744" y="2944368"/>
+            <a:ext cx="7772400" cy="502920"/>
+          </a:xfrm>
+          <a:prstGeom prst="rect">
+            <a:avLst/>
+          </a:prstGeom>
+          <a:noFill/>
+        </p:spPr>
+        <p:txBody>
+          <a:bodyPr wrap="none">
+            <a:spAutoFit/>
+          </a:bodyPr>
+          <a:lstStyle/>
+          <a:p>
+            <a:pPr algn="l">
+              <a:spcAft>
+                <a:spcPts val="1000"/>
+              </a:spcAft>
+            </a:pPr>
+            <a:r>
+              <a:rPr sz="2400" b="0">
                 <a:solidFill>
-                  <a:srgbClr val="5A606E"/>
+                  <a:srgbClr val="323C50"/>
                 </a:solidFill>
                 <a:latin typeface="Microsoft YaHei"/>
               </a:rPr>
-              <a:t>《女娲造人》</a:t>
-            </a:r>
-          </a:p>
-          <a:p>
-            <a:pPr>
+              <a:t>创造与生命：《女娲造人》</a:t>
+            </a:r>
+          </a:p>
+        </p:txBody>
+      </p:sp>
+      <p:sp>
+        <p:nvSpPr>
+          <p:cNvPr id="20" name="Oval 19"/>
+          <p:cNvSpPr/>
+          <p:nvPr/>
+        </p:nvSpPr>
+        <p:spPr>
+          <a:xfrm>
+            <a:off x="2255824" y="3529584"/>
+            <a:ext cx="384048" cy="384048"/>
+          </a:xfrm>
+          <a:prstGeom prst="ellipse">
+            <a:avLst/>
+          </a:prstGeom>
+          <a:solidFill>
+            <a:srgbClr val="4678B4"/>
+          </a:solidFill>
+          <a:ln>
+            <a:noFill/>
+          </a:ln>
+        </p:spPr>
+        <p:style>
+          <a:lnRef idx="1">
+            <a:schemeClr val="accent1"/>
+          </a:lnRef>
+          <a:fillRef idx="3">
+            <a:schemeClr val="accent1"/>
+          </a:fillRef>
+          <a:effectRef idx="2">
+            <a:schemeClr val="accent1"/>
+          </a:effectRef>
+          <a:fontRef idx="minor">
+            <a:schemeClr val="lt1"/>
+          </a:fontRef>
+        </p:style>
+        <p:txBody>
+          <a:bodyPr rtlCol="0" anchor="ctr"/>
+          <a:lstStyle/>
+          <a:p>
+            <a:pPr algn="ctr"/>
+          </a:p>
+        </p:txBody>
+      </p:sp>
+      <p:sp>
+        <p:nvSpPr>
+          <p:cNvPr id="21" name="TextBox 20"/>
+          <p:cNvSpPr txBox="1"/>
+          <p:nvPr/>
+        </p:nvSpPr>
+        <p:spPr>
+          <a:xfrm>
+            <a:off x="2255824" y="3547872"/>
+            <a:ext cx="384048" cy="365760"/>
+          </a:xfrm>
+          <a:prstGeom prst="rect">
+            <a:avLst/>
+          </a:prstGeom>
+          <a:noFill/>
+        </p:spPr>
+        <p:txBody>
+          <a:bodyPr wrap="none">
+            <a:spAutoFit/>
+          </a:bodyPr>
+          <a:lstStyle/>
+          <a:p>
+            <a:pPr algn="ctr">
               <a:spcAft>
-                <a:spcPts val="1600"/>
+                <a:spcPts val="1000"/>
               </a:spcAft>
             </a:pPr>
             <a:r>
-              <a:rPr sz="2600" b="1">
+              <a:rPr sz="1600" b="1">
                 <a:solidFill>
-                  <a:srgbClr val="B4AAC4"/>
+                  <a:srgbClr val="FFFFFF"/>
                 </a:solidFill>
                 <a:latin typeface="Microsoft YaHei"/>
               </a:rPr>
-              <a:t>智慧与局限  </a:t>
-            </a:r>
-            <a:r>
-              <a:rPr sz="2600" b="0">
+              <a:t>4</a:t>
+            </a:r>
+          </a:p>
+        </p:txBody>
+      </p:sp>
+      <p:sp>
+        <p:nvSpPr>
+          <p:cNvPr id="22" name="TextBox 21"/>
+          <p:cNvSpPr txBox="1"/>
+          <p:nvPr/>
+        </p:nvSpPr>
+        <p:spPr>
+          <a:xfrm>
+            <a:off x="2758744" y="3511296"/>
+            <a:ext cx="7772400" cy="502920"/>
+          </a:xfrm>
+          <a:prstGeom prst="rect">
+            <a:avLst/>
+          </a:prstGeom>
+          <a:noFill/>
+        </p:spPr>
+        <p:txBody>
+          <a:bodyPr wrap="none">
+            <a:spAutoFit/>
+          </a:bodyPr>
+          <a:lstStyle/>
+          <a:p>
+            <a:pPr algn="l">
+              <a:spcAft>
+                <a:spcPts val="1000"/>
+              </a:spcAft>
+            </a:pPr>
+            <a:r>
+              <a:rPr sz="2400" b="0">
                 <a:solidFill>
-                  <a:srgbClr val="5A606E"/>
+                  <a:srgbClr val="323C50"/>
                 </a:solidFill>
                 <a:latin typeface="Microsoft YaHei"/>
               </a:rPr>
-              <a:t>《寓言四则》</a:t>
+              <a:t>智慧与局限：《寓言四则》</a:t>
             </a:r>
           </a:p>
         </p:txBody>
@@ -4451,17 +5681,17 @@
         </p:nvSpPr>
         <p:spPr>
           <a:xfrm>
-            <a:off x="0" y="0"/>
-            <a:ext cx="12191695" cy="6858000"/>
-          </a:xfrm>
-          <a:prstGeom prst="rect">
-            <a:avLst/>
-          </a:prstGeom>
-          <a:solidFill>
-            <a:srgbClr val="FCFAF7"/>
-          </a:solidFill>
-          <a:ln>
-            <a:noFill/>
+            <a:off x="292608" y="274320"/>
+            <a:ext cx="11594592" cy="6300216"/>
+          </a:xfrm>
+          <a:prstGeom prst="rect">
+            <a:avLst/>
+          </a:prstGeom>
+          <a:noFill/>
+          <a:ln w="31750">
+            <a:solidFill>
+              <a:srgbClr val="6482AA"/>
+            </a:solidFill>
           </a:ln>
         </p:spPr>
         <p:style>
@@ -4486,22 +5716,70 @@
           </a:p>
         </p:txBody>
       </p:sp>
-      <p:sp>
-        <p:nvSpPr>
-          <p:cNvPr id="4" name="Rectangle 3"/>
+      <p:pic>
+        <p:nvPicPr>
+          <p:cNvPr id="4" name="Picture 3" descr="corner_unit_tl.png"/>
+          <p:cNvPicPr>
+            <a:picLocks noChangeAspect="1"/>
+          </p:cNvPicPr>
+          <p:nvPr/>
+        </p:nvPicPr>
+        <p:blipFill>
+          <a:blip r:embed="rId3"/>
+          <a:stretch>
+            <a:fillRect/>
+          </a:stretch>
+        </p:blipFill>
+        <p:spPr>
+          <a:xfrm>
+            <a:off x="-45720" y="-45720"/>
+            <a:ext cx="2011680" cy="2011680"/>
+          </a:xfrm>
+          <a:prstGeom prst="rect">
+            <a:avLst/>
+          </a:prstGeom>
+        </p:spPr>
+      </p:pic>
+      <p:pic>
+        <p:nvPicPr>
+          <p:cNvPr id="5" name="Picture 4" descr="corner_unit_tr.png"/>
+          <p:cNvPicPr>
+            <a:picLocks noChangeAspect="1"/>
+          </p:cNvPicPr>
+          <p:nvPr/>
+        </p:nvPicPr>
+        <p:blipFill>
+          <a:blip r:embed="rId4"/>
+          <a:stretch>
+            <a:fillRect/>
+          </a:stretch>
+        </p:blipFill>
+        <p:spPr>
+          <a:xfrm>
+            <a:off x="9875520" y="-45720"/>
+            <a:ext cx="2011680" cy="2011680"/>
+          </a:xfrm>
+          <a:prstGeom prst="rect">
+            <a:avLst/>
+          </a:prstGeom>
+        </p:spPr>
+      </p:pic>
+      <p:sp>
+        <p:nvSpPr>
+          <p:cNvPr id="6" name="Rounded Rectangle 5"/>
           <p:cNvSpPr/>
           <p:nvPr/>
         </p:nvSpPr>
         <p:spPr>
           <a:xfrm>
-            <a:off x="0" y="0"/>
-            <a:ext cx="12191695" cy="109728"/>
-          </a:xfrm>
-          <a:prstGeom prst="rect">
+            <a:off x="4953304" y="1005840"/>
+            <a:ext cx="2286000" cy="411480"/>
+          </a:xfrm>
+          <a:prstGeom prst="roundRect">
             <a:avLst/>
           </a:prstGeom>
           <a:solidFill>
-            <a:srgbClr val="66CDAA"/>
+            <a:srgbClr val="A0BEDC"/>
           </a:solidFill>
           <a:ln>
             <a:noFill/>
@@ -4531,14 +5809,53 @@
       </p:sp>
       <p:sp>
         <p:nvSpPr>
-          <p:cNvPr id="5" name="TextBox 4"/>
+          <p:cNvPr id="7" name="TextBox 6"/>
           <p:cNvSpPr txBox="1"/>
           <p:nvPr/>
         </p:nvSpPr>
         <p:spPr>
           <a:xfrm>
-            <a:off x="914400" y="1828800"/>
-            <a:ext cx="10058400" cy="2286000"/>
+            <a:off x="4953304" y="1024128"/>
+            <a:ext cx="2286000" cy="384048"/>
+          </a:xfrm>
+          <a:prstGeom prst="rect">
+            <a:avLst/>
+          </a:prstGeom>
+          <a:noFill/>
+        </p:spPr>
+        <p:txBody>
+          <a:bodyPr wrap="none">
+            <a:spAutoFit/>
+          </a:bodyPr>
+          <a:lstStyle/>
+          <a:p>
+            <a:pPr algn="ctr">
+              <a:spcAft>
+                <a:spcPts val="1000"/>
+              </a:spcAft>
+            </a:pPr>
+            <a:r>
+              <a:rPr sz="1800" b="1">
+                <a:solidFill>
+                  <a:srgbClr val="323C50"/>
+                </a:solidFill>
+                <a:latin typeface="Microsoft YaHei"/>
+              </a:rPr>
+              <a:t>想一想</a:t>
+            </a:r>
+          </a:p>
+        </p:txBody>
+      </p:sp>
+      <p:sp>
+        <p:nvSpPr>
+          <p:cNvPr id="8" name="TextBox 7"/>
+          <p:cNvSpPr txBox="1"/>
+          <p:nvPr/>
+        </p:nvSpPr>
+        <p:spPr>
+          <a:xfrm>
+            <a:off x="1371600" y="1600200"/>
+            <a:ext cx="9418320" cy="822960"/>
           </a:xfrm>
           <a:prstGeom prst="rect">
             <a:avLst/>
@@ -4551,27 +5868,15 @@
           </a:bodyPr>
           <a:lstStyle/>
           <a:p>
-            <a:pPr algn="ctr"/>
-            <a:r>
-              <a:rPr sz="3000" b="1">
+            <a:pPr algn="ctr">
+              <a:spcAft>
+                <a:spcPts val="1000"/>
+              </a:spcAft>
+            </a:pPr>
+            <a:r>
+              <a:rPr sz="3200" b="1">
                 <a:solidFill>
-                  <a:srgbClr val="66CDAA"/>
-                </a:solidFill>
-                <a:latin typeface="Microsoft YaHei"/>
-              </a:rPr>
-              <a:t>💭 想一想</a:t>
-            </a:r>
-          </a:p>
-          <a:p>
-            <a:pPr algn="ctr">
-              <a:spcBef>
-                <a:spcPts val="2000"/>
-              </a:spcBef>
-            </a:pPr>
-            <a:r>
-              <a:rPr sz="3400" b="1">
-                <a:solidFill>
-                  <a:srgbClr val="5A606E"/>
+                  <a:srgbClr val="4678B4"/>
                 </a:solidFill>
                 <a:latin typeface="Microsoft YaHei"/>
               </a:rPr>
@@ -4583,14 +5888,57 @@
       </p:sp>
       <p:sp>
         <p:nvSpPr>
-          <p:cNvPr id="6" name="TextBox 5"/>
+          <p:cNvPr id="9" name="Rectangle 8"/>
+          <p:cNvSpPr/>
+          <p:nvPr/>
+        </p:nvSpPr>
+        <p:spPr>
+          <a:xfrm>
+            <a:off x="3200400" y="4389120"/>
+            <a:ext cx="5760720" cy="27432"/>
+          </a:xfrm>
+          <a:prstGeom prst="rect">
+            <a:avLst/>
+          </a:prstGeom>
+          <a:solidFill>
+            <a:srgbClr val="A0BEDC"/>
+          </a:solidFill>
+          <a:ln>
+            <a:noFill/>
+          </a:ln>
+        </p:spPr>
+        <p:style>
+          <a:lnRef idx="1">
+            <a:schemeClr val="accent1"/>
+          </a:lnRef>
+          <a:fillRef idx="3">
+            <a:schemeClr val="accent1"/>
+          </a:fillRef>
+          <a:effectRef idx="2">
+            <a:schemeClr val="accent1"/>
+          </a:effectRef>
+          <a:fontRef idx="minor">
+            <a:schemeClr val="lt1"/>
+          </a:fontRef>
+        </p:style>
+        <p:txBody>
+          <a:bodyPr rtlCol="0" anchor="ctr"/>
+          <a:lstStyle/>
+          <a:p>
+            <a:pPr algn="ctr"/>
+          </a:p>
+        </p:txBody>
+      </p:sp>
+      <p:sp>
+        <p:nvSpPr>
+          <p:cNvPr id="10" name="TextBox 9"/>
           <p:cNvSpPr txBox="1"/>
           <p:nvPr/>
         </p:nvSpPr>
         <p:spPr>
           <a:xfrm>
-            <a:off x="1371600" y="4572000"/>
-            <a:ext cx="9144000" cy="1097280"/>
+            <a:off x="1828800" y="4663440"/>
+            <a:ext cx="8503920" cy="914400"/>
           </a:xfrm>
           <a:prstGeom prst="rect">
             <a:avLst/>
@@ -4603,11 +5951,15 @@
           </a:bodyPr>
           <a:lstStyle/>
           <a:p>
-            <a:pPr algn="ctr"/>
-            <a:r>
-              <a:rPr sz="2400" b="0">
+            <a:pPr algn="ctr">
+              <a:spcAft>
+                <a:spcPts val="1000"/>
+              </a:spcAft>
+            </a:pPr>
+            <a:r>
+              <a:rPr sz="2200" b="0">
                 <a:solidFill>
-                  <a:srgbClr val="66CDAA"/>
+                  <a:srgbClr val="4678B4"/>
                 </a:solidFill>
                 <a:latin typeface="Microsoft YaHei"/>
               </a:rPr>
@@ -4666,17 +6018,17 @@
         </p:nvSpPr>
         <p:spPr>
           <a:xfrm>
-            <a:off x="0" y="0"/>
-            <a:ext cx="12191695" cy="6858000"/>
-          </a:xfrm>
-          <a:prstGeom prst="rect">
-            <a:avLst/>
-          </a:prstGeom>
-          <a:solidFill>
-            <a:srgbClr val="FCFAF7"/>
-          </a:solidFill>
-          <a:ln>
-            <a:noFill/>
+            <a:off x="292608" y="274320"/>
+            <a:ext cx="11594592" cy="6300216"/>
+          </a:xfrm>
+          <a:prstGeom prst="rect">
+            <a:avLst/>
+          </a:prstGeom>
+          <a:noFill/>
+          <a:ln w="31750">
+            <a:solidFill>
+              <a:srgbClr val="6482AA"/>
+            </a:solidFill>
           </a:ln>
         </p:spPr>
         <p:style>
@@ -4701,22 +6053,70 @@
           </a:p>
         </p:txBody>
       </p:sp>
-      <p:sp>
-        <p:nvSpPr>
-          <p:cNvPr id="4" name="Rectangle 3"/>
+      <p:pic>
+        <p:nvPicPr>
+          <p:cNvPr id="4" name="Picture 3" descr="corner_unit_tl.png"/>
+          <p:cNvPicPr>
+            <a:picLocks noChangeAspect="1"/>
+          </p:cNvPicPr>
+          <p:nvPr/>
+        </p:nvPicPr>
+        <p:blipFill>
+          <a:blip r:embed="rId3"/>
+          <a:stretch>
+            <a:fillRect/>
+          </a:stretch>
+        </p:blipFill>
+        <p:spPr>
+          <a:xfrm>
+            <a:off x="-45720" y="-45720"/>
+            <a:ext cx="2011680" cy="2011680"/>
+          </a:xfrm>
+          <a:prstGeom prst="rect">
+            <a:avLst/>
+          </a:prstGeom>
+        </p:spPr>
+      </p:pic>
+      <p:pic>
+        <p:nvPicPr>
+          <p:cNvPr id="5" name="Picture 4" descr="corner_unit_tr.png"/>
+          <p:cNvPicPr>
+            <a:picLocks noChangeAspect="1"/>
+          </p:cNvPicPr>
+          <p:nvPr/>
+        </p:nvPicPr>
+        <p:blipFill>
+          <a:blip r:embed="rId4"/>
+          <a:stretch>
+            <a:fillRect/>
+          </a:stretch>
+        </p:blipFill>
+        <p:spPr>
+          <a:xfrm>
+            <a:off x="9875520" y="-45720"/>
+            <a:ext cx="2011680" cy="2011680"/>
+          </a:xfrm>
+          <a:prstGeom prst="rect">
+            <a:avLst/>
+          </a:prstGeom>
+        </p:spPr>
+      </p:pic>
+      <p:sp>
+        <p:nvSpPr>
+          <p:cNvPr id="6" name="Rounded Rectangle 5"/>
           <p:cNvSpPr/>
           <p:nvPr/>
         </p:nvSpPr>
         <p:spPr>
           <a:xfrm>
-            <a:off x="0" y="0"/>
-            <a:ext cx="12191695" cy="91440"/>
-          </a:xfrm>
-          <a:prstGeom prst="rect">
+            <a:off x="4953304" y="502920"/>
+            <a:ext cx="2286000" cy="411480"/>
+          </a:xfrm>
+          <a:prstGeom prst="roundRect">
             <a:avLst/>
           </a:prstGeom>
           <a:solidFill>
-            <a:srgbClr val="A4B4C4"/>
+            <a:srgbClr val="A0BEDC"/>
           </a:solidFill>
           <a:ln>
             <a:noFill/>
@@ -4746,14 +6146,14 @@
       </p:sp>
       <p:sp>
         <p:nvSpPr>
-          <p:cNvPr id="5" name="TextBox 4"/>
+          <p:cNvPr id="7" name="TextBox 6"/>
           <p:cNvSpPr txBox="1"/>
           <p:nvPr/>
         </p:nvSpPr>
         <p:spPr>
           <a:xfrm>
-            <a:off x="640080" y="228600"/>
-            <a:ext cx="2743200" cy="457200"/>
+            <a:off x="4953304" y="521208"/>
+            <a:ext cx="2286000" cy="384048"/>
           </a:xfrm>
           <a:prstGeom prst="rect">
             <a:avLst/>
@@ -4766,28 +6166,203 @@
           </a:bodyPr>
           <a:lstStyle/>
           <a:p>
-            <a:r>
-              <a:rPr sz="2000" b="1">
+            <a:pPr algn="ctr">
+              <a:spcAft>
+                <a:spcPts val="1000"/>
+              </a:spcAft>
+            </a:pPr>
+            <a:r>
+              <a:rPr sz="1800" b="1">
                 <a:solidFill>
-                  <a:srgbClr val="A4B4C4"/>
+                  <a:srgbClr val="323C50"/>
                 </a:solidFill>
                 <a:latin typeface="Microsoft YaHei"/>
               </a:rPr>
-              <a:t>以生为主</a:t>
-            </a:r>
-          </a:p>
-        </p:txBody>
-      </p:sp>
-      <p:sp>
-        <p:nvSpPr>
-          <p:cNvPr id="6" name="TextBox 5"/>
+              <a:t>明确任务</a:t>
+            </a:r>
+          </a:p>
+        </p:txBody>
+      </p:sp>
+      <p:sp>
+        <p:nvSpPr>
+          <p:cNvPr id="8" name="TextBox 7"/>
           <p:cNvSpPr txBox="1"/>
           <p:nvPr/>
         </p:nvSpPr>
         <p:spPr>
           <a:xfrm>
-            <a:off x="640080" y="685800"/>
-            <a:ext cx="10515600" cy="914400"/>
+            <a:off x="1371600" y="960120"/>
+            <a:ext cx="9418320" cy="822960"/>
+          </a:xfrm>
+          <a:prstGeom prst="rect">
+            <a:avLst/>
+          </a:prstGeom>
+          <a:noFill/>
+        </p:spPr>
+        <p:txBody>
+          <a:bodyPr wrap="square">
+            <a:spAutoFit/>
+          </a:bodyPr>
+          <a:lstStyle/>
+          <a:p>
+            <a:pPr algn="ctr">
+              <a:spcAft>
+                <a:spcPts val="1000"/>
+              </a:spcAft>
+            </a:pPr>
+            <a:r>
+              <a:rPr sz="3600" b="1">
+                <a:solidFill>
+                  <a:srgbClr val="4678B4"/>
+                </a:solidFill>
+                <a:latin typeface="Microsoft YaHei"/>
+              </a:rPr>
+              <a:t>学习任务一</a:t>
+            </a:r>
+          </a:p>
+        </p:txBody>
+      </p:sp>
+      <p:sp>
+        <p:nvSpPr>
+          <p:cNvPr id="9" name="Rectangle 8"/>
+          <p:cNvSpPr/>
+          <p:nvPr/>
+        </p:nvSpPr>
+        <p:spPr>
+          <a:xfrm>
+            <a:off x="3200400" y="1600200"/>
+            <a:ext cx="5760720" cy="27432"/>
+          </a:xfrm>
+          <a:prstGeom prst="rect">
+            <a:avLst/>
+          </a:prstGeom>
+          <a:solidFill>
+            <a:srgbClr val="A0BEDC"/>
+          </a:solidFill>
+          <a:ln>
+            <a:noFill/>
+          </a:ln>
+        </p:spPr>
+        <p:style>
+          <a:lnRef idx="1">
+            <a:schemeClr val="accent1"/>
+          </a:lnRef>
+          <a:fillRef idx="3">
+            <a:schemeClr val="accent1"/>
+          </a:fillRef>
+          <a:effectRef idx="2">
+            <a:schemeClr val="accent1"/>
+          </a:effectRef>
+          <a:fontRef idx="minor">
+            <a:schemeClr val="lt1"/>
+          </a:fontRef>
+        </p:style>
+        <p:txBody>
+          <a:bodyPr rtlCol="0" anchor="ctr"/>
+          <a:lstStyle/>
+          <a:p>
+            <a:pPr algn="ctr"/>
+          </a:p>
+        </p:txBody>
+      </p:sp>
+      <p:sp>
+        <p:nvSpPr>
+          <p:cNvPr id="10" name="Rounded Rectangle 9"/>
+          <p:cNvSpPr/>
+          <p:nvPr/>
+        </p:nvSpPr>
+        <p:spPr>
+          <a:xfrm>
+            <a:off x="1295704" y="1645920"/>
+            <a:ext cx="9601200" cy="2240280"/>
+          </a:xfrm>
+          <a:prstGeom prst="roundRect">
+            <a:avLst/>
+          </a:prstGeom>
+          <a:solidFill>
+            <a:srgbClr val="F8FAFF"/>
+          </a:solidFill>
+          <a:ln w="19050">
+            <a:solidFill>
+              <a:srgbClr val="A0BEDC"/>
+            </a:solidFill>
+          </a:ln>
+        </p:spPr>
+        <p:style>
+          <a:lnRef idx="1">
+            <a:schemeClr val="accent1"/>
+          </a:lnRef>
+          <a:fillRef idx="3">
+            <a:schemeClr val="accent1"/>
+          </a:fillRef>
+          <a:effectRef idx="2">
+            <a:schemeClr val="accent1"/>
+          </a:effectRef>
+          <a:fontRef idx="minor">
+            <a:schemeClr val="lt1"/>
+          </a:fontRef>
+        </p:style>
+        <p:txBody>
+          <a:bodyPr rtlCol="0" anchor="ctr"/>
+          <a:lstStyle/>
+          <a:p>
+            <a:pPr algn="ctr"/>
+          </a:p>
+        </p:txBody>
+      </p:sp>
+      <p:sp>
+        <p:nvSpPr>
+          <p:cNvPr id="11" name="Oval 10"/>
+          <p:cNvSpPr/>
+          <p:nvPr/>
+        </p:nvSpPr>
+        <p:spPr>
+          <a:xfrm>
+            <a:off x="2255824" y="1828800"/>
+            <a:ext cx="384048" cy="384048"/>
+          </a:xfrm>
+          <a:prstGeom prst="ellipse">
+            <a:avLst/>
+          </a:prstGeom>
+          <a:solidFill>
+            <a:srgbClr val="4678B4"/>
+          </a:solidFill>
+          <a:ln>
+            <a:noFill/>
+          </a:ln>
+        </p:spPr>
+        <p:style>
+          <a:lnRef idx="1">
+            <a:schemeClr val="accent1"/>
+          </a:lnRef>
+          <a:fillRef idx="3">
+            <a:schemeClr val="accent1"/>
+          </a:fillRef>
+          <a:effectRef idx="2">
+            <a:schemeClr val="accent1"/>
+          </a:effectRef>
+          <a:fontRef idx="minor">
+            <a:schemeClr val="lt1"/>
+          </a:fontRef>
+        </p:style>
+        <p:txBody>
+          <a:bodyPr rtlCol="0" anchor="ctr"/>
+          <a:lstStyle/>
+          <a:p>
+            <a:pPr algn="ctr"/>
+          </a:p>
+        </p:txBody>
+      </p:sp>
+      <p:sp>
+        <p:nvSpPr>
+          <p:cNvPr id="12" name="TextBox 11"/>
+          <p:cNvSpPr txBox="1"/>
+          <p:nvPr/>
+        </p:nvSpPr>
+        <p:spPr>
+          <a:xfrm>
+            <a:off x="2255824" y="1847088"/>
+            <a:ext cx="384048" cy="365760"/>
           </a:xfrm>
           <a:prstGeom prst="rect">
             <a:avLst/>
@@ -4800,28 +6375,33 @@
           </a:bodyPr>
           <a:lstStyle/>
           <a:p>
-            <a:r>
-              <a:rPr sz="3600" b="1">
+            <a:pPr algn="ctr">
+              <a:spcAft>
+                <a:spcPts val="1000"/>
+              </a:spcAft>
+            </a:pPr>
+            <a:r>
+              <a:rPr sz="1600" b="1">
                 <a:solidFill>
-                  <a:srgbClr val="5A606E"/>
+                  <a:srgbClr val="FFFFFF"/>
                 </a:solidFill>
                 <a:latin typeface="Microsoft YaHei"/>
               </a:rPr>
-              <a:t>学习任务一 · 明确任务</a:t>
-            </a:r>
-          </a:p>
-        </p:txBody>
-      </p:sp>
-      <p:sp>
-        <p:nvSpPr>
-          <p:cNvPr id="7" name="TextBox 6"/>
+              <a:t>1</a:t>
+            </a:r>
+          </a:p>
+        </p:txBody>
+      </p:sp>
+      <p:sp>
+        <p:nvSpPr>
+          <p:cNvPr id="13" name="TextBox 12"/>
           <p:cNvSpPr txBox="1"/>
           <p:nvPr/>
         </p:nvSpPr>
         <p:spPr>
           <a:xfrm>
-            <a:off x="822960" y="1691640"/>
-            <a:ext cx="10241280" cy="4389120"/>
+            <a:off x="2758744" y="1810512"/>
+            <a:ext cx="7772400" cy="502920"/>
           </a:xfrm>
           <a:prstGeom prst="rect">
             <a:avLst/>
@@ -4829,56 +6409,266 @@
           <a:noFill/>
         </p:spPr>
         <p:txBody>
-          <a:bodyPr wrap="square" anchor="t">
+          <a:bodyPr wrap="none">
             <a:spAutoFit/>
           </a:bodyPr>
           <a:lstStyle/>
           <a:p>
-            <a:pPr>
+            <a:pPr algn="l">
               <a:spcAft>
-                <a:spcPts val="1600"/>
+                <a:spcPts val="1000"/>
               </a:spcAft>
             </a:pPr>
             <a:r>
-              <a:rPr sz="2800" b="0">
+              <a:rPr sz="2400" b="0">
                 <a:solidFill>
-                  <a:srgbClr val="5A606E"/>
+                  <a:srgbClr val="323C50"/>
                 </a:solidFill>
                 <a:latin typeface="Microsoft YaHei"/>
               </a:rPr>
               <a:t>阅读学历案，圈画挑战任务与学习目标</a:t>
             </a:r>
           </a:p>
-          <a:p>
-            <a:pPr>
+        </p:txBody>
+      </p:sp>
+      <p:sp>
+        <p:nvSpPr>
+          <p:cNvPr id="14" name="Oval 13"/>
+          <p:cNvSpPr/>
+          <p:nvPr/>
+        </p:nvSpPr>
+        <p:spPr>
+          <a:xfrm>
+            <a:off x="2255824" y="2395728"/>
+            <a:ext cx="384048" cy="384048"/>
+          </a:xfrm>
+          <a:prstGeom prst="ellipse">
+            <a:avLst/>
+          </a:prstGeom>
+          <a:solidFill>
+            <a:srgbClr val="4678B4"/>
+          </a:solidFill>
+          <a:ln>
+            <a:noFill/>
+          </a:ln>
+        </p:spPr>
+        <p:style>
+          <a:lnRef idx="1">
+            <a:schemeClr val="accent1"/>
+          </a:lnRef>
+          <a:fillRef idx="3">
+            <a:schemeClr val="accent1"/>
+          </a:fillRef>
+          <a:effectRef idx="2">
+            <a:schemeClr val="accent1"/>
+          </a:effectRef>
+          <a:fontRef idx="minor">
+            <a:schemeClr val="lt1"/>
+          </a:fontRef>
+        </p:style>
+        <p:txBody>
+          <a:bodyPr rtlCol="0" anchor="ctr"/>
+          <a:lstStyle/>
+          <a:p>
+            <a:pPr algn="ctr"/>
+          </a:p>
+        </p:txBody>
+      </p:sp>
+      <p:sp>
+        <p:nvSpPr>
+          <p:cNvPr id="15" name="TextBox 14"/>
+          <p:cNvSpPr txBox="1"/>
+          <p:nvPr/>
+        </p:nvSpPr>
+        <p:spPr>
+          <a:xfrm>
+            <a:off x="2255824" y="2414016"/>
+            <a:ext cx="384048" cy="365760"/>
+          </a:xfrm>
+          <a:prstGeom prst="rect">
+            <a:avLst/>
+          </a:prstGeom>
+          <a:noFill/>
+        </p:spPr>
+        <p:txBody>
+          <a:bodyPr wrap="none">
+            <a:spAutoFit/>
+          </a:bodyPr>
+          <a:lstStyle/>
+          <a:p>
+            <a:pPr algn="ctr">
               <a:spcAft>
-                <a:spcPts val="1600"/>
+                <a:spcPts val="1000"/>
               </a:spcAft>
             </a:pPr>
             <a:r>
-              <a:rPr sz="2800" b="0">
+              <a:rPr sz="1600" b="1">
                 <a:solidFill>
-                  <a:srgbClr val="5A606E"/>
+                  <a:srgbClr val="FFFFFF"/>
+                </a:solidFill>
+                <a:latin typeface="Microsoft YaHei"/>
+              </a:rPr>
+              <a:t>2</a:t>
+            </a:r>
+          </a:p>
+        </p:txBody>
+      </p:sp>
+      <p:sp>
+        <p:nvSpPr>
+          <p:cNvPr id="16" name="TextBox 15"/>
+          <p:cNvSpPr txBox="1"/>
+          <p:nvPr/>
+        </p:nvSpPr>
+        <p:spPr>
+          <a:xfrm>
+            <a:off x="2758744" y="2377440"/>
+            <a:ext cx="7772400" cy="502920"/>
+          </a:xfrm>
+          <a:prstGeom prst="rect">
+            <a:avLst/>
+          </a:prstGeom>
+          <a:noFill/>
+        </p:spPr>
+        <p:txBody>
+          <a:bodyPr wrap="none">
+            <a:spAutoFit/>
+          </a:bodyPr>
+          <a:lstStyle/>
+          <a:p>
+            <a:pPr algn="l">
+              <a:spcAft>
+                <a:spcPts val="1000"/>
+              </a:spcAft>
+            </a:pPr>
+            <a:r>
+              <a:rPr sz="2400" b="0">
+                <a:solidFill>
+                  <a:srgbClr val="323C50"/>
                 </a:solidFill>
                 <a:latin typeface="Microsoft YaHei"/>
               </a:rPr>
               <a:t>同伴交流：说说你的策展想法</a:t>
             </a:r>
           </a:p>
-          <a:p>
-            <a:pPr>
+        </p:txBody>
+      </p:sp>
+      <p:sp>
+        <p:nvSpPr>
+          <p:cNvPr id="17" name="Oval 16"/>
+          <p:cNvSpPr/>
+          <p:nvPr/>
+        </p:nvSpPr>
+        <p:spPr>
+          <a:xfrm>
+            <a:off x="2255824" y="2962656"/>
+            <a:ext cx="384048" cy="384048"/>
+          </a:xfrm>
+          <a:prstGeom prst="ellipse">
+            <a:avLst/>
+          </a:prstGeom>
+          <a:solidFill>
+            <a:srgbClr val="4678B4"/>
+          </a:solidFill>
+          <a:ln>
+            <a:noFill/>
+          </a:ln>
+        </p:spPr>
+        <p:style>
+          <a:lnRef idx="1">
+            <a:schemeClr val="accent1"/>
+          </a:lnRef>
+          <a:fillRef idx="3">
+            <a:schemeClr val="accent1"/>
+          </a:fillRef>
+          <a:effectRef idx="2">
+            <a:schemeClr val="accent1"/>
+          </a:effectRef>
+          <a:fontRef idx="minor">
+            <a:schemeClr val="lt1"/>
+          </a:fontRef>
+        </p:style>
+        <p:txBody>
+          <a:bodyPr rtlCol="0" anchor="ctr"/>
+          <a:lstStyle/>
+          <a:p>
+            <a:pPr algn="ctr"/>
+          </a:p>
+        </p:txBody>
+      </p:sp>
+      <p:sp>
+        <p:nvSpPr>
+          <p:cNvPr id="18" name="TextBox 17"/>
+          <p:cNvSpPr txBox="1"/>
+          <p:nvPr/>
+        </p:nvSpPr>
+        <p:spPr>
+          <a:xfrm>
+            <a:off x="2255824" y="2980944"/>
+            <a:ext cx="384048" cy="365760"/>
+          </a:xfrm>
+          <a:prstGeom prst="rect">
+            <a:avLst/>
+          </a:prstGeom>
+          <a:noFill/>
+        </p:spPr>
+        <p:txBody>
+          <a:bodyPr wrap="none">
+            <a:spAutoFit/>
+          </a:bodyPr>
+          <a:lstStyle/>
+          <a:p>
+            <a:pPr algn="ctr">
               <a:spcAft>
-                <a:spcPts val="1600"/>
+                <a:spcPts val="1000"/>
               </a:spcAft>
             </a:pPr>
             <a:r>
-              <a:rPr sz="2800" b="0">
+              <a:rPr sz="1600" b="1">
                 <a:solidFill>
-                  <a:srgbClr val="5A606E"/>
+                  <a:srgbClr val="FFFFFF"/>
                 </a:solidFill>
                 <a:latin typeface="Microsoft YaHei"/>
               </a:rPr>
-              <a:t>填写：本单元文体？阅读方法？</a:t>
+              <a:t>3</a:t>
+            </a:r>
+          </a:p>
+        </p:txBody>
+      </p:sp>
+      <p:sp>
+        <p:nvSpPr>
+          <p:cNvPr id="19" name="TextBox 18"/>
+          <p:cNvSpPr txBox="1"/>
+          <p:nvPr/>
+        </p:nvSpPr>
+        <p:spPr>
+          <a:xfrm>
+            <a:off x="2758744" y="2944368"/>
+            <a:ext cx="7772400" cy="502920"/>
+          </a:xfrm>
+          <a:prstGeom prst="rect">
+            <a:avLst/>
+          </a:prstGeom>
+          <a:noFill/>
+        </p:spPr>
+        <p:txBody>
+          <a:bodyPr wrap="none">
+            <a:spAutoFit/>
+          </a:bodyPr>
+          <a:lstStyle/>
+          <a:p>
+            <a:pPr algn="l">
+              <a:spcAft>
+                <a:spcPts val="1000"/>
+              </a:spcAft>
+            </a:pPr>
+            <a:r>
+              <a:rPr sz="2400" b="0">
+                <a:solidFill>
+                  <a:srgbClr val="323C50"/>
+                </a:solidFill>
+                <a:latin typeface="Microsoft YaHei"/>
+              </a:rPr>
+              <a:t>填写：本单元有哪些文体？阅读方法是什么？</a:t>
             </a:r>
           </a:p>
         </p:txBody>
@@ -4933,17 +6723,17 @@
         </p:nvSpPr>
         <p:spPr>
           <a:xfrm>
-            <a:off x="0" y="0"/>
-            <a:ext cx="12191695" cy="6858000"/>
-          </a:xfrm>
-          <a:prstGeom prst="rect">
-            <a:avLst/>
-          </a:prstGeom>
-          <a:solidFill>
-            <a:srgbClr val="FCFAF7"/>
-          </a:solidFill>
-          <a:ln>
-            <a:noFill/>
+            <a:off x="292608" y="274320"/>
+            <a:ext cx="11594592" cy="6300216"/>
+          </a:xfrm>
+          <a:prstGeom prst="rect">
+            <a:avLst/>
+          </a:prstGeom>
+          <a:noFill/>
+          <a:ln w="31750">
+            <a:solidFill>
+              <a:srgbClr val="6482AA"/>
+            </a:solidFill>
           </a:ln>
         </p:spPr>
         <p:style>
@@ -4968,22 +6758,70 @@
           </a:p>
         </p:txBody>
       </p:sp>
-      <p:sp>
-        <p:nvSpPr>
-          <p:cNvPr id="4" name="Rectangle 3"/>
+      <p:pic>
+        <p:nvPicPr>
+          <p:cNvPr id="4" name="Picture 3" descr="corner_unit_tl.png"/>
+          <p:cNvPicPr>
+            <a:picLocks noChangeAspect="1"/>
+          </p:cNvPicPr>
+          <p:nvPr/>
+        </p:nvPicPr>
+        <p:blipFill>
+          <a:blip r:embed="rId3"/>
+          <a:stretch>
+            <a:fillRect/>
+          </a:stretch>
+        </p:blipFill>
+        <p:spPr>
+          <a:xfrm>
+            <a:off x="-45720" y="-45720"/>
+            <a:ext cx="2011680" cy="2011680"/>
+          </a:xfrm>
+          <a:prstGeom prst="rect">
+            <a:avLst/>
+          </a:prstGeom>
+        </p:spPr>
+      </p:pic>
+      <p:pic>
+        <p:nvPicPr>
+          <p:cNvPr id="5" name="Picture 4" descr="corner_unit_tr.png"/>
+          <p:cNvPicPr>
+            <a:picLocks noChangeAspect="1"/>
+          </p:cNvPicPr>
+          <p:nvPr/>
+        </p:nvPicPr>
+        <p:blipFill>
+          <a:blip r:embed="rId4"/>
+          <a:stretch>
+            <a:fillRect/>
+          </a:stretch>
+        </p:blipFill>
+        <p:spPr>
+          <a:xfrm>
+            <a:off x="9875520" y="-45720"/>
+            <a:ext cx="2011680" cy="2011680"/>
+          </a:xfrm>
+          <a:prstGeom prst="rect">
+            <a:avLst/>
+          </a:prstGeom>
+        </p:spPr>
+      </p:pic>
+      <p:sp>
+        <p:nvSpPr>
+          <p:cNvPr id="6" name="Rounded Rectangle 5"/>
           <p:cNvSpPr/>
           <p:nvPr/>
         </p:nvSpPr>
         <p:spPr>
           <a:xfrm>
-            <a:off x="0" y="0"/>
-            <a:ext cx="12191695" cy="91440"/>
-          </a:xfrm>
-          <a:prstGeom prst="rect">
+            <a:off x="4953304" y="502920"/>
+            <a:ext cx="2286000" cy="411480"/>
+          </a:xfrm>
+          <a:prstGeom prst="roundRect">
             <a:avLst/>
           </a:prstGeom>
           <a:solidFill>
-            <a:srgbClr val="FFD166"/>
+            <a:srgbClr val="A0BEDC"/>
           </a:solidFill>
           <a:ln>
             <a:noFill/>
@@ -5013,14 +6851,14 @@
       </p:sp>
       <p:sp>
         <p:nvSpPr>
-          <p:cNvPr id="5" name="TextBox 4"/>
+          <p:cNvPr id="7" name="TextBox 6"/>
           <p:cNvSpPr txBox="1"/>
           <p:nvPr/>
         </p:nvSpPr>
         <p:spPr>
           <a:xfrm>
-            <a:off x="640080" y="228600"/>
-            <a:ext cx="2743200" cy="457200"/>
+            <a:off x="4953304" y="521208"/>
+            <a:ext cx="2286000" cy="384048"/>
           </a:xfrm>
           <a:prstGeom prst="rect">
             <a:avLst/>
@@ -5033,10 +6871,15 @@
           </a:bodyPr>
           <a:lstStyle/>
           <a:p>
-            <a:r>
-              <a:rPr sz="2000" b="1">
+            <a:pPr algn="ctr">
+              <a:spcAft>
+                <a:spcPts val="1000"/>
+              </a:spcAft>
+            </a:pPr>
+            <a:r>
+              <a:rPr sz="1800" b="1">
                 <a:solidFill>
-                  <a:srgbClr val="FFD166"/>
+                  <a:srgbClr val="323C50"/>
                 </a:solidFill>
                 <a:latin typeface="Microsoft YaHei"/>
               </a:rPr>
@@ -5047,14 +6890,184 @@
       </p:sp>
       <p:sp>
         <p:nvSpPr>
-          <p:cNvPr id="6" name="TextBox 5"/>
+          <p:cNvPr id="8" name="TextBox 7"/>
           <p:cNvSpPr txBox="1"/>
           <p:nvPr/>
         </p:nvSpPr>
         <p:spPr>
           <a:xfrm>
-            <a:off x="640080" y="685800"/>
-            <a:ext cx="10515600" cy="914400"/>
+            <a:off x="1371600" y="960120"/>
+            <a:ext cx="9418320" cy="822960"/>
+          </a:xfrm>
+          <a:prstGeom prst="rect">
+            <a:avLst/>
+          </a:prstGeom>
+          <a:noFill/>
+        </p:spPr>
+        <p:txBody>
+          <a:bodyPr wrap="square">
+            <a:spAutoFit/>
+          </a:bodyPr>
+          <a:lstStyle/>
+          <a:p>
+            <a:pPr algn="ctr">
+              <a:spcAft>
+                <a:spcPts val="1000"/>
+              </a:spcAft>
+            </a:pPr>
+            <a:r>
+              <a:rPr sz="3600" b="1">
+                <a:solidFill>
+                  <a:srgbClr val="4678B4"/>
+                </a:solidFill>
+                <a:latin typeface="Microsoft YaHei"/>
+              </a:rPr>
+              <a:t>学习任务二</a:t>
+            </a:r>
+          </a:p>
+        </p:txBody>
+      </p:sp>
+      <p:sp>
+        <p:nvSpPr>
+          <p:cNvPr id="9" name="Rectangle 8"/>
+          <p:cNvSpPr/>
+          <p:nvPr/>
+        </p:nvSpPr>
+        <p:spPr>
+          <a:xfrm>
+            <a:off x="3200400" y="1600200"/>
+            <a:ext cx="5760720" cy="27432"/>
+          </a:xfrm>
+          <a:prstGeom prst="rect">
+            <a:avLst/>
+          </a:prstGeom>
+          <a:solidFill>
+            <a:srgbClr val="A0BEDC"/>
+          </a:solidFill>
+          <a:ln>
+            <a:noFill/>
+          </a:ln>
+        </p:spPr>
+        <p:style>
+          <a:lnRef idx="1">
+            <a:schemeClr val="accent1"/>
+          </a:lnRef>
+          <a:fillRef idx="3">
+            <a:schemeClr val="accent1"/>
+          </a:fillRef>
+          <a:effectRef idx="2">
+            <a:schemeClr val="accent1"/>
+          </a:effectRef>
+          <a:fontRef idx="minor">
+            <a:schemeClr val="lt1"/>
+          </a:fontRef>
+        </p:style>
+        <p:txBody>
+          <a:bodyPr rtlCol="0" anchor="ctr"/>
+          <a:lstStyle/>
+          <a:p>
+            <a:pPr algn="ctr"/>
+          </a:p>
+        </p:txBody>
+      </p:sp>
+      <p:sp>
+        <p:nvSpPr>
+          <p:cNvPr id="10" name="Rounded Rectangle 9"/>
+          <p:cNvSpPr/>
+          <p:nvPr/>
+        </p:nvSpPr>
+        <p:spPr>
+          <a:xfrm>
+            <a:off x="1295704" y="1645920"/>
+            <a:ext cx="9601200" cy="2834640"/>
+          </a:xfrm>
+          <a:prstGeom prst="roundRect">
+            <a:avLst/>
+          </a:prstGeom>
+          <a:solidFill>
+            <a:srgbClr val="F8FAFF"/>
+          </a:solidFill>
+          <a:ln w="19050">
+            <a:solidFill>
+              <a:srgbClr val="A0BEDC"/>
+            </a:solidFill>
+          </a:ln>
+        </p:spPr>
+        <p:style>
+          <a:lnRef idx="1">
+            <a:schemeClr val="accent1"/>
+          </a:lnRef>
+          <a:fillRef idx="3">
+            <a:schemeClr val="accent1"/>
+          </a:fillRef>
+          <a:effectRef idx="2">
+            <a:schemeClr val="accent1"/>
+          </a:effectRef>
+          <a:fontRef idx="minor">
+            <a:schemeClr val="lt1"/>
+          </a:fontRef>
+        </p:style>
+        <p:txBody>
+          <a:bodyPr rtlCol="0" anchor="ctr"/>
+          <a:lstStyle/>
+          <a:p>
+            <a:pPr algn="ctr"/>
+          </a:p>
+        </p:txBody>
+      </p:sp>
+      <p:sp>
+        <p:nvSpPr>
+          <p:cNvPr id="11" name="Oval 10"/>
+          <p:cNvSpPr/>
+          <p:nvPr/>
+        </p:nvSpPr>
+        <p:spPr>
+          <a:xfrm>
+            <a:off x="2255824" y="1828800"/>
+            <a:ext cx="384048" cy="384048"/>
+          </a:xfrm>
+          <a:prstGeom prst="ellipse">
+            <a:avLst/>
+          </a:prstGeom>
+          <a:solidFill>
+            <a:srgbClr val="4678B4"/>
+          </a:solidFill>
+          <a:ln>
+            <a:noFill/>
+          </a:ln>
+        </p:spPr>
+        <p:style>
+          <a:lnRef idx="1">
+            <a:schemeClr val="accent1"/>
+          </a:lnRef>
+          <a:fillRef idx="3">
+            <a:schemeClr val="accent1"/>
+          </a:fillRef>
+          <a:effectRef idx="2">
+            <a:schemeClr val="accent1"/>
+          </a:effectRef>
+          <a:fontRef idx="minor">
+            <a:schemeClr val="lt1"/>
+          </a:fontRef>
+        </p:style>
+        <p:txBody>
+          <a:bodyPr rtlCol="0" anchor="ctr"/>
+          <a:lstStyle/>
+          <a:p>
+            <a:pPr algn="ctr"/>
+          </a:p>
+        </p:txBody>
+      </p:sp>
+      <p:sp>
+        <p:nvSpPr>
+          <p:cNvPr id="12" name="TextBox 11"/>
+          <p:cNvSpPr txBox="1"/>
+          <p:nvPr/>
+        </p:nvSpPr>
+        <p:spPr>
+          <a:xfrm>
+            <a:off x="2255824" y="1847088"/>
+            <a:ext cx="384048" cy="365760"/>
           </a:xfrm>
           <a:prstGeom prst="rect">
             <a:avLst/>
@@ -5067,28 +7080,33 @@
           </a:bodyPr>
           <a:lstStyle/>
           <a:p>
-            <a:r>
-              <a:rPr sz="3600" b="1">
+            <a:pPr algn="ctr">
+              <a:spcAft>
+                <a:spcPts val="1000"/>
+              </a:spcAft>
+            </a:pPr>
+            <a:r>
+              <a:rPr sz="1600" b="1">
                 <a:solidFill>
-                  <a:srgbClr val="5A606E"/>
+                  <a:srgbClr val="FFFFFF"/>
                 </a:solidFill>
                 <a:latin typeface="Microsoft YaHei"/>
               </a:rPr>
-              <a:t>学习任务二 · 读得快也读得准</a:t>
-            </a:r>
-          </a:p>
-        </p:txBody>
-      </p:sp>
-      <p:sp>
-        <p:nvSpPr>
-          <p:cNvPr id="7" name="TextBox 6"/>
+              <a:t>1</a:t>
+            </a:r>
+          </a:p>
+        </p:txBody>
+      </p:sp>
+      <p:sp>
+        <p:nvSpPr>
+          <p:cNvPr id="13" name="TextBox 12"/>
           <p:cNvSpPr txBox="1"/>
           <p:nvPr/>
         </p:nvSpPr>
         <p:spPr>
           <a:xfrm>
-            <a:off x="822960" y="1691640"/>
-            <a:ext cx="10241280" cy="4389120"/>
+            <a:off x="2758744" y="1810512"/>
+            <a:ext cx="7772400" cy="502920"/>
           </a:xfrm>
           <a:prstGeom prst="rect">
             <a:avLst/>
@@ -5096,56 +7114,387 @@
           <a:noFill/>
         </p:spPr>
         <p:txBody>
-          <a:bodyPr wrap="square" anchor="t">
+          <a:bodyPr wrap="none">
             <a:spAutoFit/>
           </a:bodyPr>
           <a:lstStyle/>
           <a:p>
-            <a:pPr>
+            <a:pPr algn="l">
               <a:spcAft>
-                <a:spcPts val="1600"/>
+                <a:spcPts val="1000"/>
               </a:spcAft>
             </a:pPr>
             <a:r>
-              <a:rPr sz="2800" b="0">
+              <a:rPr sz="2400" b="0">
                 <a:solidFill>
-                  <a:srgbClr val="5A606E"/>
+                  <a:srgbClr val="323C50"/>
                 </a:solidFill>
                 <a:latin typeface="Microsoft YaHei"/>
               </a:rPr>
               <a:t>快速默读（不出声、不指读）</a:t>
             </a:r>
           </a:p>
-          <a:p>
-            <a:pPr>
+        </p:txBody>
+      </p:sp>
+      <p:sp>
+        <p:nvSpPr>
+          <p:cNvPr id="14" name="Oval 13"/>
+          <p:cNvSpPr/>
+          <p:nvPr/>
+        </p:nvSpPr>
+        <p:spPr>
+          <a:xfrm>
+            <a:off x="2255824" y="2395728"/>
+            <a:ext cx="384048" cy="384048"/>
+          </a:xfrm>
+          <a:prstGeom prst="ellipse">
+            <a:avLst/>
+          </a:prstGeom>
+          <a:solidFill>
+            <a:srgbClr val="4678B4"/>
+          </a:solidFill>
+          <a:ln>
+            <a:noFill/>
+          </a:ln>
+        </p:spPr>
+        <p:style>
+          <a:lnRef idx="1">
+            <a:schemeClr val="accent1"/>
+          </a:lnRef>
+          <a:fillRef idx="3">
+            <a:schemeClr val="accent1"/>
+          </a:fillRef>
+          <a:effectRef idx="2">
+            <a:schemeClr val="accent1"/>
+          </a:effectRef>
+          <a:fontRef idx="minor">
+            <a:schemeClr val="lt1"/>
+          </a:fontRef>
+        </p:style>
+        <p:txBody>
+          <a:bodyPr rtlCol="0" anchor="ctr"/>
+          <a:lstStyle/>
+          <a:p>
+            <a:pPr algn="ctr"/>
+          </a:p>
+        </p:txBody>
+      </p:sp>
+      <p:sp>
+        <p:nvSpPr>
+          <p:cNvPr id="15" name="TextBox 14"/>
+          <p:cNvSpPr txBox="1"/>
+          <p:nvPr/>
+        </p:nvSpPr>
+        <p:spPr>
+          <a:xfrm>
+            <a:off x="2255824" y="2414016"/>
+            <a:ext cx="384048" cy="365760"/>
+          </a:xfrm>
+          <a:prstGeom prst="rect">
+            <a:avLst/>
+          </a:prstGeom>
+          <a:noFill/>
+        </p:spPr>
+        <p:txBody>
+          <a:bodyPr wrap="none">
+            <a:spAutoFit/>
+          </a:bodyPr>
+          <a:lstStyle/>
+          <a:p>
+            <a:pPr algn="ctr">
               <a:spcAft>
-                <a:spcPts val="1600"/>
+                <a:spcPts val="1000"/>
               </a:spcAft>
             </a:pPr>
             <a:r>
-              <a:rPr sz="2800" b="0">
+              <a:rPr sz="1600" b="1">
                 <a:solidFill>
-                  <a:srgbClr val="5A606E"/>
+                  <a:srgbClr val="FFFFFF"/>
+                </a:solidFill>
+                <a:latin typeface="Microsoft YaHei"/>
+              </a:rPr>
+              <a:t>2</a:t>
+            </a:r>
+          </a:p>
+        </p:txBody>
+      </p:sp>
+      <p:sp>
+        <p:nvSpPr>
+          <p:cNvPr id="16" name="TextBox 15"/>
+          <p:cNvSpPr txBox="1"/>
+          <p:nvPr/>
+        </p:nvSpPr>
+        <p:spPr>
+          <a:xfrm>
+            <a:off x="2758744" y="2377440"/>
+            <a:ext cx="7772400" cy="502920"/>
+          </a:xfrm>
+          <a:prstGeom prst="rect">
+            <a:avLst/>
+          </a:prstGeom>
+          <a:noFill/>
+        </p:spPr>
+        <p:txBody>
+          <a:bodyPr wrap="none">
+            <a:spAutoFit/>
+          </a:bodyPr>
+          <a:lstStyle/>
+          <a:p>
+            <a:pPr algn="l">
+              <a:spcAft>
+                <a:spcPts val="1000"/>
+              </a:spcAft>
+            </a:pPr>
+            <a:r>
+              <a:rPr sz="2400" b="0">
+                <a:solidFill>
+                  <a:srgbClr val="323C50"/>
                 </a:solidFill>
                 <a:latin typeface="Microsoft YaHei"/>
               </a:rPr>
               <a:t>段末停顿，用5—8字记录段意</a:t>
             </a:r>
           </a:p>
-          <a:p>
-            <a:pPr>
+        </p:txBody>
+      </p:sp>
+      <p:sp>
+        <p:nvSpPr>
+          <p:cNvPr id="17" name="Oval 16"/>
+          <p:cNvSpPr/>
+          <p:nvPr/>
+        </p:nvSpPr>
+        <p:spPr>
+          <a:xfrm>
+            <a:off x="2255824" y="2962656"/>
+            <a:ext cx="384048" cy="384048"/>
+          </a:xfrm>
+          <a:prstGeom prst="ellipse">
+            <a:avLst/>
+          </a:prstGeom>
+          <a:solidFill>
+            <a:srgbClr val="4678B4"/>
+          </a:solidFill>
+          <a:ln>
+            <a:noFill/>
+          </a:ln>
+        </p:spPr>
+        <p:style>
+          <a:lnRef idx="1">
+            <a:schemeClr val="accent1"/>
+          </a:lnRef>
+          <a:fillRef idx="3">
+            <a:schemeClr val="accent1"/>
+          </a:fillRef>
+          <a:effectRef idx="2">
+            <a:schemeClr val="accent1"/>
+          </a:effectRef>
+          <a:fontRef idx="minor">
+            <a:schemeClr val="lt1"/>
+          </a:fontRef>
+        </p:style>
+        <p:txBody>
+          <a:bodyPr rtlCol="0" anchor="ctr"/>
+          <a:lstStyle/>
+          <a:p>
+            <a:pPr algn="ctr"/>
+          </a:p>
+        </p:txBody>
+      </p:sp>
+      <p:sp>
+        <p:nvSpPr>
+          <p:cNvPr id="18" name="TextBox 17"/>
+          <p:cNvSpPr txBox="1"/>
+          <p:nvPr/>
+        </p:nvSpPr>
+        <p:spPr>
+          <a:xfrm>
+            <a:off x="2255824" y="2980944"/>
+            <a:ext cx="384048" cy="365760"/>
+          </a:xfrm>
+          <a:prstGeom prst="rect">
+            <a:avLst/>
+          </a:prstGeom>
+          <a:noFill/>
+        </p:spPr>
+        <p:txBody>
+          <a:bodyPr wrap="none">
+            <a:spAutoFit/>
+          </a:bodyPr>
+          <a:lstStyle/>
+          <a:p>
+            <a:pPr algn="ctr">
               <a:spcAft>
-                <a:spcPts val="1600"/>
+                <a:spcPts val="1000"/>
               </a:spcAft>
             </a:pPr>
             <a:r>
-              <a:rPr sz="2800" b="0">
+              <a:rPr sz="1600" b="1">
                 <a:solidFill>
-                  <a:srgbClr val="5A606E"/>
+                  <a:srgbClr val="FFFFFF"/>
                 </a:solidFill>
                 <a:latin typeface="Microsoft YaHei"/>
               </a:rPr>
-              <a:t>归纳复述三要素：人物、＿＿、＿＿</a:t>
+              <a:t>3</a:t>
+            </a:r>
+          </a:p>
+        </p:txBody>
+      </p:sp>
+      <p:sp>
+        <p:nvSpPr>
+          <p:cNvPr id="19" name="TextBox 18"/>
+          <p:cNvSpPr txBox="1"/>
+          <p:nvPr/>
+        </p:nvSpPr>
+        <p:spPr>
+          <a:xfrm>
+            <a:off x="2758744" y="2944368"/>
+            <a:ext cx="7772400" cy="502920"/>
+          </a:xfrm>
+          <a:prstGeom prst="rect">
+            <a:avLst/>
+          </a:prstGeom>
+          <a:noFill/>
+        </p:spPr>
+        <p:txBody>
+          <a:bodyPr wrap="none">
+            <a:spAutoFit/>
+          </a:bodyPr>
+          <a:lstStyle/>
+          <a:p>
+            <a:pPr algn="l">
+              <a:spcAft>
+                <a:spcPts val="1000"/>
+              </a:spcAft>
+            </a:pPr>
+            <a:r>
+              <a:rPr sz="2400" b="0">
+                <a:solidFill>
+                  <a:srgbClr val="323C50"/>
+                </a:solidFill>
+                <a:latin typeface="Microsoft YaHei"/>
+              </a:rPr>
+              <a:t>归纳复述三要素：人物、事件、结果</a:t>
+            </a:r>
+          </a:p>
+        </p:txBody>
+      </p:sp>
+      <p:sp>
+        <p:nvSpPr>
+          <p:cNvPr id="20" name="Oval 19"/>
+          <p:cNvSpPr/>
+          <p:nvPr/>
+        </p:nvSpPr>
+        <p:spPr>
+          <a:xfrm>
+            <a:off x="2255824" y="3529584"/>
+            <a:ext cx="384048" cy="384048"/>
+          </a:xfrm>
+          <a:prstGeom prst="ellipse">
+            <a:avLst/>
+          </a:prstGeom>
+          <a:solidFill>
+            <a:srgbClr val="4678B4"/>
+          </a:solidFill>
+          <a:ln>
+            <a:noFill/>
+          </a:ln>
+        </p:spPr>
+        <p:style>
+          <a:lnRef idx="1">
+            <a:schemeClr val="accent1"/>
+          </a:lnRef>
+          <a:fillRef idx="3">
+            <a:schemeClr val="accent1"/>
+          </a:fillRef>
+          <a:effectRef idx="2">
+            <a:schemeClr val="accent1"/>
+          </a:effectRef>
+          <a:fontRef idx="minor">
+            <a:schemeClr val="lt1"/>
+          </a:fontRef>
+        </p:style>
+        <p:txBody>
+          <a:bodyPr rtlCol="0" anchor="ctr"/>
+          <a:lstStyle/>
+          <a:p>
+            <a:pPr algn="ctr"/>
+          </a:p>
+        </p:txBody>
+      </p:sp>
+      <p:sp>
+        <p:nvSpPr>
+          <p:cNvPr id="21" name="TextBox 20"/>
+          <p:cNvSpPr txBox="1"/>
+          <p:nvPr/>
+        </p:nvSpPr>
+        <p:spPr>
+          <a:xfrm>
+            <a:off x="2255824" y="3547872"/>
+            <a:ext cx="384048" cy="365760"/>
+          </a:xfrm>
+          <a:prstGeom prst="rect">
+            <a:avLst/>
+          </a:prstGeom>
+          <a:noFill/>
+        </p:spPr>
+        <p:txBody>
+          <a:bodyPr wrap="none">
+            <a:spAutoFit/>
+          </a:bodyPr>
+          <a:lstStyle/>
+          <a:p>
+            <a:pPr algn="ctr">
+              <a:spcAft>
+                <a:spcPts val="1000"/>
+              </a:spcAft>
+            </a:pPr>
+            <a:r>
+              <a:rPr sz="1600" b="1">
+                <a:solidFill>
+                  <a:srgbClr val="FFFFFF"/>
+                </a:solidFill>
+                <a:latin typeface="Microsoft YaHei"/>
+              </a:rPr>
+              <a:t>4</a:t>
+            </a:r>
+          </a:p>
+        </p:txBody>
+      </p:sp>
+      <p:sp>
+        <p:nvSpPr>
+          <p:cNvPr id="22" name="TextBox 21"/>
+          <p:cNvSpPr txBox="1"/>
+          <p:nvPr/>
+        </p:nvSpPr>
+        <p:spPr>
+          <a:xfrm>
+            <a:off x="2758744" y="3511296"/>
+            <a:ext cx="7772400" cy="502920"/>
+          </a:xfrm>
+          <a:prstGeom prst="rect">
+            <a:avLst/>
+          </a:prstGeom>
+          <a:noFill/>
+        </p:spPr>
+        <p:txBody>
+          <a:bodyPr wrap="none">
+            <a:spAutoFit/>
+          </a:bodyPr>
+          <a:lstStyle/>
+          <a:p>
+            <a:pPr algn="l">
+              <a:spcAft>
+                <a:spcPts val="1000"/>
+              </a:spcAft>
+            </a:pPr>
+            <a:r>
+              <a:rPr sz="2400" b="0">
+                <a:solidFill>
+                  <a:srgbClr val="323C50"/>
+                </a:solidFill>
+                <a:latin typeface="Microsoft YaHei"/>
+              </a:rPr>
+              <a:t>同桌互评：是否说清人物、事件、结果？</a:t>
             </a:r>
           </a:p>
         </p:txBody>
@@ -5200,17 +7549,17 @@
         </p:nvSpPr>
         <p:spPr>
           <a:xfrm>
-            <a:off x="0" y="0"/>
-            <a:ext cx="12191695" cy="6858000"/>
-          </a:xfrm>
-          <a:prstGeom prst="rect">
-            <a:avLst/>
-          </a:prstGeom>
-          <a:solidFill>
-            <a:srgbClr val="FCFAF7"/>
-          </a:solidFill>
-          <a:ln>
-            <a:noFill/>
+            <a:off x="292608" y="274320"/>
+            <a:ext cx="11594592" cy="6300216"/>
+          </a:xfrm>
+          <a:prstGeom prst="rect">
+            <a:avLst/>
+          </a:prstGeom>
+          <a:noFill/>
+          <a:ln w="31750">
+            <a:solidFill>
+              <a:srgbClr val="6482AA"/>
+            </a:solidFill>
           </a:ln>
         </p:spPr>
         <p:style>
@@ -5235,22 +7584,70 @@
           </a:p>
         </p:txBody>
       </p:sp>
-      <p:sp>
-        <p:nvSpPr>
-          <p:cNvPr id="4" name="Rectangle 3"/>
+      <p:pic>
+        <p:nvPicPr>
+          <p:cNvPr id="4" name="Picture 3" descr="corner_unit_tl.png"/>
+          <p:cNvPicPr>
+            <a:picLocks noChangeAspect="1"/>
+          </p:cNvPicPr>
+          <p:nvPr/>
+        </p:nvPicPr>
+        <p:blipFill>
+          <a:blip r:embed="rId3"/>
+          <a:stretch>
+            <a:fillRect/>
+          </a:stretch>
+        </p:blipFill>
+        <p:spPr>
+          <a:xfrm>
+            <a:off x="-45720" y="-45720"/>
+            <a:ext cx="2011680" cy="2011680"/>
+          </a:xfrm>
+          <a:prstGeom prst="rect">
+            <a:avLst/>
+          </a:prstGeom>
+        </p:spPr>
+      </p:pic>
+      <p:pic>
+        <p:nvPicPr>
+          <p:cNvPr id="5" name="Picture 4" descr="corner_unit_tr.png"/>
+          <p:cNvPicPr>
+            <a:picLocks noChangeAspect="1"/>
+          </p:cNvPicPr>
+          <p:nvPr/>
+        </p:nvPicPr>
+        <p:blipFill>
+          <a:blip r:embed="rId4"/>
+          <a:stretch>
+            <a:fillRect/>
+          </a:stretch>
+        </p:blipFill>
+        <p:spPr>
+          <a:xfrm>
+            <a:off x="9875520" y="-45720"/>
+            <a:ext cx="2011680" cy="2011680"/>
+          </a:xfrm>
+          <a:prstGeom prst="rect">
+            <a:avLst/>
+          </a:prstGeom>
+        </p:spPr>
+      </p:pic>
+      <p:sp>
+        <p:nvSpPr>
+          <p:cNvPr id="6" name="Rounded Rectangle 5"/>
           <p:cNvSpPr/>
           <p:nvPr/>
         </p:nvSpPr>
         <p:spPr>
           <a:xfrm>
-            <a:off x="0" y="0"/>
-            <a:ext cx="12191695" cy="109728"/>
-          </a:xfrm>
-          <a:prstGeom prst="rect">
+            <a:off x="4953304" y="502920"/>
+            <a:ext cx="2286000" cy="411480"/>
+          </a:xfrm>
+          <a:prstGeom prst="roundRect">
             <a:avLst/>
           </a:prstGeom>
           <a:solidFill>
-            <a:srgbClr val="A4B4C4"/>
+            <a:srgbClr val="A0BEDC"/>
           </a:solidFill>
           <a:ln>
             <a:noFill/>
@@ -5280,14 +7677,53 @@
       </p:sp>
       <p:sp>
         <p:nvSpPr>
-          <p:cNvPr id="5" name="TextBox 4"/>
+          <p:cNvPr id="7" name="TextBox 6"/>
           <p:cNvSpPr txBox="1"/>
           <p:nvPr/>
         </p:nvSpPr>
         <p:spPr>
           <a:xfrm>
-            <a:off x="914400" y="1828800"/>
-            <a:ext cx="10058400" cy="2286000"/>
+            <a:off x="4953304" y="521208"/>
+            <a:ext cx="2286000" cy="384048"/>
+          </a:xfrm>
+          <a:prstGeom prst="rect">
+            <a:avLst/>
+          </a:prstGeom>
+          <a:noFill/>
+        </p:spPr>
+        <p:txBody>
+          <a:bodyPr wrap="none">
+            <a:spAutoFit/>
+          </a:bodyPr>
+          <a:lstStyle/>
+          <a:p>
+            <a:pPr algn="ctr">
+              <a:spcAft>
+                <a:spcPts val="1000"/>
+              </a:spcAft>
+            </a:pPr>
+            <a:r>
+              <a:rPr sz="1800" b="1">
+                <a:solidFill>
+                  <a:srgbClr val="323C50"/>
+                </a:solidFill>
+                <a:latin typeface="Microsoft YaHei"/>
+              </a:rPr>
+              <a:t>回顾收获</a:t>
+            </a:r>
+          </a:p>
+        </p:txBody>
+      </p:sp>
+      <p:sp>
+        <p:nvSpPr>
+          <p:cNvPr id="8" name="TextBox 7"/>
+          <p:cNvSpPr txBox="1"/>
+          <p:nvPr/>
+        </p:nvSpPr>
+        <p:spPr>
+          <a:xfrm>
+            <a:off x="1371600" y="960120"/>
+            <a:ext cx="9418320" cy="822960"/>
           </a:xfrm>
           <a:prstGeom prst="rect">
             <a:avLst/>
@@ -5300,46 +7736,203 @@
           </a:bodyPr>
           <a:lstStyle/>
           <a:p>
-            <a:pPr algn="ctr"/>
-            <a:r>
-              <a:rPr sz="3000" b="1">
+            <a:pPr algn="ctr">
+              <a:spcAft>
+                <a:spcPts val="1000"/>
+              </a:spcAft>
+            </a:pPr>
+            <a:r>
+              <a:rPr sz="3600" b="1">
                 <a:solidFill>
-                  <a:srgbClr val="A4B4C4"/>
+                  <a:srgbClr val="4678B4"/>
                 </a:solidFill>
                 <a:latin typeface="Microsoft YaHei"/>
               </a:rPr>
-              <a:t>💭 想一想</a:t>
-            </a:r>
-          </a:p>
+              <a:t>课堂小结</a:t>
+            </a:r>
+          </a:p>
+        </p:txBody>
+      </p:sp>
+      <p:sp>
+        <p:nvSpPr>
+          <p:cNvPr id="9" name="Rectangle 8"/>
+          <p:cNvSpPr/>
+          <p:nvPr/>
+        </p:nvSpPr>
+        <p:spPr>
+          <a:xfrm>
+            <a:off x="3200400" y="1600200"/>
+            <a:ext cx="5760720" cy="27432"/>
+          </a:xfrm>
+          <a:prstGeom prst="rect">
+            <a:avLst/>
+          </a:prstGeom>
+          <a:solidFill>
+            <a:srgbClr val="A0BEDC"/>
+          </a:solidFill>
+          <a:ln>
+            <a:noFill/>
+          </a:ln>
+        </p:spPr>
+        <p:style>
+          <a:lnRef idx="1">
+            <a:schemeClr val="accent1"/>
+          </a:lnRef>
+          <a:fillRef idx="3">
+            <a:schemeClr val="accent1"/>
+          </a:fillRef>
+          <a:effectRef idx="2">
+            <a:schemeClr val="accent1"/>
+          </a:effectRef>
+          <a:fontRef idx="minor">
+            <a:schemeClr val="lt1"/>
+          </a:fontRef>
+        </p:style>
+        <p:txBody>
+          <a:bodyPr rtlCol="0" anchor="ctr"/>
+          <a:lstStyle/>
+          <a:p>
+            <a:pPr algn="ctr"/>
+          </a:p>
+        </p:txBody>
+      </p:sp>
+      <p:sp>
+        <p:nvSpPr>
+          <p:cNvPr id="10" name="Rounded Rectangle 9"/>
+          <p:cNvSpPr/>
+          <p:nvPr/>
+        </p:nvSpPr>
+        <p:spPr>
+          <a:xfrm>
+            <a:off x="1295704" y="1645920"/>
+            <a:ext cx="9601200" cy="2240280"/>
+          </a:xfrm>
+          <a:prstGeom prst="roundRect">
+            <a:avLst/>
+          </a:prstGeom>
+          <a:solidFill>
+            <a:srgbClr val="F8FAFF"/>
+          </a:solidFill>
+          <a:ln w="19050">
+            <a:solidFill>
+              <a:srgbClr val="A0BEDC"/>
+            </a:solidFill>
+          </a:ln>
+        </p:spPr>
+        <p:style>
+          <a:lnRef idx="1">
+            <a:schemeClr val="accent1"/>
+          </a:lnRef>
+          <a:fillRef idx="3">
+            <a:schemeClr val="accent1"/>
+          </a:fillRef>
+          <a:effectRef idx="2">
+            <a:schemeClr val="accent1"/>
+          </a:effectRef>
+          <a:fontRef idx="minor">
+            <a:schemeClr val="lt1"/>
+          </a:fontRef>
+        </p:style>
+        <p:txBody>
+          <a:bodyPr rtlCol="0" anchor="ctr"/>
+          <a:lstStyle/>
+          <a:p>
+            <a:pPr algn="ctr"/>
+          </a:p>
+        </p:txBody>
+      </p:sp>
+      <p:sp>
+        <p:nvSpPr>
+          <p:cNvPr id="11" name="Oval 10"/>
+          <p:cNvSpPr/>
+          <p:nvPr/>
+        </p:nvSpPr>
+        <p:spPr>
+          <a:xfrm>
+            <a:off x="2255824" y="1828800"/>
+            <a:ext cx="384048" cy="384048"/>
+          </a:xfrm>
+          <a:prstGeom prst="ellipse">
+            <a:avLst/>
+          </a:prstGeom>
+          <a:solidFill>
+            <a:srgbClr val="4678B4"/>
+          </a:solidFill>
+          <a:ln>
+            <a:noFill/>
+          </a:ln>
+        </p:spPr>
+        <p:style>
+          <a:lnRef idx="1">
+            <a:schemeClr val="accent1"/>
+          </a:lnRef>
+          <a:fillRef idx="3">
+            <a:schemeClr val="accent1"/>
+          </a:fillRef>
+          <a:effectRef idx="2">
+            <a:schemeClr val="accent1"/>
+          </a:effectRef>
+          <a:fontRef idx="minor">
+            <a:schemeClr val="lt1"/>
+          </a:fontRef>
+        </p:style>
+        <p:txBody>
+          <a:bodyPr rtlCol="0" anchor="ctr"/>
+          <a:lstStyle/>
+          <a:p>
+            <a:pPr algn="ctr"/>
+          </a:p>
+        </p:txBody>
+      </p:sp>
+      <p:sp>
+        <p:nvSpPr>
+          <p:cNvPr id="12" name="TextBox 11"/>
+          <p:cNvSpPr txBox="1"/>
+          <p:nvPr/>
+        </p:nvSpPr>
+        <p:spPr>
+          <a:xfrm>
+            <a:off x="2255824" y="1847088"/>
+            <a:ext cx="384048" cy="365760"/>
+          </a:xfrm>
+          <a:prstGeom prst="rect">
+            <a:avLst/>
+          </a:prstGeom>
+          <a:noFill/>
+        </p:spPr>
+        <p:txBody>
+          <a:bodyPr wrap="none">
+            <a:spAutoFit/>
+          </a:bodyPr>
+          <a:lstStyle/>
           <a:p>
             <a:pPr algn="ctr">
-              <a:spcBef>
-                <a:spcPts val="2000"/>
-              </a:spcBef>
+              <a:spcAft>
+                <a:spcPts val="1000"/>
+              </a:spcAft>
             </a:pPr>
             <a:r>
-              <a:rPr sz="3400" b="1">
+              <a:rPr sz="1600" b="1">
                 <a:solidFill>
-                  <a:srgbClr val="5A606E"/>
+                  <a:srgbClr val="FFFFFF"/>
                 </a:solidFill>
                 <a:latin typeface="Microsoft YaHei"/>
               </a:rPr>
-              <a:t>同桌互评：你说清
-人物、事件、结果了吗？</a:t>
-            </a:r>
-          </a:p>
-        </p:txBody>
-      </p:sp>
-      <p:sp>
-        <p:nvSpPr>
-          <p:cNvPr id="6" name="TextBox 5"/>
+              <a:t>1</a:t>
+            </a:r>
+          </a:p>
+        </p:txBody>
+      </p:sp>
+      <p:sp>
+        <p:nvSpPr>
+          <p:cNvPr id="13" name="TextBox 12"/>
           <p:cNvSpPr txBox="1"/>
           <p:nvPr/>
         </p:nvSpPr>
         <p:spPr>
           <a:xfrm>
-            <a:off x="1371600" y="4572000"/>
-            <a:ext cx="9144000" cy="1097280"/>
+            <a:off x="2758744" y="1810512"/>
+            <a:ext cx="7772400" cy="502920"/>
           </a:xfrm>
           <a:prstGeom prst="rect">
             <a:avLst/>
@@ -5352,15 +7945,261 @@
           </a:bodyPr>
           <a:lstStyle/>
           <a:p>
-            <a:pPr algn="ctr"/>
+            <a:pPr algn="l">
+              <a:spcAft>
+                <a:spcPts val="1000"/>
+              </a:spcAft>
+            </a:pPr>
             <a:r>
               <a:rPr sz="2400" b="0">
                 <a:solidFill>
-                  <a:srgbClr val="A4B4C4"/>
+                  <a:srgbClr val="323C50"/>
                 </a:solidFill>
                 <a:latin typeface="Microsoft YaHei"/>
               </a:rPr>
-              <a:t>每分钟阅读不少于400字</a:t>
+              <a:t>本单元学习重点：想象与真实</a:t>
+            </a:r>
+          </a:p>
+        </p:txBody>
+      </p:sp>
+      <p:sp>
+        <p:nvSpPr>
+          <p:cNvPr id="14" name="Oval 13"/>
+          <p:cNvSpPr/>
+          <p:nvPr/>
+        </p:nvSpPr>
+        <p:spPr>
+          <a:xfrm>
+            <a:off x="2255824" y="2395728"/>
+            <a:ext cx="384048" cy="384048"/>
+          </a:xfrm>
+          <a:prstGeom prst="ellipse">
+            <a:avLst/>
+          </a:prstGeom>
+          <a:solidFill>
+            <a:srgbClr val="4678B4"/>
+          </a:solidFill>
+          <a:ln>
+            <a:noFill/>
+          </a:ln>
+        </p:spPr>
+        <p:style>
+          <a:lnRef idx="1">
+            <a:schemeClr val="accent1"/>
+          </a:lnRef>
+          <a:fillRef idx="3">
+            <a:schemeClr val="accent1"/>
+          </a:fillRef>
+          <a:effectRef idx="2">
+            <a:schemeClr val="accent1"/>
+          </a:effectRef>
+          <a:fontRef idx="minor">
+            <a:schemeClr val="lt1"/>
+          </a:fontRef>
+        </p:style>
+        <p:txBody>
+          <a:bodyPr rtlCol="0" anchor="ctr"/>
+          <a:lstStyle/>
+          <a:p>
+            <a:pPr algn="ctr"/>
+          </a:p>
+        </p:txBody>
+      </p:sp>
+      <p:sp>
+        <p:nvSpPr>
+          <p:cNvPr id="15" name="TextBox 14"/>
+          <p:cNvSpPr txBox="1"/>
+          <p:nvPr/>
+        </p:nvSpPr>
+        <p:spPr>
+          <a:xfrm>
+            <a:off x="2255824" y="2414016"/>
+            <a:ext cx="384048" cy="365760"/>
+          </a:xfrm>
+          <a:prstGeom prst="rect">
+            <a:avLst/>
+          </a:prstGeom>
+          <a:noFill/>
+        </p:spPr>
+        <p:txBody>
+          <a:bodyPr wrap="none">
+            <a:spAutoFit/>
+          </a:bodyPr>
+          <a:lstStyle/>
+          <a:p>
+            <a:pPr algn="ctr">
+              <a:spcAft>
+                <a:spcPts val="1000"/>
+              </a:spcAft>
+            </a:pPr>
+            <a:r>
+              <a:rPr sz="1600" b="1">
+                <a:solidFill>
+                  <a:srgbClr val="FFFFFF"/>
+                </a:solidFill>
+                <a:latin typeface="Microsoft YaHei"/>
+              </a:rPr>
+              <a:t>2</a:t>
+            </a:r>
+          </a:p>
+        </p:txBody>
+      </p:sp>
+      <p:sp>
+        <p:nvSpPr>
+          <p:cNvPr id="16" name="TextBox 15"/>
+          <p:cNvSpPr txBox="1"/>
+          <p:nvPr/>
+        </p:nvSpPr>
+        <p:spPr>
+          <a:xfrm>
+            <a:off x="2758744" y="2377440"/>
+            <a:ext cx="7772400" cy="502920"/>
+          </a:xfrm>
+          <a:prstGeom prst="rect">
+            <a:avLst/>
+          </a:prstGeom>
+          <a:noFill/>
+        </p:spPr>
+        <p:txBody>
+          <a:bodyPr wrap="none">
+            <a:spAutoFit/>
+          </a:bodyPr>
+          <a:lstStyle/>
+          <a:p>
+            <a:pPr algn="l">
+              <a:spcAft>
+                <a:spcPts val="1000"/>
+              </a:spcAft>
+            </a:pPr>
+            <a:r>
+              <a:rPr sz="2400" b="0">
+                <a:solidFill>
+                  <a:srgbClr val="323C50"/>
+                </a:solidFill>
+                <a:latin typeface="Microsoft YaHei"/>
+              </a:rPr>
+              <a:t>四条策展主题：自由→真实→创造→智慧</a:t>
+            </a:r>
+          </a:p>
+        </p:txBody>
+      </p:sp>
+      <p:sp>
+        <p:nvSpPr>
+          <p:cNvPr id="17" name="Oval 16"/>
+          <p:cNvSpPr/>
+          <p:nvPr/>
+        </p:nvSpPr>
+        <p:spPr>
+          <a:xfrm>
+            <a:off x="2255824" y="2962656"/>
+            <a:ext cx="384048" cy="384048"/>
+          </a:xfrm>
+          <a:prstGeom prst="ellipse">
+            <a:avLst/>
+          </a:prstGeom>
+          <a:solidFill>
+            <a:srgbClr val="4678B4"/>
+          </a:solidFill>
+          <a:ln>
+            <a:noFill/>
+          </a:ln>
+        </p:spPr>
+        <p:style>
+          <a:lnRef idx="1">
+            <a:schemeClr val="accent1"/>
+          </a:lnRef>
+          <a:fillRef idx="3">
+            <a:schemeClr val="accent1"/>
+          </a:fillRef>
+          <a:effectRef idx="2">
+            <a:schemeClr val="accent1"/>
+          </a:effectRef>
+          <a:fontRef idx="minor">
+            <a:schemeClr val="lt1"/>
+          </a:fontRef>
+        </p:style>
+        <p:txBody>
+          <a:bodyPr rtlCol="0" anchor="ctr"/>
+          <a:lstStyle/>
+          <a:p>
+            <a:pPr algn="ctr"/>
+          </a:p>
+        </p:txBody>
+      </p:sp>
+      <p:sp>
+        <p:nvSpPr>
+          <p:cNvPr id="18" name="TextBox 17"/>
+          <p:cNvSpPr txBox="1"/>
+          <p:nvPr/>
+        </p:nvSpPr>
+        <p:spPr>
+          <a:xfrm>
+            <a:off x="2255824" y="2980944"/>
+            <a:ext cx="384048" cy="365760"/>
+          </a:xfrm>
+          <a:prstGeom prst="rect">
+            <a:avLst/>
+          </a:prstGeom>
+          <a:noFill/>
+        </p:spPr>
+        <p:txBody>
+          <a:bodyPr wrap="none">
+            <a:spAutoFit/>
+          </a:bodyPr>
+          <a:lstStyle/>
+          <a:p>
+            <a:pPr algn="ctr">
+              <a:spcAft>
+                <a:spcPts val="1000"/>
+              </a:spcAft>
+            </a:pPr>
+            <a:r>
+              <a:rPr sz="1600" b="1">
+                <a:solidFill>
+                  <a:srgbClr val="FFFFFF"/>
+                </a:solidFill>
+                <a:latin typeface="Microsoft YaHei"/>
+              </a:rPr>
+              <a:t>3</a:t>
+            </a:r>
+          </a:p>
+        </p:txBody>
+      </p:sp>
+      <p:sp>
+        <p:nvSpPr>
+          <p:cNvPr id="19" name="TextBox 18"/>
+          <p:cNvSpPr txBox="1"/>
+          <p:nvPr/>
+        </p:nvSpPr>
+        <p:spPr>
+          <a:xfrm>
+            <a:off x="2758744" y="2944368"/>
+            <a:ext cx="7772400" cy="502920"/>
+          </a:xfrm>
+          <a:prstGeom prst="rect">
+            <a:avLst/>
+          </a:prstGeom>
+          <a:noFill/>
+        </p:spPr>
+        <p:txBody>
+          <a:bodyPr wrap="none">
+            <a:spAutoFit/>
+          </a:bodyPr>
+          <a:lstStyle/>
+          <a:p>
+            <a:pPr algn="l">
+              <a:spcAft>
+                <a:spcPts val="1000"/>
+              </a:spcAft>
+            </a:pPr>
+            <a:r>
+              <a:rPr sz="2400" b="0">
+                <a:solidFill>
+                  <a:srgbClr val="323C50"/>
+                </a:solidFill>
+                <a:latin typeface="Microsoft YaHei"/>
+              </a:rPr>
+              <a:t>快速阅读法：人物—事件—结果</a:t>
             </a:r>
           </a:p>
         </p:txBody>
@@ -5415,17 +8254,17 @@
         </p:nvSpPr>
         <p:spPr>
           <a:xfrm>
-            <a:off x="0" y="0"/>
-            <a:ext cx="12191695" cy="6858000"/>
-          </a:xfrm>
-          <a:prstGeom prst="rect">
-            <a:avLst/>
-          </a:prstGeom>
-          <a:solidFill>
-            <a:srgbClr val="FCFAF7"/>
-          </a:solidFill>
-          <a:ln>
-            <a:noFill/>
+            <a:off x="292608" y="274320"/>
+            <a:ext cx="11594592" cy="6300216"/>
+          </a:xfrm>
+          <a:prstGeom prst="rect">
+            <a:avLst/>
+          </a:prstGeom>
+          <a:noFill/>
+          <a:ln w="31750">
+            <a:solidFill>
+              <a:srgbClr val="6482AA"/>
+            </a:solidFill>
           </a:ln>
         </p:spPr>
         <p:style>
@@ -5450,22 +8289,70 @@
           </a:p>
         </p:txBody>
       </p:sp>
-      <p:sp>
-        <p:nvSpPr>
-          <p:cNvPr id="4" name="Rectangle 3"/>
+      <p:pic>
+        <p:nvPicPr>
+          <p:cNvPr id="4" name="Picture 3" descr="corner_unit_tl.png"/>
+          <p:cNvPicPr>
+            <a:picLocks noChangeAspect="1"/>
+          </p:cNvPicPr>
+          <p:nvPr/>
+        </p:nvPicPr>
+        <p:blipFill>
+          <a:blip r:embed="rId3"/>
+          <a:stretch>
+            <a:fillRect/>
+          </a:stretch>
+        </p:blipFill>
+        <p:spPr>
+          <a:xfrm>
+            <a:off x="-45720" y="-45720"/>
+            <a:ext cx="2011680" cy="2011680"/>
+          </a:xfrm>
+          <a:prstGeom prst="rect">
+            <a:avLst/>
+          </a:prstGeom>
+        </p:spPr>
+      </p:pic>
+      <p:pic>
+        <p:nvPicPr>
+          <p:cNvPr id="5" name="Picture 4" descr="corner_unit_tr.png"/>
+          <p:cNvPicPr>
+            <a:picLocks noChangeAspect="1"/>
+          </p:cNvPicPr>
+          <p:nvPr/>
+        </p:nvPicPr>
+        <p:blipFill>
+          <a:blip r:embed="rId4"/>
+          <a:stretch>
+            <a:fillRect/>
+          </a:stretch>
+        </p:blipFill>
+        <p:spPr>
+          <a:xfrm>
+            <a:off x="9875520" y="-45720"/>
+            <a:ext cx="2011680" cy="2011680"/>
+          </a:xfrm>
+          <a:prstGeom prst="rect">
+            <a:avLst/>
+          </a:prstGeom>
+        </p:spPr>
+      </p:pic>
+      <p:sp>
+        <p:nvSpPr>
+          <p:cNvPr id="6" name="Rounded Rectangle 5"/>
           <p:cNvSpPr/>
           <p:nvPr/>
         </p:nvSpPr>
         <p:spPr>
           <a:xfrm>
-            <a:off x="0" y="0"/>
-            <a:ext cx="12191695" cy="91440"/>
-          </a:xfrm>
-          <a:prstGeom prst="rect">
+            <a:off x="4953304" y="502920"/>
+            <a:ext cx="2286000" cy="411480"/>
+          </a:xfrm>
+          <a:prstGeom prst="roundRect">
             <a:avLst/>
           </a:prstGeom>
           <a:solidFill>
-            <a:srgbClr val="A4B4C4"/>
+            <a:srgbClr val="A0BEDC"/>
           </a:solidFill>
           <a:ln>
             <a:noFill/>
@@ -5495,14 +8382,14 @@
       </p:sp>
       <p:sp>
         <p:nvSpPr>
-          <p:cNvPr id="5" name="TextBox 4"/>
+          <p:cNvPr id="7" name="TextBox 6"/>
           <p:cNvSpPr txBox="1"/>
           <p:nvPr/>
         </p:nvSpPr>
         <p:spPr>
           <a:xfrm>
-            <a:off x="640080" y="228600"/>
-            <a:ext cx="2743200" cy="457200"/>
+            <a:off x="4953304" y="521208"/>
+            <a:ext cx="2286000" cy="384048"/>
           </a:xfrm>
           <a:prstGeom prst="rect">
             <a:avLst/>
@@ -5515,28 +8402,203 @@
           </a:bodyPr>
           <a:lstStyle/>
           <a:p>
-            <a:r>
-              <a:rPr sz="2000" b="1">
+            <a:pPr algn="ctr">
+              <a:spcAft>
+                <a:spcPts val="1000"/>
+              </a:spcAft>
+            </a:pPr>
+            <a:r>
+              <a:rPr sz="1800" b="1">
                 <a:solidFill>
-                  <a:srgbClr val="A4B4C4"/>
+                  <a:srgbClr val="323C50"/>
                 </a:solidFill>
                 <a:latin typeface="Microsoft YaHei"/>
               </a:rPr>
-              <a:t>回顾收获</a:t>
-            </a:r>
-          </a:p>
-        </p:txBody>
-      </p:sp>
-      <p:sp>
-        <p:nvSpPr>
-          <p:cNvPr id="6" name="TextBox 5"/>
+              <a:t>课后延伸</a:t>
+            </a:r>
+          </a:p>
+        </p:txBody>
+      </p:sp>
+      <p:sp>
+        <p:nvSpPr>
+          <p:cNvPr id="8" name="TextBox 7"/>
           <p:cNvSpPr txBox="1"/>
           <p:nvPr/>
         </p:nvSpPr>
         <p:spPr>
           <a:xfrm>
-            <a:off x="640080" y="685800"/>
-            <a:ext cx="10515600" cy="914400"/>
+            <a:off x="1371600" y="960120"/>
+            <a:ext cx="9418320" cy="822960"/>
+          </a:xfrm>
+          <a:prstGeom prst="rect">
+            <a:avLst/>
+          </a:prstGeom>
+          <a:noFill/>
+        </p:spPr>
+        <p:txBody>
+          <a:bodyPr wrap="square">
+            <a:spAutoFit/>
+          </a:bodyPr>
+          <a:lstStyle/>
+          <a:p>
+            <a:pPr algn="ctr">
+              <a:spcAft>
+                <a:spcPts val="1000"/>
+              </a:spcAft>
+            </a:pPr>
+            <a:r>
+              <a:rPr sz="3600" b="1">
+                <a:solidFill>
+                  <a:srgbClr val="4678B4"/>
+                </a:solidFill>
+                <a:latin typeface="Microsoft YaHei"/>
+              </a:rPr>
+              <a:t>课后作业</a:t>
+            </a:r>
+          </a:p>
+        </p:txBody>
+      </p:sp>
+      <p:sp>
+        <p:nvSpPr>
+          <p:cNvPr id="9" name="Rectangle 8"/>
+          <p:cNvSpPr/>
+          <p:nvPr/>
+        </p:nvSpPr>
+        <p:spPr>
+          <a:xfrm>
+            <a:off x="3200400" y="1600200"/>
+            <a:ext cx="5760720" cy="27432"/>
+          </a:xfrm>
+          <a:prstGeom prst="rect">
+            <a:avLst/>
+          </a:prstGeom>
+          <a:solidFill>
+            <a:srgbClr val="A0BEDC"/>
+          </a:solidFill>
+          <a:ln>
+            <a:noFill/>
+          </a:ln>
+        </p:spPr>
+        <p:style>
+          <a:lnRef idx="1">
+            <a:schemeClr val="accent1"/>
+          </a:lnRef>
+          <a:fillRef idx="3">
+            <a:schemeClr val="accent1"/>
+          </a:fillRef>
+          <a:effectRef idx="2">
+            <a:schemeClr val="accent1"/>
+          </a:effectRef>
+          <a:fontRef idx="minor">
+            <a:schemeClr val="lt1"/>
+          </a:fontRef>
+        </p:style>
+        <p:txBody>
+          <a:bodyPr rtlCol="0" anchor="ctr"/>
+          <a:lstStyle/>
+          <a:p>
+            <a:pPr algn="ctr"/>
+          </a:p>
+        </p:txBody>
+      </p:sp>
+      <p:sp>
+        <p:nvSpPr>
+          <p:cNvPr id="10" name="Rounded Rectangle 9"/>
+          <p:cNvSpPr/>
+          <p:nvPr/>
+        </p:nvSpPr>
+        <p:spPr>
+          <a:xfrm>
+            <a:off x="1295704" y="1645920"/>
+            <a:ext cx="9601200" cy="1645920"/>
+          </a:xfrm>
+          <a:prstGeom prst="roundRect">
+            <a:avLst/>
+          </a:prstGeom>
+          <a:solidFill>
+            <a:srgbClr val="F8FAFF"/>
+          </a:solidFill>
+          <a:ln w="19050">
+            <a:solidFill>
+              <a:srgbClr val="A0BEDC"/>
+            </a:solidFill>
+          </a:ln>
+        </p:spPr>
+        <p:style>
+          <a:lnRef idx="1">
+            <a:schemeClr val="accent1"/>
+          </a:lnRef>
+          <a:fillRef idx="3">
+            <a:schemeClr val="accent1"/>
+          </a:fillRef>
+          <a:effectRef idx="2">
+            <a:schemeClr val="accent1"/>
+          </a:effectRef>
+          <a:fontRef idx="minor">
+            <a:schemeClr val="lt1"/>
+          </a:fontRef>
+        </p:style>
+        <p:txBody>
+          <a:bodyPr rtlCol="0" anchor="ctr"/>
+          <a:lstStyle/>
+          <a:p>
+            <a:pPr algn="ctr"/>
+          </a:p>
+        </p:txBody>
+      </p:sp>
+      <p:sp>
+        <p:nvSpPr>
+          <p:cNvPr id="11" name="Oval 10"/>
+          <p:cNvSpPr/>
+          <p:nvPr/>
+        </p:nvSpPr>
+        <p:spPr>
+          <a:xfrm>
+            <a:off x="2255824" y="1828800"/>
+            <a:ext cx="384048" cy="384048"/>
+          </a:xfrm>
+          <a:prstGeom prst="ellipse">
+            <a:avLst/>
+          </a:prstGeom>
+          <a:solidFill>
+            <a:srgbClr val="4678B4"/>
+          </a:solidFill>
+          <a:ln>
+            <a:noFill/>
+          </a:ln>
+        </p:spPr>
+        <p:style>
+          <a:lnRef idx="1">
+            <a:schemeClr val="accent1"/>
+          </a:lnRef>
+          <a:fillRef idx="3">
+            <a:schemeClr val="accent1"/>
+          </a:fillRef>
+          <a:effectRef idx="2">
+            <a:schemeClr val="accent1"/>
+          </a:effectRef>
+          <a:fontRef idx="minor">
+            <a:schemeClr val="lt1"/>
+          </a:fontRef>
+        </p:style>
+        <p:txBody>
+          <a:bodyPr rtlCol="0" anchor="ctr"/>
+          <a:lstStyle/>
+          <a:p>
+            <a:pPr algn="ctr"/>
+          </a:p>
+        </p:txBody>
+      </p:sp>
+      <p:sp>
+        <p:nvSpPr>
+          <p:cNvPr id="12" name="TextBox 11"/>
+          <p:cNvSpPr txBox="1"/>
+          <p:nvPr/>
+        </p:nvSpPr>
+        <p:spPr>
+          <a:xfrm>
+            <a:off x="2255824" y="1847088"/>
+            <a:ext cx="384048" cy="365760"/>
           </a:xfrm>
           <a:prstGeom prst="rect">
             <a:avLst/>
@@ -5549,28 +8611,33 @@
           </a:bodyPr>
           <a:lstStyle/>
           <a:p>
-            <a:r>
-              <a:rPr sz="3600" b="1">
+            <a:pPr algn="ctr">
+              <a:spcAft>
+                <a:spcPts val="1000"/>
+              </a:spcAft>
+            </a:pPr>
+            <a:r>
+              <a:rPr sz="1600" b="1">
                 <a:solidFill>
-                  <a:srgbClr val="5A606E"/>
+                  <a:srgbClr val="FFFFFF"/>
                 </a:solidFill>
                 <a:latin typeface="Microsoft YaHei"/>
               </a:rPr>
-              <a:t>课堂小结</a:t>
-            </a:r>
-          </a:p>
-        </p:txBody>
-      </p:sp>
-      <p:sp>
-        <p:nvSpPr>
-          <p:cNvPr id="7" name="TextBox 6"/>
+              <a:t>1</a:t>
+            </a:r>
+          </a:p>
+        </p:txBody>
+      </p:sp>
+      <p:sp>
+        <p:nvSpPr>
+          <p:cNvPr id="13" name="TextBox 12"/>
           <p:cNvSpPr txBox="1"/>
           <p:nvPr/>
         </p:nvSpPr>
         <p:spPr>
           <a:xfrm>
-            <a:off x="822960" y="1691640"/>
-            <a:ext cx="10241280" cy="4389120"/>
+            <a:off x="2758744" y="1810512"/>
+            <a:ext cx="7772400" cy="502920"/>
           </a:xfrm>
           <a:prstGeom prst="rect">
             <a:avLst/>
@@ -5578,56 +8645,145 @@
           <a:noFill/>
         </p:spPr>
         <p:txBody>
-          <a:bodyPr wrap="square" anchor="t">
+          <a:bodyPr wrap="none">
             <a:spAutoFit/>
           </a:bodyPr>
           <a:lstStyle/>
           <a:p>
-            <a:pPr>
+            <a:pPr algn="l">
               <a:spcAft>
-                <a:spcPts val="1600"/>
+                <a:spcPts val="1000"/>
               </a:spcAft>
             </a:pPr>
             <a:r>
-              <a:rPr sz="2800" b="0">
+              <a:rPr sz="2400" b="0">
                 <a:solidFill>
-                  <a:srgbClr val="5A606E"/>
+                  <a:srgbClr val="323C50"/>
                 </a:solidFill>
                 <a:latin typeface="Microsoft YaHei"/>
               </a:rPr>
-              <a:t>本单元学习重点：想象与真实</a:t>
-            </a:r>
-          </a:p>
-          <a:p>
-            <a:pPr>
+              <a:t>必做：预习一篇课文，写100字以内故事梗概</a:t>
+            </a:r>
+          </a:p>
+        </p:txBody>
+      </p:sp>
+      <p:sp>
+        <p:nvSpPr>
+          <p:cNvPr id="14" name="Oval 13"/>
+          <p:cNvSpPr/>
+          <p:nvPr/>
+        </p:nvSpPr>
+        <p:spPr>
+          <a:xfrm>
+            <a:off x="2255824" y="2395728"/>
+            <a:ext cx="384048" cy="384048"/>
+          </a:xfrm>
+          <a:prstGeom prst="ellipse">
+            <a:avLst/>
+          </a:prstGeom>
+          <a:solidFill>
+            <a:srgbClr val="4678B4"/>
+          </a:solidFill>
+          <a:ln>
+            <a:noFill/>
+          </a:ln>
+        </p:spPr>
+        <p:style>
+          <a:lnRef idx="1">
+            <a:schemeClr val="accent1"/>
+          </a:lnRef>
+          <a:fillRef idx="3">
+            <a:schemeClr val="accent1"/>
+          </a:fillRef>
+          <a:effectRef idx="2">
+            <a:schemeClr val="accent1"/>
+          </a:effectRef>
+          <a:fontRef idx="minor">
+            <a:schemeClr val="lt1"/>
+          </a:fontRef>
+        </p:style>
+        <p:txBody>
+          <a:bodyPr rtlCol="0" anchor="ctr"/>
+          <a:lstStyle/>
+          <a:p>
+            <a:pPr algn="ctr"/>
+          </a:p>
+        </p:txBody>
+      </p:sp>
+      <p:sp>
+        <p:nvSpPr>
+          <p:cNvPr id="15" name="TextBox 14"/>
+          <p:cNvSpPr txBox="1"/>
+          <p:nvPr/>
+        </p:nvSpPr>
+        <p:spPr>
+          <a:xfrm>
+            <a:off x="2255824" y="2414016"/>
+            <a:ext cx="384048" cy="365760"/>
+          </a:xfrm>
+          <a:prstGeom prst="rect">
+            <a:avLst/>
+          </a:prstGeom>
+          <a:noFill/>
+        </p:spPr>
+        <p:txBody>
+          <a:bodyPr wrap="none">
+            <a:spAutoFit/>
+          </a:bodyPr>
+          <a:lstStyle/>
+          <a:p>
+            <a:pPr algn="ctr">
               <a:spcAft>
-                <a:spcPts val="1600"/>
+                <a:spcPts val="1000"/>
               </a:spcAft>
             </a:pPr>
             <a:r>
-              <a:rPr sz="2800" b="0">
+              <a:rPr sz="1600" b="1">
                 <a:solidFill>
-                  <a:srgbClr val="5A606E"/>
+                  <a:srgbClr val="FFFFFF"/>
                 </a:solidFill>
                 <a:latin typeface="Microsoft YaHei"/>
               </a:rPr>
-              <a:t>四条策展主题：自由→真实→创造→智慧</a:t>
-            </a:r>
-          </a:p>
-          <a:p>
-            <a:pPr>
+              <a:t>2</a:t>
+            </a:r>
+          </a:p>
+        </p:txBody>
+      </p:sp>
+      <p:sp>
+        <p:nvSpPr>
+          <p:cNvPr id="16" name="TextBox 15"/>
+          <p:cNvSpPr txBox="1"/>
+          <p:nvPr/>
+        </p:nvSpPr>
+        <p:spPr>
+          <a:xfrm>
+            <a:off x="2758744" y="2377440"/>
+            <a:ext cx="7772400" cy="502920"/>
+          </a:xfrm>
+          <a:prstGeom prst="rect">
+            <a:avLst/>
+          </a:prstGeom>
+          <a:noFill/>
+        </p:spPr>
+        <p:txBody>
+          <a:bodyPr wrap="none">
+            <a:spAutoFit/>
+          </a:bodyPr>
+          <a:lstStyle/>
+          <a:p>
+            <a:pPr algn="l">
               <a:spcAft>
-                <a:spcPts val="1600"/>
+                <a:spcPts val="1000"/>
               </a:spcAft>
             </a:pPr>
             <a:r>
-              <a:rPr sz="2800" b="0">
+              <a:rPr sz="2400" b="0">
                 <a:solidFill>
-                  <a:srgbClr val="5A606E"/>
+                  <a:srgbClr val="323C50"/>
                 </a:solidFill>
                 <a:latin typeface="Microsoft YaHei"/>
               </a:rPr>
-              <a:t>快速阅读：人物—事件—结果</a:t>
+              <a:t>选做：记录生活中一个「如果……会怎样」的想象问题</a:t>
             </a:r>
           </a:p>
         </p:txBody>

--- a/第六单元PPT/第1课时 单元导学.pptx
+++ b/第六单元PPT/第1课时 单元导学.pptx
@@ -3605,7 +3605,7 @@
                 </a:solidFill>
                 <a:latin typeface="Microsoft YaHei"/>
               </a:rPr>
-              <a:t>课时目标</a:t>
+              <a:t>记笔记</a:t>
             </a:r>
           </a:p>
         </p:txBody>
@@ -3638,13 +3638,13 @@
               </a:spcAft>
             </a:pPr>
             <a:r>
-              <a:rPr sz="3600" b="1">
+              <a:rPr sz="3400" b="1">
                 <a:solidFill>
                   <a:srgbClr val="4678B4"/>
                 </a:solidFill>
                 <a:latin typeface="Microsoft YaHei"/>
               </a:rPr>
-              <a:t>本课目标</a:t>
+              <a:t>单元知识框架</a:t>
             </a:r>
           </a:p>
         </p:txBody>
@@ -3700,8 +3700,8 @@
         </p:nvSpPr>
         <p:spPr>
           <a:xfrm>
-            <a:off x="1295704" y="1645920"/>
-            <a:ext cx="9601200" cy="2240280"/>
+            <a:off x="1158544" y="1645920"/>
+            <a:ext cx="9875520" cy="2953512"/>
           </a:xfrm>
           <a:prstGeom prst="roundRect">
             <a:avLst/>
@@ -3739,57 +3739,14 @@
       </p:sp>
       <p:sp>
         <p:nvSpPr>
-          <p:cNvPr id="11" name="Oval 10"/>
-          <p:cNvSpPr/>
-          <p:nvPr/>
-        </p:nvSpPr>
-        <p:spPr>
-          <a:xfrm>
-            <a:off x="2255824" y="1828800"/>
-            <a:ext cx="384048" cy="384048"/>
-          </a:xfrm>
-          <a:prstGeom prst="ellipse">
-            <a:avLst/>
-          </a:prstGeom>
-          <a:solidFill>
-            <a:srgbClr val="4678B4"/>
-          </a:solidFill>
-          <a:ln>
-            <a:noFill/>
-          </a:ln>
-        </p:spPr>
-        <p:style>
-          <a:lnRef idx="1">
-            <a:schemeClr val="accent1"/>
-          </a:lnRef>
-          <a:fillRef idx="3">
-            <a:schemeClr val="accent1"/>
-          </a:fillRef>
-          <a:effectRef idx="2">
-            <a:schemeClr val="accent1"/>
-          </a:effectRef>
-          <a:fontRef idx="minor">
-            <a:schemeClr val="lt1"/>
-          </a:fontRef>
-        </p:style>
-        <p:txBody>
-          <a:bodyPr rtlCol="0" anchor="ctr"/>
-          <a:lstStyle/>
-          <a:p>
-            <a:pPr algn="ctr"/>
-          </a:p>
-        </p:txBody>
-      </p:sp>
-      <p:sp>
-        <p:nvSpPr>
-          <p:cNvPr id="12" name="TextBox 11"/>
+          <p:cNvPr id="11" name="TextBox 10"/>
           <p:cNvSpPr txBox="1"/>
           <p:nvPr/>
         </p:nvSpPr>
         <p:spPr>
           <a:xfrm>
-            <a:off x="2255824" y="1847088"/>
-            <a:ext cx="384048" cy="365760"/>
+            <a:off x="1234440" y="1783080"/>
+            <a:ext cx="2377440" cy="502920"/>
           </a:xfrm>
           <a:prstGeom prst="rect">
             <a:avLst/>
@@ -3802,33 +3759,33 @@
           </a:bodyPr>
           <a:lstStyle/>
           <a:p>
-            <a:pPr algn="ctr">
+            <a:pPr algn="r">
               <a:spcAft>
                 <a:spcPts val="1000"/>
               </a:spcAft>
             </a:pPr>
             <a:r>
-              <a:rPr sz="1600" b="1">
+              <a:rPr sz="2200" b="1">
                 <a:solidFill>
-                  <a:srgbClr val="FFFFFF"/>
+                  <a:srgbClr val="4678B4"/>
                 </a:solidFill>
                 <a:latin typeface="Microsoft YaHei"/>
               </a:rPr>
-              <a:t>1</a:t>
-            </a:r>
-          </a:p>
-        </p:txBody>
-      </p:sp>
-      <p:sp>
-        <p:nvSpPr>
-          <p:cNvPr id="13" name="TextBox 12"/>
+              <a:t>单元母题</a:t>
+            </a:r>
+          </a:p>
+        </p:txBody>
+      </p:sp>
+      <p:sp>
+        <p:nvSpPr>
+          <p:cNvPr id="12" name="TextBox 11"/>
           <p:cNvSpPr txBox="1"/>
           <p:nvPr/>
         </p:nvSpPr>
         <p:spPr>
           <a:xfrm>
-            <a:off x="2758744" y="1810512"/>
-            <a:ext cx="7772400" cy="502920"/>
+            <a:off x="3749039" y="1783080"/>
+            <a:ext cx="7589520" cy="594360"/>
           </a:xfrm>
           <a:prstGeom prst="rect">
             <a:avLst/>
@@ -3847,70 +3804,27 @@
               </a:spcAft>
             </a:pPr>
             <a:r>
-              <a:rPr sz="2400" b="0">
+              <a:rPr sz="2200" b="0">
                 <a:solidFill>
                   <a:srgbClr val="323C50"/>
                 </a:solidFill>
                 <a:latin typeface="Microsoft YaHei"/>
               </a:rPr>
-              <a:t>感知单元学习目标、文体类型与挑战任务</a:t>
-            </a:r>
-          </a:p>
-        </p:txBody>
-      </p:sp>
-      <p:sp>
-        <p:nvSpPr>
-          <p:cNvPr id="14" name="Oval 13"/>
-          <p:cNvSpPr/>
-          <p:nvPr/>
-        </p:nvSpPr>
-        <p:spPr>
-          <a:xfrm>
-            <a:off x="2255824" y="2395728"/>
-            <a:ext cx="384048" cy="384048"/>
-          </a:xfrm>
-          <a:prstGeom prst="ellipse">
-            <a:avLst/>
-          </a:prstGeom>
-          <a:solidFill>
-            <a:srgbClr val="4678B4"/>
-          </a:solidFill>
-          <a:ln>
-            <a:noFill/>
-          </a:ln>
-        </p:spPr>
-        <p:style>
-          <a:lnRef idx="1">
-            <a:schemeClr val="accent1"/>
-          </a:lnRef>
-          <a:fillRef idx="3">
-            <a:schemeClr val="accent1"/>
-          </a:fillRef>
-          <a:effectRef idx="2">
-            <a:schemeClr val="accent1"/>
-          </a:effectRef>
-          <a:fontRef idx="minor">
-            <a:schemeClr val="lt1"/>
-          </a:fontRef>
-        </p:style>
-        <p:txBody>
-          <a:bodyPr rtlCol="0" anchor="ctr"/>
-          <a:lstStyle/>
-          <a:p>
-            <a:pPr algn="ctr"/>
-          </a:p>
-        </p:txBody>
-      </p:sp>
-      <p:sp>
-        <p:nvSpPr>
-          <p:cNvPr id="15" name="TextBox 14"/>
+              <a:t>想象与真实——想象源于生活经验，又超越现实</a:t>
+            </a:r>
+          </a:p>
+        </p:txBody>
+      </p:sp>
+      <p:sp>
+        <p:nvSpPr>
+          <p:cNvPr id="13" name="TextBox 12"/>
           <p:cNvSpPr txBox="1"/>
           <p:nvPr/>
         </p:nvSpPr>
         <p:spPr>
           <a:xfrm>
-            <a:off x="2255824" y="2414016"/>
-            <a:ext cx="384048" cy="365760"/>
+            <a:off x="1234440" y="2441448"/>
+            <a:ext cx="2377440" cy="502920"/>
           </a:xfrm>
           <a:prstGeom prst="rect">
             <a:avLst/>
@@ -3923,33 +3837,33 @@
           </a:bodyPr>
           <a:lstStyle/>
           <a:p>
-            <a:pPr algn="ctr">
+            <a:pPr algn="r">
               <a:spcAft>
                 <a:spcPts val="1000"/>
               </a:spcAft>
             </a:pPr>
             <a:r>
-              <a:rPr sz="1600" b="1">
+              <a:rPr sz="2200" b="1">
                 <a:solidFill>
-                  <a:srgbClr val="FFFFFF"/>
+                  <a:srgbClr val="4678B4"/>
                 </a:solidFill>
                 <a:latin typeface="Microsoft YaHei"/>
               </a:rPr>
-              <a:t>2</a:t>
-            </a:r>
-          </a:p>
-        </p:txBody>
-      </p:sp>
-      <p:sp>
-        <p:nvSpPr>
-          <p:cNvPr id="16" name="TextBox 15"/>
+              <a:t>文体类型</a:t>
+            </a:r>
+          </a:p>
+        </p:txBody>
+      </p:sp>
+      <p:sp>
+        <p:nvSpPr>
+          <p:cNvPr id="14" name="TextBox 13"/>
           <p:cNvSpPr txBox="1"/>
           <p:nvPr/>
         </p:nvSpPr>
         <p:spPr>
           <a:xfrm>
-            <a:off x="2758744" y="2377440"/>
-            <a:ext cx="7772400" cy="502920"/>
+            <a:off x="3749039" y="2441448"/>
+            <a:ext cx="7589520" cy="594360"/>
           </a:xfrm>
           <a:prstGeom prst="rect">
             <a:avLst/>
@@ -3968,70 +3882,27 @@
               </a:spcAft>
             </a:pPr>
             <a:r>
-              <a:rPr sz="2400" b="0">
+              <a:rPr sz="2200" b="0">
                 <a:solidFill>
                   <a:srgbClr val="323C50"/>
                 </a:solidFill>
                 <a:latin typeface="Microsoft YaHei"/>
               </a:rPr>
-              <a:t>快速默读，用关键词和情节节点概括故事</a:t>
-            </a:r>
-          </a:p>
-        </p:txBody>
-      </p:sp>
-      <p:sp>
-        <p:nvSpPr>
-          <p:cNvPr id="17" name="Oval 16"/>
-          <p:cNvSpPr/>
-          <p:nvPr/>
-        </p:nvSpPr>
-        <p:spPr>
-          <a:xfrm>
-            <a:off x="2255824" y="2962656"/>
-            <a:ext cx="384048" cy="384048"/>
-          </a:xfrm>
-          <a:prstGeom prst="ellipse">
-            <a:avLst/>
-          </a:prstGeom>
-          <a:solidFill>
-            <a:srgbClr val="4678B4"/>
-          </a:solidFill>
-          <a:ln>
-            <a:noFill/>
-          </a:ln>
-        </p:spPr>
-        <p:style>
-          <a:lnRef idx="1">
-            <a:schemeClr val="accent1"/>
-          </a:lnRef>
-          <a:fillRef idx="3">
-            <a:schemeClr val="accent1"/>
-          </a:fillRef>
-          <a:effectRef idx="2">
-            <a:schemeClr val="accent1"/>
-          </a:effectRef>
-          <a:fontRef idx="minor">
-            <a:schemeClr val="lt1"/>
-          </a:fontRef>
-        </p:style>
-        <p:txBody>
-          <a:bodyPr rtlCol="0" anchor="ctr"/>
-          <a:lstStyle/>
-          <a:p>
-            <a:pPr algn="ctr"/>
-          </a:p>
-        </p:txBody>
-      </p:sp>
-      <p:sp>
-        <p:nvSpPr>
-          <p:cNvPr id="18" name="TextBox 17"/>
+              <a:t>神魔小说、童话、神话、寓言（四种富于想象力的文体）</a:t>
+            </a:r>
+          </a:p>
+        </p:txBody>
+      </p:sp>
+      <p:sp>
+        <p:nvSpPr>
+          <p:cNvPr id="15" name="TextBox 14"/>
           <p:cNvSpPr txBox="1"/>
           <p:nvPr/>
         </p:nvSpPr>
         <p:spPr>
           <a:xfrm>
-            <a:off x="2255824" y="2980944"/>
-            <a:ext cx="384048" cy="365760"/>
+            <a:off x="1234440" y="3099815"/>
+            <a:ext cx="2377440" cy="502920"/>
           </a:xfrm>
           <a:prstGeom prst="rect">
             <a:avLst/>
@@ -4044,33 +3915,33 @@
           </a:bodyPr>
           <a:lstStyle/>
           <a:p>
-            <a:pPr algn="ctr">
+            <a:pPr algn="r">
               <a:spcAft>
                 <a:spcPts val="1000"/>
               </a:spcAft>
             </a:pPr>
             <a:r>
-              <a:rPr sz="1600" b="1">
+              <a:rPr sz="2200" b="1">
                 <a:solidFill>
-                  <a:srgbClr val="FFFFFF"/>
+                  <a:srgbClr val="4678B4"/>
                 </a:solidFill>
                 <a:latin typeface="Microsoft YaHei"/>
               </a:rPr>
-              <a:t>3</a:t>
-            </a:r>
-          </a:p>
-        </p:txBody>
-      </p:sp>
-      <p:sp>
-        <p:nvSpPr>
-          <p:cNvPr id="19" name="TextBox 18"/>
+              <a:t>阅读方法</a:t>
+            </a:r>
+          </a:p>
+        </p:txBody>
+      </p:sp>
+      <p:sp>
+        <p:nvSpPr>
+          <p:cNvPr id="16" name="TextBox 15"/>
           <p:cNvSpPr txBox="1"/>
           <p:nvPr/>
         </p:nvSpPr>
         <p:spPr>
           <a:xfrm>
-            <a:off x="2758744" y="2944368"/>
-            <a:ext cx="7772400" cy="502920"/>
+            <a:off x="3749039" y="3099815"/>
+            <a:ext cx="7589520" cy="594360"/>
           </a:xfrm>
           <a:prstGeom prst="rect">
             <a:avLst/>
@@ -4089,13 +3960,91 @@
               </a:spcAft>
             </a:pPr>
             <a:r>
-              <a:rPr sz="2400" b="0">
+              <a:rPr sz="2200" b="0">
                 <a:solidFill>
                   <a:srgbClr val="323C50"/>
                 </a:solidFill>
                 <a:latin typeface="Microsoft YaHei"/>
               </a:rPr>
-              <a:t>每分钟阅读不少于400字</a:t>
+              <a:t>快速默读：把握思路，发挥联想和想象</a:t>
+            </a:r>
+          </a:p>
+        </p:txBody>
+      </p:sp>
+      <p:sp>
+        <p:nvSpPr>
+          <p:cNvPr id="17" name="TextBox 16"/>
+          <p:cNvSpPr txBox="1"/>
+          <p:nvPr/>
+        </p:nvSpPr>
+        <p:spPr>
+          <a:xfrm>
+            <a:off x="1234440" y="3758184"/>
+            <a:ext cx="2377440" cy="502920"/>
+          </a:xfrm>
+          <a:prstGeom prst="rect">
+            <a:avLst/>
+          </a:prstGeom>
+          <a:noFill/>
+        </p:spPr>
+        <p:txBody>
+          <a:bodyPr wrap="none">
+            <a:spAutoFit/>
+          </a:bodyPr>
+          <a:lstStyle/>
+          <a:p>
+            <a:pPr algn="r">
+              <a:spcAft>
+                <a:spcPts val="1000"/>
+              </a:spcAft>
+            </a:pPr>
+            <a:r>
+              <a:rPr sz="2200" b="1">
+                <a:solidFill>
+                  <a:srgbClr val="4678B4"/>
+                </a:solidFill>
+                <a:latin typeface="Microsoft YaHei"/>
+              </a:rPr>
+              <a:t>阅读速度</a:t>
+            </a:r>
+          </a:p>
+        </p:txBody>
+      </p:sp>
+      <p:sp>
+        <p:nvSpPr>
+          <p:cNvPr id="18" name="TextBox 17"/>
+          <p:cNvSpPr txBox="1"/>
+          <p:nvPr/>
+        </p:nvSpPr>
+        <p:spPr>
+          <a:xfrm>
+            <a:off x="3749039" y="3758184"/>
+            <a:ext cx="7589520" cy="594360"/>
+          </a:xfrm>
+          <a:prstGeom prst="rect">
+            <a:avLst/>
+          </a:prstGeom>
+          <a:noFill/>
+        </p:spPr>
+        <p:txBody>
+          <a:bodyPr wrap="none">
+            <a:spAutoFit/>
+          </a:bodyPr>
+          <a:lstStyle/>
+          <a:p>
+            <a:pPr algn="l">
+              <a:spcAft>
+                <a:spcPts val="1000"/>
+              </a:spcAft>
+            </a:pPr>
+            <a:r>
+              <a:rPr sz="2200" b="0">
+                <a:solidFill>
+                  <a:srgbClr val="323C50"/>
+                </a:solidFill>
+                <a:latin typeface="Microsoft YaHei"/>
+              </a:rPr>
+              <a:t>每分钟不少于400字，先抓「谁—做什么—结果」</a:t>
             </a:r>
           </a:p>
         </p:txBody>
@@ -4310,7 +4259,7 @@
                 </a:solidFill>
                 <a:latin typeface="Microsoft YaHei"/>
               </a:rPr>
-              <a:t>单元挑战</a:t>
+              <a:t>核心知识</a:t>
             </a:r>
           </a:p>
         </p:txBody>
@@ -4343,13 +4292,13 @@
               </a:spcAft>
             </a:pPr>
             <a:r>
-              <a:rPr sz="3600" b="1">
+              <a:rPr sz="3400" b="1">
                 <a:solidFill>
                   <a:srgbClr val="4678B4"/>
                 </a:solidFill>
                 <a:latin typeface="Microsoft YaHei"/>
               </a:rPr>
-              <a:t>大任务</a:t>
+              <a:t>母题递进链</a:t>
             </a:r>
           </a:p>
         </p:txBody>
@@ -4405,8 +4354,8 @@
         </p:nvSpPr>
         <p:spPr>
           <a:xfrm>
-            <a:off x="1295704" y="1645920"/>
-            <a:ext cx="9601200" cy="2240280"/>
+            <a:off x="1158544" y="1645920"/>
+            <a:ext cx="9875520" cy="2953512"/>
           </a:xfrm>
           <a:prstGeom prst="roundRect">
             <a:avLst/>
@@ -4444,57 +4393,14 @@
       </p:sp>
       <p:sp>
         <p:nvSpPr>
-          <p:cNvPr id="11" name="Oval 10"/>
-          <p:cNvSpPr/>
-          <p:nvPr/>
-        </p:nvSpPr>
-        <p:spPr>
-          <a:xfrm>
-            <a:off x="2255824" y="1828800"/>
-            <a:ext cx="384048" cy="384048"/>
-          </a:xfrm>
-          <a:prstGeom prst="ellipse">
-            <a:avLst/>
-          </a:prstGeom>
-          <a:solidFill>
-            <a:srgbClr val="4678B4"/>
-          </a:solidFill>
-          <a:ln>
-            <a:noFill/>
-          </a:ln>
-        </p:spPr>
-        <p:style>
-          <a:lnRef idx="1">
-            <a:schemeClr val="accent1"/>
-          </a:lnRef>
-          <a:fillRef idx="3">
-            <a:schemeClr val="accent1"/>
-          </a:fillRef>
-          <a:effectRef idx="2">
-            <a:schemeClr val="accent1"/>
-          </a:effectRef>
-          <a:fontRef idx="minor">
-            <a:schemeClr val="lt1"/>
-          </a:fontRef>
-        </p:style>
-        <p:txBody>
-          <a:bodyPr rtlCol="0" anchor="ctr"/>
-          <a:lstStyle/>
-          <a:p>
-            <a:pPr algn="ctr"/>
-          </a:p>
-        </p:txBody>
-      </p:sp>
-      <p:sp>
-        <p:nvSpPr>
-          <p:cNvPr id="12" name="TextBox 11"/>
+          <p:cNvPr id="11" name="TextBox 10"/>
           <p:cNvSpPr txBox="1"/>
           <p:nvPr/>
         </p:nvSpPr>
         <p:spPr>
           <a:xfrm>
-            <a:off x="2255824" y="1847088"/>
-            <a:ext cx="384048" cy="365760"/>
+            <a:off x="1234440" y="1783080"/>
+            <a:ext cx="2377440" cy="502920"/>
           </a:xfrm>
           <a:prstGeom prst="rect">
             <a:avLst/>
@@ -4507,33 +4413,33 @@
           </a:bodyPr>
           <a:lstStyle/>
           <a:p>
-            <a:pPr algn="ctr">
+            <a:pPr algn="r">
               <a:spcAft>
                 <a:spcPts val="1000"/>
               </a:spcAft>
             </a:pPr>
             <a:r>
-              <a:rPr sz="1600" b="1">
+              <a:rPr sz="2200" b="1">
                 <a:solidFill>
-                  <a:srgbClr val="FFFFFF"/>
+                  <a:srgbClr val="4678B4"/>
                 </a:solidFill>
                 <a:latin typeface="Microsoft YaHei"/>
               </a:rPr>
-              <a:t>1</a:t>
-            </a:r>
-          </a:p>
-        </p:txBody>
-      </p:sp>
-      <p:sp>
-        <p:nvSpPr>
-          <p:cNvPr id="13" name="TextBox 12"/>
+              <a:t>自由与规则</a:t>
+            </a:r>
+          </a:p>
+        </p:txBody>
+      </p:sp>
+      <p:sp>
+        <p:nvSpPr>
+          <p:cNvPr id="12" name="TextBox 11"/>
           <p:cNvSpPr txBox="1"/>
           <p:nvPr/>
         </p:nvSpPr>
         <p:spPr>
           <a:xfrm>
-            <a:off x="2758744" y="1810512"/>
-            <a:ext cx="7772400" cy="502920"/>
+            <a:off x="3749039" y="1783080"/>
+            <a:ext cx="7589520" cy="594360"/>
           </a:xfrm>
           <a:prstGeom prst="rect">
             <a:avLst/>
@@ -4552,70 +4458,27 @@
               </a:spcAft>
             </a:pPr>
             <a:r>
-              <a:rPr sz="2400" b="0">
+              <a:rPr sz="2200" b="0">
                 <a:solidFill>
                   <a:srgbClr val="323C50"/>
                 </a:solidFill>
                 <a:latin typeface="Microsoft YaHei"/>
               </a:rPr>
-              <a:t>校园文学社举办「想象力博物馆」微展览</a:t>
-            </a:r>
-          </a:p>
-        </p:txBody>
-      </p:sp>
-      <p:sp>
-        <p:nvSpPr>
-          <p:cNvPr id="14" name="Oval 13"/>
-          <p:cNvSpPr/>
-          <p:nvPr/>
-        </p:nvSpPr>
-        <p:spPr>
-          <a:xfrm>
-            <a:off x="2255824" y="2395728"/>
-            <a:ext cx="384048" cy="384048"/>
-          </a:xfrm>
-          <a:prstGeom prst="ellipse">
-            <a:avLst/>
-          </a:prstGeom>
-          <a:solidFill>
-            <a:srgbClr val="4678B4"/>
-          </a:solidFill>
-          <a:ln>
-            <a:noFill/>
-          </a:ln>
-        </p:spPr>
-        <p:style>
-          <a:lnRef idx="1">
-            <a:schemeClr val="accent1"/>
-          </a:lnRef>
-          <a:fillRef idx="3">
-            <a:schemeClr val="accent1"/>
-          </a:fillRef>
-          <a:effectRef idx="2">
-            <a:schemeClr val="accent1"/>
-          </a:effectRef>
-          <a:fontRef idx="minor">
-            <a:schemeClr val="lt1"/>
-          </a:fontRef>
-        </p:style>
-        <p:txBody>
-          <a:bodyPr rtlCol="0" anchor="ctr"/>
-          <a:lstStyle/>
-          <a:p>
-            <a:pPr algn="ctr"/>
-          </a:p>
-        </p:txBody>
-      </p:sp>
-      <p:sp>
-        <p:nvSpPr>
-          <p:cNvPr id="15" name="TextBox 14"/>
+              <a:t>《小圣施威降大圣》——神魔斗法中见人情</a:t>
+            </a:r>
+          </a:p>
+        </p:txBody>
+      </p:sp>
+      <p:sp>
+        <p:nvSpPr>
+          <p:cNvPr id="13" name="TextBox 12"/>
           <p:cNvSpPr txBox="1"/>
           <p:nvPr/>
         </p:nvSpPr>
         <p:spPr>
           <a:xfrm>
-            <a:off x="2255824" y="2414016"/>
-            <a:ext cx="384048" cy="365760"/>
+            <a:off x="1234440" y="2441448"/>
+            <a:ext cx="2377440" cy="502920"/>
           </a:xfrm>
           <a:prstGeom prst="rect">
             <a:avLst/>
@@ -4628,33 +4491,33 @@
           </a:bodyPr>
           <a:lstStyle/>
           <a:p>
-            <a:pPr algn="ctr">
+            <a:pPr algn="r">
               <a:spcAft>
                 <a:spcPts val="1000"/>
               </a:spcAft>
             </a:pPr>
             <a:r>
-              <a:rPr sz="1600" b="1">
+              <a:rPr sz="2200" b="1">
                 <a:solidFill>
-                  <a:srgbClr val="FFFFFF"/>
+                  <a:srgbClr val="4678B4"/>
                 </a:solidFill>
                 <a:latin typeface="Microsoft YaHei"/>
               </a:rPr>
-              <a:t>2</a:t>
-            </a:r>
-          </a:p>
-        </p:txBody>
-      </p:sp>
-      <p:sp>
-        <p:nvSpPr>
-          <p:cNvPr id="16" name="TextBox 15"/>
+              <a:t>真实与虚假</a:t>
+            </a:r>
+          </a:p>
+        </p:txBody>
+      </p:sp>
+      <p:sp>
+        <p:nvSpPr>
+          <p:cNvPr id="14" name="TextBox 13"/>
           <p:cNvSpPr txBox="1"/>
           <p:nvPr/>
         </p:nvSpPr>
         <p:spPr>
           <a:xfrm>
-            <a:off x="2758744" y="2377440"/>
-            <a:ext cx="7772400" cy="502920"/>
+            <a:off x="3749039" y="2441448"/>
+            <a:ext cx="7589520" cy="594360"/>
           </a:xfrm>
           <a:prstGeom prst="rect">
             <a:avLst/>
@@ -4673,70 +4536,27 @@
               </a:spcAft>
             </a:pPr>
             <a:r>
-              <a:rPr sz="2400" b="0">
+              <a:rPr sz="2200" b="0">
                 <a:solidFill>
                   <a:srgbClr val="323C50"/>
                 </a:solidFill>
                 <a:latin typeface="Microsoft YaHei"/>
               </a:rPr>
-              <a:t>小组担任策展人，制作「想象说明卡」</a:t>
-            </a:r>
-          </a:p>
-        </p:txBody>
-      </p:sp>
-      <p:sp>
-        <p:nvSpPr>
-          <p:cNvPr id="17" name="Oval 16"/>
-          <p:cNvSpPr/>
-          <p:nvPr/>
-        </p:nvSpPr>
-        <p:spPr>
-          <a:xfrm>
-            <a:off x="2255824" y="2962656"/>
-            <a:ext cx="384048" cy="384048"/>
-          </a:xfrm>
-          <a:prstGeom prst="ellipse">
-            <a:avLst/>
-          </a:prstGeom>
-          <a:solidFill>
-            <a:srgbClr val="4678B4"/>
-          </a:solidFill>
-          <a:ln>
-            <a:noFill/>
-          </a:ln>
-        </p:spPr>
-        <p:style>
-          <a:lnRef idx="1">
-            <a:schemeClr val="accent1"/>
-          </a:lnRef>
-          <a:fillRef idx="3">
-            <a:schemeClr val="accent1"/>
-          </a:fillRef>
-          <a:effectRef idx="2">
-            <a:schemeClr val="accent1"/>
-          </a:effectRef>
-          <a:fontRef idx="minor">
-            <a:schemeClr val="lt1"/>
-          </a:fontRef>
-        </p:style>
-        <p:txBody>
-          <a:bodyPr rtlCol="0" anchor="ctr"/>
-          <a:lstStyle/>
-          <a:p>
-            <a:pPr algn="ctr"/>
-          </a:p>
-        </p:txBody>
-      </p:sp>
-      <p:sp>
-        <p:nvSpPr>
-          <p:cNvPr id="18" name="TextBox 17"/>
+              <a:t>《皇帝的新装》——荒诞童话照见人性</a:t>
+            </a:r>
+          </a:p>
+        </p:txBody>
+      </p:sp>
+      <p:sp>
+        <p:nvSpPr>
+          <p:cNvPr id="15" name="TextBox 14"/>
           <p:cNvSpPr txBox="1"/>
           <p:nvPr/>
         </p:nvSpPr>
         <p:spPr>
           <a:xfrm>
-            <a:off x="2255824" y="2980944"/>
-            <a:ext cx="384048" cy="365760"/>
+            <a:off x="1234440" y="3099815"/>
+            <a:ext cx="2377440" cy="502920"/>
           </a:xfrm>
           <a:prstGeom prst="rect">
             <a:avLst/>
@@ -4749,33 +4569,33 @@
           </a:bodyPr>
           <a:lstStyle/>
           <a:p>
-            <a:pPr algn="ctr">
+            <a:pPr algn="r">
               <a:spcAft>
                 <a:spcPts val="1000"/>
               </a:spcAft>
             </a:pPr>
             <a:r>
-              <a:rPr sz="1600" b="1">
+              <a:rPr sz="2200" b="1">
                 <a:solidFill>
-                  <a:srgbClr val="FFFFFF"/>
+                  <a:srgbClr val="4678B4"/>
                 </a:solidFill>
                 <a:latin typeface="Microsoft YaHei"/>
               </a:rPr>
-              <a:t>3</a:t>
-            </a:r>
-          </a:p>
-        </p:txBody>
-      </p:sp>
-      <p:sp>
-        <p:nvSpPr>
-          <p:cNvPr id="19" name="TextBox 18"/>
+              <a:t>创造与生命</a:t>
+            </a:r>
+          </a:p>
+        </p:txBody>
+      </p:sp>
+      <p:sp>
+        <p:nvSpPr>
+          <p:cNvPr id="16" name="TextBox 15"/>
           <p:cNvSpPr txBox="1"/>
           <p:nvPr/>
         </p:nvSpPr>
         <p:spPr>
           <a:xfrm>
-            <a:off x="2758744" y="2944368"/>
-            <a:ext cx="7772400" cy="502920"/>
+            <a:off x="3749039" y="3099815"/>
+            <a:ext cx="7589520" cy="594360"/>
           </a:xfrm>
           <a:prstGeom prst="rect">
             <a:avLst/>
@@ -4794,13 +4614,91 @@
               </a:spcAft>
             </a:pPr>
             <a:r>
-              <a:rPr sz="2400" b="0">
+              <a:rPr sz="2200" b="0">
                 <a:solidFill>
                   <a:srgbClr val="323C50"/>
                 </a:solidFill>
                 <a:latin typeface="Microsoft YaHei"/>
               </a:rPr>
-              <a:t>完成原创想象文字或一幕微型课本剧</a:t>
+              <a:t>《女娲造人》——创世神话礼赞生命</a:t>
+            </a:r>
+          </a:p>
+        </p:txBody>
+      </p:sp>
+      <p:sp>
+        <p:nvSpPr>
+          <p:cNvPr id="17" name="TextBox 16"/>
+          <p:cNvSpPr txBox="1"/>
+          <p:nvPr/>
+        </p:nvSpPr>
+        <p:spPr>
+          <a:xfrm>
+            <a:off x="1234440" y="3758184"/>
+            <a:ext cx="2377440" cy="502920"/>
+          </a:xfrm>
+          <a:prstGeom prst="rect">
+            <a:avLst/>
+          </a:prstGeom>
+          <a:noFill/>
+        </p:spPr>
+        <p:txBody>
+          <a:bodyPr wrap="none">
+            <a:spAutoFit/>
+          </a:bodyPr>
+          <a:lstStyle/>
+          <a:p>
+            <a:pPr algn="r">
+              <a:spcAft>
+                <a:spcPts val="1000"/>
+              </a:spcAft>
+            </a:pPr>
+            <a:r>
+              <a:rPr sz="2200" b="1">
+                <a:solidFill>
+                  <a:srgbClr val="4678B4"/>
+                </a:solidFill>
+                <a:latin typeface="Microsoft YaHei"/>
+              </a:rPr>
+              <a:t>智慧与局限</a:t>
+            </a:r>
+          </a:p>
+        </p:txBody>
+      </p:sp>
+      <p:sp>
+        <p:nvSpPr>
+          <p:cNvPr id="18" name="TextBox 17"/>
+          <p:cNvSpPr txBox="1"/>
+          <p:nvPr/>
+        </p:nvSpPr>
+        <p:spPr>
+          <a:xfrm>
+            <a:off x="3749039" y="3758184"/>
+            <a:ext cx="7589520" cy="594360"/>
+          </a:xfrm>
+          <a:prstGeom prst="rect">
+            <a:avLst/>
+          </a:prstGeom>
+          <a:noFill/>
+        </p:spPr>
+        <p:txBody>
+          <a:bodyPr wrap="none">
+            <a:spAutoFit/>
+          </a:bodyPr>
+          <a:lstStyle/>
+          <a:p>
+            <a:pPr algn="l">
+              <a:spcAft>
+                <a:spcPts val="1000"/>
+              </a:spcAft>
+            </a:pPr>
+            <a:r>
+              <a:rPr sz="2200" b="0">
+                <a:solidFill>
+                  <a:srgbClr val="323C50"/>
+                </a:solidFill>
+                <a:latin typeface="Microsoft YaHei"/>
+              </a:rPr>
+              <a:t>《寓言四则》——短小故事寄寓道理</a:t>
             </a:r>
           </a:p>
         </p:txBody>
@@ -5015,7 +4913,7 @@
                 </a:solidFill>
                 <a:latin typeface="Microsoft YaHei"/>
               </a:rPr>
-              <a:t>想象与真实</a:t>
+              <a:t>记笔记</a:t>
             </a:r>
           </a:p>
         </p:txBody>
@@ -5048,13 +4946,13 @@
               </a:spcAft>
             </a:pPr>
             <a:r>
-              <a:rPr sz="3600" b="1">
+              <a:rPr sz="3400" b="1">
                 <a:solidFill>
                   <a:srgbClr val="4678B4"/>
                 </a:solidFill>
                 <a:latin typeface="Microsoft YaHei"/>
               </a:rPr>
-              <a:t>母题递进链</a:t>
+              <a:t>阅读方法笔记</a:t>
             </a:r>
           </a:p>
         </p:txBody>
@@ -5110,8 +5008,8 @@
         </p:nvSpPr>
         <p:spPr>
           <a:xfrm>
-            <a:off x="1295704" y="1645920"/>
-            <a:ext cx="9601200" cy="2834640"/>
+            <a:off x="1158544" y="1645920"/>
+            <a:ext cx="9875520" cy="2953512"/>
           </a:xfrm>
           <a:prstGeom prst="roundRect">
             <a:avLst/>
@@ -5149,57 +5047,14 @@
       </p:sp>
       <p:sp>
         <p:nvSpPr>
-          <p:cNvPr id="11" name="Oval 10"/>
-          <p:cNvSpPr/>
-          <p:nvPr/>
-        </p:nvSpPr>
-        <p:spPr>
-          <a:xfrm>
-            <a:off x="2255824" y="1828800"/>
-            <a:ext cx="384048" cy="384048"/>
-          </a:xfrm>
-          <a:prstGeom prst="ellipse">
-            <a:avLst/>
-          </a:prstGeom>
-          <a:solidFill>
-            <a:srgbClr val="4678B4"/>
-          </a:solidFill>
-          <a:ln>
-            <a:noFill/>
-          </a:ln>
-        </p:spPr>
-        <p:style>
-          <a:lnRef idx="1">
-            <a:schemeClr val="accent1"/>
-          </a:lnRef>
-          <a:fillRef idx="3">
-            <a:schemeClr val="accent1"/>
-          </a:fillRef>
-          <a:effectRef idx="2">
-            <a:schemeClr val="accent1"/>
-          </a:effectRef>
-          <a:fontRef idx="minor">
-            <a:schemeClr val="lt1"/>
-          </a:fontRef>
-        </p:style>
-        <p:txBody>
-          <a:bodyPr rtlCol="0" anchor="ctr"/>
-          <a:lstStyle/>
-          <a:p>
-            <a:pPr algn="ctr"/>
-          </a:p>
-        </p:txBody>
-      </p:sp>
-      <p:sp>
-        <p:nvSpPr>
-          <p:cNvPr id="12" name="TextBox 11"/>
+          <p:cNvPr id="11" name="TextBox 10"/>
           <p:cNvSpPr txBox="1"/>
           <p:nvPr/>
         </p:nvSpPr>
         <p:spPr>
           <a:xfrm>
-            <a:off x="2255824" y="1847088"/>
-            <a:ext cx="384048" cy="365760"/>
+            <a:off x="1234440" y="1783080"/>
+            <a:ext cx="2377440" cy="502920"/>
           </a:xfrm>
           <a:prstGeom prst="rect">
             <a:avLst/>
@@ -5212,33 +5067,33 @@
           </a:bodyPr>
           <a:lstStyle/>
           <a:p>
-            <a:pPr algn="ctr">
+            <a:pPr algn="r">
               <a:spcAft>
                 <a:spcPts val="1000"/>
               </a:spcAft>
             </a:pPr>
             <a:r>
-              <a:rPr sz="1600" b="1">
+              <a:rPr sz="2200" b="1">
                 <a:solidFill>
-                  <a:srgbClr val="FFFFFF"/>
+                  <a:srgbClr val="4678B4"/>
                 </a:solidFill>
                 <a:latin typeface="Microsoft YaHei"/>
               </a:rPr>
-              <a:t>1</a:t>
-            </a:r>
-          </a:p>
-        </p:txBody>
-      </p:sp>
-      <p:sp>
-        <p:nvSpPr>
-          <p:cNvPr id="13" name="TextBox 12"/>
+              <a:t>情节概括</a:t>
+            </a:r>
+          </a:p>
+        </p:txBody>
+      </p:sp>
+      <p:sp>
+        <p:nvSpPr>
+          <p:cNvPr id="12" name="TextBox 11"/>
           <p:cNvSpPr txBox="1"/>
           <p:nvPr/>
         </p:nvSpPr>
         <p:spPr>
           <a:xfrm>
-            <a:off x="2758744" y="1810512"/>
-            <a:ext cx="7772400" cy="502920"/>
+            <a:off x="3749039" y="1783080"/>
+            <a:ext cx="7589520" cy="594360"/>
           </a:xfrm>
           <a:prstGeom prst="rect">
             <a:avLst/>
@@ -5257,70 +5112,27 @@
               </a:spcAft>
             </a:pPr>
             <a:r>
-              <a:rPr sz="2400" b="0">
+              <a:rPr sz="2200" b="0">
                 <a:solidFill>
                   <a:srgbClr val="323C50"/>
                 </a:solidFill>
                 <a:latin typeface="Microsoft YaHei"/>
               </a:rPr>
-              <a:t>自由与规则：《小圣施威降大圣》</a:t>
-            </a:r>
-          </a:p>
-        </p:txBody>
-      </p:sp>
-      <p:sp>
-        <p:nvSpPr>
-          <p:cNvPr id="14" name="Oval 13"/>
-          <p:cNvSpPr/>
-          <p:nvPr/>
-        </p:nvSpPr>
-        <p:spPr>
-          <a:xfrm>
-            <a:off x="2255824" y="2395728"/>
-            <a:ext cx="384048" cy="384048"/>
-          </a:xfrm>
-          <a:prstGeom prst="ellipse">
-            <a:avLst/>
-          </a:prstGeom>
-          <a:solidFill>
-            <a:srgbClr val="4678B4"/>
-          </a:solidFill>
-          <a:ln>
-            <a:noFill/>
-          </a:ln>
-        </p:spPr>
-        <p:style>
-          <a:lnRef idx="1">
-            <a:schemeClr val="accent1"/>
-          </a:lnRef>
-          <a:fillRef idx="3">
-            <a:schemeClr val="accent1"/>
-          </a:fillRef>
-          <a:effectRef idx="2">
-            <a:schemeClr val="accent1"/>
-          </a:effectRef>
-          <a:fontRef idx="minor">
-            <a:schemeClr val="lt1"/>
-          </a:fontRef>
-        </p:style>
-        <p:txBody>
-          <a:bodyPr rtlCol="0" anchor="ctr"/>
-          <a:lstStyle/>
-          <a:p>
-            <a:pPr algn="ctr"/>
-          </a:p>
-        </p:txBody>
-      </p:sp>
-      <p:sp>
-        <p:nvSpPr>
-          <p:cNvPr id="15" name="TextBox 14"/>
+              <a:t>用「节点词+简洁句」概括，避免逐字回读</a:t>
+            </a:r>
+          </a:p>
+        </p:txBody>
+      </p:sp>
+      <p:sp>
+        <p:nvSpPr>
+          <p:cNvPr id="13" name="TextBox 12"/>
           <p:cNvSpPr txBox="1"/>
           <p:nvPr/>
         </p:nvSpPr>
         <p:spPr>
           <a:xfrm>
-            <a:off x="2255824" y="2414016"/>
-            <a:ext cx="384048" cy="365760"/>
+            <a:off x="1234440" y="2441448"/>
+            <a:ext cx="2377440" cy="502920"/>
           </a:xfrm>
           <a:prstGeom prst="rect">
             <a:avLst/>
@@ -5333,33 +5145,33 @@
           </a:bodyPr>
           <a:lstStyle/>
           <a:p>
-            <a:pPr algn="ctr">
+            <a:pPr algn="r">
               <a:spcAft>
                 <a:spcPts val="1000"/>
               </a:spcAft>
             </a:pPr>
             <a:r>
-              <a:rPr sz="1600" b="1">
+              <a:rPr sz="2200" b="1">
                 <a:solidFill>
-                  <a:srgbClr val="FFFFFF"/>
+                  <a:srgbClr val="4678B4"/>
                 </a:solidFill>
                 <a:latin typeface="Microsoft YaHei"/>
               </a:rPr>
-              <a:t>2</a:t>
-            </a:r>
-          </a:p>
-        </p:txBody>
-      </p:sp>
-      <p:sp>
-        <p:nvSpPr>
-          <p:cNvPr id="16" name="TextBox 15"/>
+              <a:t>人物分析</a:t>
+            </a:r>
+          </a:p>
+        </p:txBody>
+      </p:sp>
+      <p:sp>
+        <p:nvSpPr>
+          <p:cNvPr id="14" name="TextBox 13"/>
           <p:cNvSpPr txBox="1"/>
           <p:nvPr/>
         </p:nvSpPr>
         <p:spPr>
           <a:xfrm>
-            <a:off x="2758744" y="2377440"/>
-            <a:ext cx="7772400" cy="502920"/>
+            <a:off x="3749039" y="2441448"/>
+            <a:ext cx="7589520" cy="594360"/>
           </a:xfrm>
           <a:prstGeom prst="rect">
             <a:avLst/>
@@ -5378,70 +5190,27 @@
               </a:spcAft>
             </a:pPr>
             <a:r>
-              <a:rPr sz="2400" b="0">
+              <a:rPr sz="2200" b="0">
                 <a:solidFill>
                   <a:srgbClr val="323C50"/>
                 </a:solidFill>
                 <a:latin typeface="Microsoft YaHei"/>
               </a:rPr>
-              <a:t>真实与虚假：《皇帝的新装》</a:t>
-            </a:r>
-          </a:p>
-        </p:txBody>
-      </p:sp>
-      <p:sp>
-        <p:nvSpPr>
-          <p:cNvPr id="17" name="Oval 16"/>
-          <p:cNvSpPr/>
-          <p:nvPr/>
-        </p:nvSpPr>
-        <p:spPr>
-          <a:xfrm>
-            <a:off x="2255824" y="2962656"/>
-            <a:ext cx="384048" cy="384048"/>
-          </a:xfrm>
-          <a:prstGeom prst="ellipse">
-            <a:avLst/>
-          </a:prstGeom>
-          <a:solidFill>
-            <a:srgbClr val="4678B4"/>
-          </a:solidFill>
-          <a:ln>
-            <a:noFill/>
-          </a:ln>
-        </p:spPr>
-        <p:style>
-          <a:lnRef idx="1">
-            <a:schemeClr val="accent1"/>
-          </a:lnRef>
-          <a:fillRef idx="3">
-            <a:schemeClr val="accent1"/>
-          </a:fillRef>
-          <a:effectRef idx="2">
-            <a:schemeClr val="accent1"/>
-          </a:effectRef>
-          <a:fontRef idx="minor">
-            <a:schemeClr val="lt1"/>
-          </a:fontRef>
-        </p:style>
-        <p:txBody>
-          <a:bodyPr rtlCol="0" anchor="ctr"/>
-          <a:lstStyle/>
-          <a:p>
-            <a:pPr algn="ctr"/>
-          </a:p>
-        </p:txBody>
-      </p:sp>
-      <p:sp>
-        <p:nvSpPr>
-          <p:cNvPr id="18" name="TextBox 17"/>
+              <a:t>证据—特点—作用（先找细节，再概括，后说作用）</a:t>
+            </a:r>
+          </a:p>
+        </p:txBody>
+      </p:sp>
+      <p:sp>
+        <p:nvSpPr>
+          <p:cNvPr id="15" name="TextBox 14"/>
           <p:cNvSpPr txBox="1"/>
           <p:nvPr/>
         </p:nvSpPr>
         <p:spPr>
           <a:xfrm>
-            <a:off x="2255824" y="2980944"/>
-            <a:ext cx="384048" cy="365760"/>
+            <a:off x="1234440" y="3099815"/>
+            <a:ext cx="2377440" cy="502920"/>
           </a:xfrm>
           <a:prstGeom prst="rect">
             <a:avLst/>
@@ -5454,33 +5223,33 @@
           </a:bodyPr>
           <a:lstStyle/>
           <a:p>
-            <a:pPr algn="ctr">
+            <a:pPr algn="r">
               <a:spcAft>
                 <a:spcPts val="1000"/>
               </a:spcAft>
             </a:pPr>
             <a:r>
-              <a:rPr sz="1600" b="1">
+              <a:rPr sz="2200" b="1">
                 <a:solidFill>
-                  <a:srgbClr val="FFFFFF"/>
+                  <a:srgbClr val="4678B4"/>
                 </a:solidFill>
                 <a:latin typeface="Microsoft YaHei"/>
               </a:rPr>
-              <a:t>3</a:t>
-            </a:r>
-          </a:p>
-        </p:txBody>
-      </p:sp>
-      <p:sp>
-        <p:nvSpPr>
-          <p:cNvPr id="19" name="TextBox 18"/>
+              <a:t>想象追问</a:t>
+            </a:r>
+          </a:p>
+        </p:txBody>
+      </p:sp>
+      <p:sp>
+        <p:nvSpPr>
+          <p:cNvPr id="16" name="TextBox 15"/>
           <p:cNvSpPr txBox="1"/>
           <p:nvPr/>
         </p:nvSpPr>
         <p:spPr>
           <a:xfrm>
-            <a:off x="2758744" y="2944368"/>
-            <a:ext cx="7772400" cy="502920"/>
+            <a:off x="3749039" y="3099815"/>
+            <a:ext cx="7589520" cy="594360"/>
           </a:xfrm>
           <a:prstGeom prst="rect">
             <a:avLst/>
@@ -5499,70 +5268,27 @@
               </a:spcAft>
             </a:pPr>
             <a:r>
-              <a:rPr sz="2400" b="0">
+              <a:rPr sz="2200" b="0">
                 <a:solidFill>
                   <a:srgbClr val="323C50"/>
                 </a:solidFill>
                 <a:latin typeface="Microsoft YaHei"/>
               </a:rPr>
-              <a:t>创造与生命：《女娲造人》</a:t>
-            </a:r>
-          </a:p>
-        </p:txBody>
-      </p:sp>
-      <p:sp>
-        <p:nvSpPr>
-          <p:cNvPr id="20" name="Oval 19"/>
-          <p:cNvSpPr/>
-          <p:nvPr/>
-        </p:nvSpPr>
-        <p:spPr>
-          <a:xfrm>
-            <a:off x="2255824" y="3529584"/>
-            <a:ext cx="384048" cy="384048"/>
-          </a:xfrm>
-          <a:prstGeom prst="ellipse">
-            <a:avLst/>
-          </a:prstGeom>
-          <a:solidFill>
-            <a:srgbClr val="4678B4"/>
-          </a:solidFill>
-          <a:ln>
-            <a:noFill/>
-          </a:ln>
-        </p:spPr>
-        <p:style>
-          <a:lnRef idx="1">
-            <a:schemeClr val="accent1"/>
-          </a:lnRef>
-          <a:fillRef idx="3">
-            <a:schemeClr val="accent1"/>
-          </a:fillRef>
-          <a:effectRef idx="2">
-            <a:schemeClr val="accent1"/>
-          </a:effectRef>
-          <a:fontRef idx="minor">
-            <a:schemeClr val="lt1"/>
-          </a:fontRef>
-        </p:style>
-        <p:txBody>
-          <a:bodyPr rtlCol="0" anchor="ctr"/>
-          <a:lstStyle/>
-          <a:p>
-            <a:pPr algn="ctr"/>
-          </a:p>
-        </p:txBody>
-      </p:sp>
-      <p:sp>
-        <p:nvSpPr>
-          <p:cNvPr id="21" name="TextBox 20"/>
+              <a:t>它像现实中的什么？人物为什么这样做？</a:t>
+            </a:r>
+          </a:p>
+        </p:txBody>
+      </p:sp>
+      <p:sp>
+        <p:nvSpPr>
+          <p:cNvPr id="17" name="TextBox 16"/>
           <p:cNvSpPr txBox="1"/>
           <p:nvPr/>
         </p:nvSpPr>
         <p:spPr>
           <a:xfrm>
-            <a:off x="2255824" y="3547872"/>
-            <a:ext cx="384048" cy="365760"/>
+            <a:off x="1234440" y="3758184"/>
+            <a:ext cx="2377440" cy="502920"/>
           </a:xfrm>
           <a:prstGeom prst="rect">
             <a:avLst/>
@@ -5575,33 +5301,33 @@
           </a:bodyPr>
           <a:lstStyle/>
           <a:p>
-            <a:pPr algn="ctr">
+            <a:pPr algn="r">
               <a:spcAft>
                 <a:spcPts val="1000"/>
               </a:spcAft>
             </a:pPr>
             <a:r>
-              <a:rPr sz="1600" b="1">
+              <a:rPr sz="2200" b="1">
                 <a:solidFill>
-                  <a:srgbClr val="FFFFFF"/>
+                  <a:srgbClr val="4678B4"/>
                 </a:solidFill>
                 <a:latin typeface="Microsoft YaHei"/>
               </a:rPr>
-              <a:t>4</a:t>
-            </a:r>
-          </a:p>
-        </p:txBody>
-      </p:sp>
-      <p:sp>
-        <p:nvSpPr>
-          <p:cNvPr id="22" name="TextBox 21"/>
+              <a:t>创作方法</a:t>
+            </a:r>
+          </a:p>
+        </p:txBody>
+      </p:sp>
+      <p:sp>
+        <p:nvSpPr>
+          <p:cNvPr id="18" name="TextBox 17"/>
           <p:cNvSpPr txBox="1"/>
           <p:nvPr/>
         </p:nvSpPr>
         <p:spPr>
           <a:xfrm>
-            <a:off x="2758744" y="3511296"/>
-            <a:ext cx="7772400" cy="502920"/>
+            <a:off x="3749039" y="3758184"/>
+            <a:ext cx="7589520" cy="594360"/>
           </a:xfrm>
           <a:prstGeom prst="rect">
             <a:avLst/>
@@ -5620,13 +5346,13 @@
               </a:spcAft>
             </a:pPr>
             <a:r>
-              <a:rPr sz="2400" b="0">
+              <a:rPr sz="2200" b="0">
                 <a:solidFill>
                   <a:srgbClr val="323C50"/>
                 </a:solidFill>
                 <a:latin typeface="Microsoft YaHei"/>
               </a:rPr>
-              <a:t>智慧与局限：《寓言四则》</a:t>
+              <a:t>触发点→联想链→情节转折→表达主题</a:t>
             </a:r>
           </a:p>
         </p:txBody>
@@ -5772,7 +5498,7 @@
         </p:nvSpPr>
         <p:spPr>
           <a:xfrm>
-            <a:off x="4953304" y="1005840"/>
+            <a:off x="4953304" y="502920"/>
             <a:ext cx="2286000" cy="411480"/>
           </a:xfrm>
           <a:prstGeom prst="roundRect">
@@ -5815,7 +5541,7 @@
         </p:nvSpPr>
         <p:spPr>
           <a:xfrm>
-            <a:off x="4953304" y="1024128"/>
+            <a:off x="4953304" y="521208"/>
             <a:ext cx="2286000" cy="384048"/>
           </a:xfrm>
           <a:prstGeom prst="rect">
@@ -5841,7 +5567,7 @@
                 </a:solidFill>
                 <a:latin typeface="Microsoft YaHei"/>
               </a:rPr>
-              <a:t>想一想</a:t>
+              <a:t>挑战任务</a:t>
             </a:r>
           </a:p>
         </p:txBody>
@@ -5854,7 +5580,7 @@
         </p:nvSpPr>
         <p:spPr>
           <a:xfrm>
-            <a:off x="1371600" y="1600200"/>
+            <a:off x="1371600" y="960120"/>
             <a:ext cx="9418320" cy="822960"/>
           </a:xfrm>
           <a:prstGeom prst="rect">
@@ -5874,14 +5600,13 @@
               </a:spcAft>
             </a:pPr>
             <a:r>
-              <a:rPr sz="3200" b="1">
+              <a:rPr sz="3600" b="1">
                 <a:solidFill>
                   <a:srgbClr val="4678B4"/>
                 </a:solidFill>
                 <a:latin typeface="Microsoft YaHei"/>
               </a:rPr>
-              <a:t>如果伞能说话、星星掉进教室……
-这些离奇念头从哪来？</a:t>
+              <a:t>单元大任务</a:t>
             </a:r>
           </a:p>
         </p:txBody>
@@ -5894,7 +5619,7 @@
         </p:nvSpPr>
         <p:spPr>
           <a:xfrm>
-            <a:off x="3200400" y="4389120"/>
+            <a:off x="3200400" y="1600200"/>
             <a:ext cx="5760720" cy="27432"/>
           </a:xfrm>
           <a:prstGeom prst="rect">
@@ -5931,14 +5656,102 @@
       </p:sp>
       <p:sp>
         <p:nvSpPr>
-          <p:cNvPr id="10" name="TextBox 9"/>
+          <p:cNvPr id="10" name="Rounded Rectangle 9"/>
+          <p:cNvSpPr/>
+          <p:nvPr/>
+        </p:nvSpPr>
+        <p:spPr>
+          <a:xfrm>
+            <a:off x="1295704" y="1645920"/>
+            <a:ext cx="9601200" cy="2112264"/>
+          </a:xfrm>
+          <a:prstGeom prst="roundRect">
+            <a:avLst/>
+          </a:prstGeom>
+          <a:solidFill>
+            <a:srgbClr val="F8FAFF"/>
+          </a:solidFill>
+          <a:ln w="19050">
+            <a:solidFill>
+              <a:srgbClr val="A0BEDC"/>
+            </a:solidFill>
+          </a:ln>
+        </p:spPr>
+        <p:style>
+          <a:lnRef idx="1">
+            <a:schemeClr val="accent1"/>
+          </a:lnRef>
+          <a:fillRef idx="3">
+            <a:schemeClr val="accent1"/>
+          </a:fillRef>
+          <a:effectRef idx="2">
+            <a:schemeClr val="accent1"/>
+          </a:effectRef>
+          <a:fontRef idx="minor">
+            <a:schemeClr val="lt1"/>
+          </a:fontRef>
+        </p:style>
+        <p:txBody>
+          <a:bodyPr rtlCol="0" anchor="ctr"/>
+          <a:lstStyle/>
+          <a:p>
+            <a:pPr algn="ctr"/>
+          </a:p>
+        </p:txBody>
+      </p:sp>
+      <p:sp>
+        <p:nvSpPr>
+          <p:cNvPr id="11" name="Oval 10"/>
+          <p:cNvSpPr/>
+          <p:nvPr/>
+        </p:nvSpPr>
+        <p:spPr>
+          <a:xfrm>
+            <a:off x="2255824" y="1828800"/>
+            <a:ext cx="347472" cy="347472"/>
+          </a:xfrm>
+          <a:prstGeom prst="ellipse">
+            <a:avLst/>
+          </a:prstGeom>
+          <a:solidFill>
+            <a:srgbClr val="4678B4"/>
+          </a:solidFill>
+          <a:ln>
+            <a:noFill/>
+          </a:ln>
+        </p:spPr>
+        <p:style>
+          <a:lnRef idx="1">
+            <a:schemeClr val="accent1"/>
+          </a:lnRef>
+          <a:fillRef idx="3">
+            <a:schemeClr val="accent1"/>
+          </a:fillRef>
+          <a:effectRef idx="2">
+            <a:schemeClr val="accent1"/>
+          </a:effectRef>
+          <a:fontRef idx="minor">
+            <a:schemeClr val="lt1"/>
+          </a:fontRef>
+        </p:style>
+        <p:txBody>
+          <a:bodyPr rtlCol="0" anchor="ctr"/>
+          <a:lstStyle/>
+          <a:p>
+            <a:pPr algn="ctr"/>
+          </a:p>
+        </p:txBody>
+      </p:sp>
+      <p:sp>
+        <p:nvSpPr>
+          <p:cNvPr id="12" name="TextBox 11"/>
           <p:cNvSpPr txBox="1"/>
           <p:nvPr/>
         </p:nvSpPr>
         <p:spPr>
           <a:xfrm>
-            <a:off x="1828800" y="4663440"/>
-            <a:ext cx="8503920" cy="914400"/>
+            <a:off x="2255824" y="1847088"/>
+            <a:ext cx="347472" cy="329184"/>
           </a:xfrm>
           <a:prstGeom prst="rect">
             <a:avLst/>
@@ -5957,13 +5770,294 @@
               </a:spcAft>
             </a:pPr>
             <a:r>
-              <a:rPr sz="2200" b="0">
+              <a:rPr sz="1400" b="1">
                 <a:solidFill>
-                  <a:srgbClr val="4678B4"/>
+                  <a:srgbClr val="FFFFFF"/>
                 </a:solidFill>
                 <a:latin typeface="Microsoft YaHei"/>
               </a:rPr>
-              <a:t>提示：从真实经验出发，联想与想象</a:t>
+              <a:t>1</a:t>
+            </a:r>
+          </a:p>
+        </p:txBody>
+      </p:sp>
+      <p:sp>
+        <p:nvSpPr>
+          <p:cNvPr id="13" name="TextBox 12"/>
+          <p:cNvSpPr txBox="1"/>
+          <p:nvPr/>
+        </p:nvSpPr>
+        <p:spPr>
+          <a:xfrm>
+            <a:off x="2713024" y="1810512"/>
+            <a:ext cx="7863840" cy="457200"/>
+          </a:xfrm>
+          <a:prstGeom prst="rect">
+            <a:avLst/>
+          </a:prstGeom>
+          <a:noFill/>
+        </p:spPr>
+        <p:txBody>
+          <a:bodyPr wrap="none">
+            <a:spAutoFit/>
+          </a:bodyPr>
+          <a:lstStyle/>
+          <a:p>
+            <a:pPr algn="l">
+              <a:spcAft>
+                <a:spcPts val="1000"/>
+              </a:spcAft>
+            </a:pPr>
+            <a:r>
+              <a:rPr sz="2400" b="0">
+                <a:solidFill>
+                  <a:srgbClr val="323C50"/>
+                </a:solidFill>
+                <a:latin typeface="Microsoft YaHei"/>
+              </a:rPr>
+              <a:t>举办「想象力博物馆」微展览，小组担任策展人</a:t>
+            </a:r>
+          </a:p>
+        </p:txBody>
+      </p:sp>
+      <p:sp>
+        <p:nvSpPr>
+          <p:cNvPr id="14" name="Oval 13"/>
+          <p:cNvSpPr/>
+          <p:nvPr/>
+        </p:nvSpPr>
+        <p:spPr>
+          <a:xfrm>
+            <a:off x="2255824" y="2395728"/>
+            <a:ext cx="347472" cy="347472"/>
+          </a:xfrm>
+          <a:prstGeom prst="ellipse">
+            <a:avLst/>
+          </a:prstGeom>
+          <a:solidFill>
+            <a:srgbClr val="4678B4"/>
+          </a:solidFill>
+          <a:ln>
+            <a:noFill/>
+          </a:ln>
+        </p:spPr>
+        <p:style>
+          <a:lnRef idx="1">
+            <a:schemeClr val="accent1"/>
+          </a:lnRef>
+          <a:fillRef idx="3">
+            <a:schemeClr val="accent1"/>
+          </a:fillRef>
+          <a:effectRef idx="2">
+            <a:schemeClr val="accent1"/>
+          </a:effectRef>
+          <a:fontRef idx="minor">
+            <a:schemeClr val="lt1"/>
+          </a:fontRef>
+        </p:style>
+        <p:txBody>
+          <a:bodyPr rtlCol="0" anchor="ctr"/>
+          <a:lstStyle/>
+          <a:p>
+            <a:pPr algn="ctr"/>
+          </a:p>
+        </p:txBody>
+      </p:sp>
+      <p:sp>
+        <p:nvSpPr>
+          <p:cNvPr id="15" name="TextBox 14"/>
+          <p:cNvSpPr txBox="1"/>
+          <p:nvPr/>
+        </p:nvSpPr>
+        <p:spPr>
+          <a:xfrm>
+            <a:off x="2255824" y="2414016"/>
+            <a:ext cx="347472" cy="329184"/>
+          </a:xfrm>
+          <a:prstGeom prst="rect">
+            <a:avLst/>
+          </a:prstGeom>
+          <a:noFill/>
+        </p:spPr>
+        <p:txBody>
+          <a:bodyPr wrap="none">
+            <a:spAutoFit/>
+          </a:bodyPr>
+          <a:lstStyle/>
+          <a:p>
+            <a:pPr algn="ctr">
+              <a:spcAft>
+                <a:spcPts val="1000"/>
+              </a:spcAft>
+            </a:pPr>
+            <a:r>
+              <a:rPr sz="1400" b="1">
+                <a:solidFill>
+                  <a:srgbClr val="FFFFFF"/>
+                </a:solidFill>
+                <a:latin typeface="Microsoft YaHei"/>
+              </a:rPr>
+              <a:t>2</a:t>
+            </a:r>
+          </a:p>
+        </p:txBody>
+      </p:sp>
+      <p:sp>
+        <p:nvSpPr>
+          <p:cNvPr id="16" name="TextBox 15"/>
+          <p:cNvSpPr txBox="1"/>
+          <p:nvPr/>
+        </p:nvSpPr>
+        <p:spPr>
+          <a:xfrm>
+            <a:off x="2713024" y="2377440"/>
+            <a:ext cx="7863840" cy="457200"/>
+          </a:xfrm>
+          <a:prstGeom prst="rect">
+            <a:avLst/>
+          </a:prstGeom>
+          <a:noFill/>
+        </p:spPr>
+        <p:txBody>
+          <a:bodyPr wrap="none">
+            <a:spAutoFit/>
+          </a:bodyPr>
+          <a:lstStyle/>
+          <a:p>
+            <a:pPr algn="l">
+              <a:spcAft>
+                <a:spcPts val="1000"/>
+              </a:spcAft>
+            </a:pPr>
+            <a:r>
+              <a:rPr sz="2400" b="0">
+                <a:solidFill>
+                  <a:srgbClr val="323C50"/>
+                </a:solidFill>
+                <a:latin typeface="Microsoft YaHei"/>
+              </a:rPr>
+              <a:t>制作「想象说明卡」：说清想象的依据与表达效果</a:t>
+            </a:r>
+          </a:p>
+        </p:txBody>
+      </p:sp>
+      <p:sp>
+        <p:nvSpPr>
+          <p:cNvPr id="17" name="Oval 16"/>
+          <p:cNvSpPr/>
+          <p:nvPr/>
+        </p:nvSpPr>
+        <p:spPr>
+          <a:xfrm>
+            <a:off x="2255824" y="2962656"/>
+            <a:ext cx="347472" cy="347472"/>
+          </a:xfrm>
+          <a:prstGeom prst="ellipse">
+            <a:avLst/>
+          </a:prstGeom>
+          <a:solidFill>
+            <a:srgbClr val="4678B4"/>
+          </a:solidFill>
+          <a:ln>
+            <a:noFill/>
+          </a:ln>
+        </p:spPr>
+        <p:style>
+          <a:lnRef idx="1">
+            <a:schemeClr val="accent1"/>
+          </a:lnRef>
+          <a:fillRef idx="3">
+            <a:schemeClr val="accent1"/>
+          </a:fillRef>
+          <a:effectRef idx="2">
+            <a:schemeClr val="accent1"/>
+          </a:effectRef>
+          <a:fontRef idx="minor">
+            <a:schemeClr val="lt1"/>
+          </a:fontRef>
+        </p:style>
+        <p:txBody>
+          <a:bodyPr rtlCol="0" anchor="ctr"/>
+          <a:lstStyle/>
+          <a:p>
+            <a:pPr algn="ctr"/>
+          </a:p>
+        </p:txBody>
+      </p:sp>
+      <p:sp>
+        <p:nvSpPr>
+          <p:cNvPr id="18" name="TextBox 17"/>
+          <p:cNvSpPr txBox="1"/>
+          <p:nvPr/>
+        </p:nvSpPr>
+        <p:spPr>
+          <a:xfrm>
+            <a:off x="2255824" y="2980944"/>
+            <a:ext cx="347472" cy="329184"/>
+          </a:xfrm>
+          <a:prstGeom prst="rect">
+            <a:avLst/>
+          </a:prstGeom>
+          <a:noFill/>
+        </p:spPr>
+        <p:txBody>
+          <a:bodyPr wrap="none">
+            <a:spAutoFit/>
+          </a:bodyPr>
+          <a:lstStyle/>
+          <a:p>
+            <a:pPr algn="ctr">
+              <a:spcAft>
+                <a:spcPts val="1000"/>
+              </a:spcAft>
+            </a:pPr>
+            <a:r>
+              <a:rPr sz="1400" b="1">
+                <a:solidFill>
+                  <a:srgbClr val="FFFFFF"/>
+                </a:solidFill>
+                <a:latin typeface="Microsoft YaHei"/>
+              </a:rPr>
+              <a:t>3</a:t>
+            </a:r>
+          </a:p>
+        </p:txBody>
+      </p:sp>
+      <p:sp>
+        <p:nvSpPr>
+          <p:cNvPr id="19" name="TextBox 18"/>
+          <p:cNvSpPr txBox="1"/>
+          <p:nvPr/>
+        </p:nvSpPr>
+        <p:spPr>
+          <a:xfrm>
+            <a:off x="2713024" y="2944368"/>
+            <a:ext cx="7863840" cy="457200"/>
+          </a:xfrm>
+          <a:prstGeom prst="rect">
+            <a:avLst/>
+          </a:prstGeom>
+          <a:noFill/>
+        </p:spPr>
+        <p:txBody>
+          <a:bodyPr wrap="none">
+            <a:spAutoFit/>
+          </a:bodyPr>
+          <a:lstStyle/>
+          <a:p>
+            <a:pPr algn="l">
+              <a:spcAft>
+                <a:spcPts val="1000"/>
+              </a:spcAft>
+            </a:pPr>
+            <a:r>
+              <a:rPr sz="2400" b="0">
+                <a:solidFill>
+                  <a:srgbClr val="323C50"/>
+                </a:solidFill>
+                <a:latin typeface="Microsoft YaHei"/>
+              </a:rPr>
+              <a:t>完成原创想象文字或一幕微型课本剧</a:t>
             </a:r>
           </a:p>
         </p:txBody>
@@ -6178,7 +6272,7 @@
                 </a:solidFill>
                 <a:latin typeface="Microsoft YaHei"/>
               </a:rPr>
-              <a:t>明确任务</a:t>
+              <a:t>学习方法</a:t>
             </a:r>
           </a:p>
         </p:txBody>
@@ -6217,7 +6311,7 @@
                 </a:solidFill>
                 <a:latin typeface="Microsoft YaHei"/>
               </a:rPr>
-              <a:t>学习任务一</a:t>
+              <a:t>快速默读训练</a:t>
             </a:r>
           </a:p>
         </p:txBody>
@@ -6274,7 +6368,7 @@
         <p:spPr>
           <a:xfrm>
             <a:off x="1295704" y="1645920"/>
-            <a:ext cx="9601200" cy="2240280"/>
+            <a:ext cx="9601200" cy="2112264"/>
           </a:xfrm>
           <a:prstGeom prst="roundRect">
             <a:avLst/>
@@ -6319,7 +6413,7 @@
         <p:spPr>
           <a:xfrm>
             <a:off x="2255824" y="1828800"/>
-            <a:ext cx="384048" cy="384048"/>
+            <a:ext cx="347472" cy="347472"/>
           </a:xfrm>
           <a:prstGeom prst="ellipse">
             <a:avLst/>
@@ -6362,7 +6456,7 @@
         <p:spPr>
           <a:xfrm>
             <a:off x="2255824" y="1847088"/>
-            <a:ext cx="384048" cy="365760"/>
+            <a:ext cx="347472" cy="329184"/>
           </a:xfrm>
           <a:prstGeom prst="rect">
             <a:avLst/>
@@ -6381,7 +6475,7 @@
               </a:spcAft>
             </a:pPr>
             <a:r>
-              <a:rPr sz="1600" b="1">
+              <a:rPr sz="1400" b="1">
                 <a:solidFill>
                   <a:srgbClr val="FFFFFF"/>
                 </a:solidFill>
@@ -6400,8 +6494,8 @@
         </p:nvSpPr>
         <p:spPr>
           <a:xfrm>
-            <a:off x="2758744" y="1810512"/>
-            <a:ext cx="7772400" cy="502920"/>
+            <a:off x="2713024" y="1810512"/>
+            <a:ext cx="7863840" cy="457200"/>
           </a:xfrm>
           <a:prstGeom prst="rect">
             <a:avLst/>
@@ -6426,7 +6520,7 @@
                 </a:solidFill>
                 <a:latin typeface="Microsoft YaHei"/>
               </a:rPr>
-              <a:t>阅读学历案，圈画挑战任务与学习目标</a:t>
+              <a:t>不出声、不指读，段末停顿记录段意</a:t>
             </a:r>
           </a:p>
         </p:txBody>
@@ -6440,7 +6534,7 @@
         <p:spPr>
           <a:xfrm>
             <a:off x="2255824" y="2395728"/>
-            <a:ext cx="384048" cy="384048"/>
+            <a:ext cx="347472" cy="347472"/>
           </a:xfrm>
           <a:prstGeom prst="ellipse">
             <a:avLst/>
@@ -6483,7 +6577,7 @@
         <p:spPr>
           <a:xfrm>
             <a:off x="2255824" y="2414016"/>
-            <a:ext cx="384048" cy="365760"/>
+            <a:ext cx="347472" cy="329184"/>
           </a:xfrm>
           <a:prstGeom prst="rect">
             <a:avLst/>
@@ -6502,7 +6596,7 @@
               </a:spcAft>
             </a:pPr>
             <a:r>
-              <a:rPr sz="1600" b="1">
+              <a:rPr sz="1400" b="1">
                 <a:solidFill>
                   <a:srgbClr val="FFFFFF"/>
                 </a:solidFill>
@@ -6521,8 +6615,8 @@
         </p:nvSpPr>
         <p:spPr>
           <a:xfrm>
-            <a:off x="2758744" y="2377440"/>
-            <a:ext cx="7772400" cy="502920"/>
+            <a:off x="2713024" y="2377440"/>
+            <a:ext cx="7863840" cy="457200"/>
           </a:xfrm>
           <a:prstGeom prst="rect">
             <a:avLst/>
@@ -6547,7 +6641,7 @@
                 </a:solidFill>
                 <a:latin typeface="Microsoft YaHei"/>
               </a:rPr>
-              <a:t>同伴交流：说说你的策展想法</a:t>
+              <a:t>用5—8个字概括每个情节段落</a:t>
             </a:r>
           </a:p>
         </p:txBody>
@@ -6561,7 +6655,7 @@
         <p:spPr>
           <a:xfrm>
             <a:off x="2255824" y="2962656"/>
-            <a:ext cx="384048" cy="384048"/>
+            <a:ext cx="347472" cy="347472"/>
           </a:xfrm>
           <a:prstGeom prst="ellipse">
             <a:avLst/>
@@ -6604,7 +6698,7 @@
         <p:spPr>
           <a:xfrm>
             <a:off x="2255824" y="2980944"/>
-            <a:ext cx="384048" cy="365760"/>
+            <a:ext cx="347472" cy="329184"/>
           </a:xfrm>
           <a:prstGeom prst="rect">
             <a:avLst/>
@@ -6623,7 +6717,7 @@
               </a:spcAft>
             </a:pPr>
             <a:r>
-              <a:rPr sz="1600" b="1">
+              <a:rPr sz="1400" b="1">
                 <a:solidFill>
                   <a:srgbClr val="FFFFFF"/>
                 </a:solidFill>
@@ -6642,8 +6736,8 @@
         </p:nvSpPr>
         <p:spPr>
           <a:xfrm>
-            <a:off x="2758744" y="2944368"/>
-            <a:ext cx="7772400" cy="502920"/>
+            <a:off x="2713024" y="2944368"/>
+            <a:ext cx="7863840" cy="457200"/>
           </a:xfrm>
           <a:prstGeom prst="rect">
             <a:avLst/>
@@ -6668,7 +6762,7 @@
                 </a:solidFill>
                 <a:latin typeface="Microsoft YaHei"/>
               </a:rPr>
-              <a:t>填写：本单元有哪些文体？阅读方法是什么？</a:t>
+              <a:t>复述三要素：人物、事件、结果</a:t>
             </a:r>
           </a:p>
         </p:txBody>
@@ -6814,7 +6908,7 @@
         </p:nvSpPr>
         <p:spPr>
           <a:xfrm>
-            <a:off x="4953304" y="502920"/>
+            <a:off x="4953304" y="1005840"/>
             <a:ext cx="2286000" cy="411480"/>
           </a:xfrm>
           <a:prstGeom prst="roundRect">
@@ -6857,7 +6951,7 @@
         </p:nvSpPr>
         <p:spPr>
           <a:xfrm>
-            <a:off x="4953304" y="521208"/>
+            <a:off x="4953304" y="1024128"/>
             <a:ext cx="2286000" cy="384048"/>
           </a:xfrm>
           <a:prstGeom prst="rect">
@@ -6883,7 +6977,7 @@
                 </a:solidFill>
                 <a:latin typeface="Microsoft YaHei"/>
               </a:rPr>
-              <a:t>快速阅读</a:t>
+              <a:t>想一想</a:t>
             </a:r>
           </a:p>
         </p:txBody>
@@ -6896,7 +6990,7 @@
         </p:nvSpPr>
         <p:spPr>
           <a:xfrm>
-            <a:off x="1371600" y="960120"/>
+            <a:off x="1371600" y="1600200"/>
             <a:ext cx="9418320" cy="822960"/>
           </a:xfrm>
           <a:prstGeom prst="rect">
@@ -6916,13 +7010,13 @@
               </a:spcAft>
             </a:pPr>
             <a:r>
-              <a:rPr sz="3600" b="1">
+              <a:rPr sz="3200" b="1">
                 <a:solidFill>
                   <a:srgbClr val="4678B4"/>
                 </a:solidFill>
                 <a:latin typeface="Microsoft YaHei"/>
               </a:rPr>
-              <a:t>学习任务二</a:t>
+              <a:t>奇异情节从哪来？</a:t>
             </a:r>
           </a:p>
         </p:txBody>
@@ -6935,7 +7029,7 @@
         </p:nvSpPr>
         <p:spPr>
           <a:xfrm>
-            <a:off x="3200400" y="1600200"/>
+            <a:off x="3200400" y="4389120"/>
             <a:ext cx="5760720" cy="27432"/>
           </a:xfrm>
           <a:prstGeom prst="rect">
@@ -6972,102 +7066,14 @@
       </p:sp>
       <p:sp>
         <p:nvSpPr>
-          <p:cNvPr id="10" name="Rounded Rectangle 9"/>
-          <p:cNvSpPr/>
-          <p:nvPr/>
-        </p:nvSpPr>
-        <p:spPr>
-          <a:xfrm>
-            <a:off x="1295704" y="1645920"/>
-            <a:ext cx="9601200" cy="2834640"/>
-          </a:xfrm>
-          <a:prstGeom prst="roundRect">
-            <a:avLst/>
-          </a:prstGeom>
-          <a:solidFill>
-            <a:srgbClr val="F8FAFF"/>
-          </a:solidFill>
-          <a:ln w="19050">
-            <a:solidFill>
-              <a:srgbClr val="A0BEDC"/>
-            </a:solidFill>
-          </a:ln>
-        </p:spPr>
-        <p:style>
-          <a:lnRef idx="1">
-            <a:schemeClr val="accent1"/>
-          </a:lnRef>
-          <a:fillRef idx="3">
-            <a:schemeClr val="accent1"/>
-          </a:fillRef>
-          <a:effectRef idx="2">
-            <a:schemeClr val="accent1"/>
-          </a:effectRef>
-          <a:fontRef idx="minor">
-            <a:schemeClr val="lt1"/>
-          </a:fontRef>
-        </p:style>
-        <p:txBody>
-          <a:bodyPr rtlCol="0" anchor="ctr"/>
-          <a:lstStyle/>
-          <a:p>
-            <a:pPr algn="ctr"/>
-          </a:p>
-        </p:txBody>
-      </p:sp>
-      <p:sp>
-        <p:nvSpPr>
-          <p:cNvPr id="11" name="Oval 10"/>
-          <p:cNvSpPr/>
-          <p:nvPr/>
-        </p:nvSpPr>
-        <p:spPr>
-          <a:xfrm>
-            <a:off x="2255824" y="1828800"/>
-            <a:ext cx="384048" cy="384048"/>
-          </a:xfrm>
-          <a:prstGeom prst="ellipse">
-            <a:avLst/>
-          </a:prstGeom>
-          <a:solidFill>
-            <a:srgbClr val="4678B4"/>
-          </a:solidFill>
-          <a:ln>
-            <a:noFill/>
-          </a:ln>
-        </p:spPr>
-        <p:style>
-          <a:lnRef idx="1">
-            <a:schemeClr val="accent1"/>
-          </a:lnRef>
-          <a:fillRef idx="3">
-            <a:schemeClr val="accent1"/>
-          </a:fillRef>
-          <a:effectRef idx="2">
-            <a:schemeClr val="accent1"/>
-          </a:effectRef>
-          <a:fontRef idx="minor">
-            <a:schemeClr val="lt1"/>
-          </a:fontRef>
-        </p:style>
-        <p:txBody>
-          <a:bodyPr rtlCol="0" anchor="ctr"/>
-          <a:lstStyle/>
-          <a:p>
-            <a:pPr algn="ctr"/>
-          </a:p>
-        </p:txBody>
-      </p:sp>
-      <p:sp>
-        <p:nvSpPr>
-          <p:cNvPr id="12" name="TextBox 11"/>
+          <p:cNvPr id="10" name="TextBox 9"/>
           <p:cNvSpPr txBox="1"/>
           <p:nvPr/>
         </p:nvSpPr>
         <p:spPr>
           <a:xfrm>
-            <a:off x="2255824" y="1847088"/>
-            <a:ext cx="384048" cy="365760"/>
+            <a:off x="1828800" y="4663440"/>
+            <a:ext cx="8503920" cy="914400"/>
           </a:xfrm>
           <a:prstGeom prst="rect">
             <a:avLst/>
@@ -7086,415 +7092,13 @@
               </a:spcAft>
             </a:pPr>
             <a:r>
-              <a:rPr sz="1600" b="1">
+              <a:rPr sz="2200" b="0">
                 <a:solidFill>
-                  <a:srgbClr val="FFFFFF"/>
+                  <a:srgbClr val="4678B4"/>
                 </a:solidFill>
                 <a:latin typeface="Microsoft YaHei"/>
               </a:rPr>
-              <a:t>1</a:t>
-            </a:r>
-          </a:p>
-        </p:txBody>
-      </p:sp>
-      <p:sp>
-        <p:nvSpPr>
-          <p:cNvPr id="13" name="TextBox 12"/>
-          <p:cNvSpPr txBox="1"/>
-          <p:nvPr/>
-        </p:nvSpPr>
-        <p:spPr>
-          <a:xfrm>
-            <a:off x="2758744" y="1810512"/>
-            <a:ext cx="7772400" cy="502920"/>
-          </a:xfrm>
-          <a:prstGeom prst="rect">
-            <a:avLst/>
-          </a:prstGeom>
-          <a:noFill/>
-        </p:spPr>
-        <p:txBody>
-          <a:bodyPr wrap="none">
-            <a:spAutoFit/>
-          </a:bodyPr>
-          <a:lstStyle/>
-          <a:p>
-            <a:pPr algn="l">
-              <a:spcAft>
-                <a:spcPts val="1000"/>
-              </a:spcAft>
-            </a:pPr>
-            <a:r>
-              <a:rPr sz="2400" b="0">
-                <a:solidFill>
-                  <a:srgbClr val="323C50"/>
-                </a:solidFill>
-                <a:latin typeface="Microsoft YaHei"/>
-              </a:rPr>
-              <a:t>快速默读（不出声、不指读）</a:t>
-            </a:r>
-          </a:p>
-        </p:txBody>
-      </p:sp>
-      <p:sp>
-        <p:nvSpPr>
-          <p:cNvPr id="14" name="Oval 13"/>
-          <p:cNvSpPr/>
-          <p:nvPr/>
-        </p:nvSpPr>
-        <p:spPr>
-          <a:xfrm>
-            <a:off x="2255824" y="2395728"/>
-            <a:ext cx="384048" cy="384048"/>
-          </a:xfrm>
-          <a:prstGeom prst="ellipse">
-            <a:avLst/>
-          </a:prstGeom>
-          <a:solidFill>
-            <a:srgbClr val="4678B4"/>
-          </a:solidFill>
-          <a:ln>
-            <a:noFill/>
-          </a:ln>
-        </p:spPr>
-        <p:style>
-          <a:lnRef idx="1">
-            <a:schemeClr val="accent1"/>
-          </a:lnRef>
-          <a:fillRef idx="3">
-            <a:schemeClr val="accent1"/>
-          </a:fillRef>
-          <a:effectRef idx="2">
-            <a:schemeClr val="accent1"/>
-          </a:effectRef>
-          <a:fontRef idx="minor">
-            <a:schemeClr val="lt1"/>
-          </a:fontRef>
-        </p:style>
-        <p:txBody>
-          <a:bodyPr rtlCol="0" anchor="ctr"/>
-          <a:lstStyle/>
-          <a:p>
-            <a:pPr algn="ctr"/>
-          </a:p>
-        </p:txBody>
-      </p:sp>
-      <p:sp>
-        <p:nvSpPr>
-          <p:cNvPr id="15" name="TextBox 14"/>
-          <p:cNvSpPr txBox="1"/>
-          <p:nvPr/>
-        </p:nvSpPr>
-        <p:spPr>
-          <a:xfrm>
-            <a:off x="2255824" y="2414016"/>
-            <a:ext cx="384048" cy="365760"/>
-          </a:xfrm>
-          <a:prstGeom prst="rect">
-            <a:avLst/>
-          </a:prstGeom>
-          <a:noFill/>
-        </p:spPr>
-        <p:txBody>
-          <a:bodyPr wrap="none">
-            <a:spAutoFit/>
-          </a:bodyPr>
-          <a:lstStyle/>
-          <a:p>
-            <a:pPr algn="ctr">
-              <a:spcAft>
-                <a:spcPts val="1000"/>
-              </a:spcAft>
-            </a:pPr>
-            <a:r>
-              <a:rPr sz="1600" b="1">
-                <a:solidFill>
-                  <a:srgbClr val="FFFFFF"/>
-                </a:solidFill>
-                <a:latin typeface="Microsoft YaHei"/>
-              </a:rPr>
-              <a:t>2</a:t>
-            </a:r>
-          </a:p>
-        </p:txBody>
-      </p:sp>
-      <p:sp>
-        <p:nvSpPr>
-          <p:cNvPr id="16" name="TextBox 15"/>
-          <p:cNvSpPr txBox="1"/>
-          <p:nvPr/>
-        </p:nvSpPr>
-        <p:spPr>
-          <a:xfrm>
-            <a:off x="2758744" y="2377440"/>
-            <a:ext cx="7772400" cy="502920"/>
-          </a:xfrm>
-          <a:prstGeom prst="rect">
-            <a:avLst/>
-          </a:prstGeom>
-          <a:noFill/>
-        </p:spPr>
-        <p:txBody>
-          <a:bodyPr wrap="none">
-            <a:spAutoFit/>
-          </a:bodyPr>
-          <a:lstStyle/>
-          <a:p>
-            <a:pPr algn="l">
-              <a:spcAft>
-                <a:spcPts val="1000"/>
-              </a:spcAft>
-            </a:pPr>
-            <a:r>
-              <a:rPr sz="2400" b="0">
-                <a:solidFill>
-                  <a:srgbClr val="323C50"/>
-                </a:solidFill>
-                <a:latin typeface="Microsoft YaHei"/>
-              </a:rPr>
-              <a:t>段末停顿，用5—8字记录段意</a:t>
-            </a:r>
-          </a:p>
-        </p:txBody>
-      </p:sp>
-      <p:sp>
-        <p:nvSpPr>
-          <p:cNvPr id="17" name="Oval 16"/>
-          <p:cNvSpPr/>
-          <p:nvPr/>
-        </p:nvSpPr>
-        <p:spPr>
-          <a:xfrm>
-            <a:off x="2255824" y="2962656"/>
-            <a:ext cx="384048" cy="384048"/>
-          </a:xfrm>
-          <a:prstGeom prst="ellipse">
-            <a:avLst/>
-          </a:prstGeom>
-          <a:solidFill>
-            <a:srgbClr val="4678B4"/>
-          </a:solidFill>
-          <a:ln>
-            <a:noFill/>
-          </a:ln>
-        </p:spPr>
-        <p:style>
-          <a:lnRef idx="1">
-            <a:schemeClr val="accent1"/>
-          </a:lnRef>
-          <a:fillRef idx="3">
-            <a:schemeClr val="accent1"/>
-          </a:fillRef>
-          <a:effectRef idx="2">
-            <a:schemeClr val="accent1"/>
-          </a:effectRef>
-          <a:fontRef idx="minor">
-            <a:schemeClr val="lt1"/>
-          </a:fontRef>
-        </p:style>
-        <p:txBody>
-          <a:bodyPr rtlCol="0" anchor="ctr"/>
-          <a:lstStyle/>
-          <a:p>
-            <a:pPr algn="ctr"/>
-          </a:p>
-        </p:txBody>
-      </p:sp>
-      <p:sp>
-        <p:nvSpPr>
-          <p:cNvPr id="18" name="TextBox 17"/>
-          <p:cNvSpPr txBox="1"/>
-          <p:nvPr/>
-        </p:nvSpPr>
-        <p:spPr>
-          <a:xfrm>
-            <a:off x="2255824" y="2980944"/>
-            <a:ext cx="384048" cy="365760"/>
-          </a:xfrm>
-          <a:prstGeom prst="rect">
-            <a:avLst/>
-          </a:prstGeom>
-          <a:noFill/>
-        </p:spPr>
-        <p:txBody>
-          <a:bodyPr wrap="none">
-            <a:spAutoFit/>
-          </a:bodyPr>
-          <a:lstStyle/>
-          <a:p>
-            <a:pPr algn="ctr">
-              <a:spcAft>
-                <a:spcPts val="1000"/>
-              </a:spcAft>
-            </a:pPr>
-            <a:r>
-              <a:rPr sz="1600" b="1">
-                <a:solidFill>
-                  <a:srgbClr val="FFFFFF"/>
-                </a:solidFill>
-                <a:latin typeface="Microsoft YaHei"/>
-              </a:rPr>
-              <a:t>3</a:t>
-            </a:r>
-          </a:p>
-        </p:txBody>
-      </p:sp>
-      <p:sp>
-        <p:nvSpPr>
-          <p:cNvPr id="19" name="TextBox 18"/>
-          <p:cNvSpPr txBox="1"/>
-          <p:nvPr/>
-        </p:nvSpPr>
-        <p:spPr>
-          <a:xfrm>
-            <a:off x="2758744" y="2944368"/>
-            <a:ext cx="7772400" cy="502920"/>
-          </a:xfrm>
-          <a:prstGeom prst="rect">
-            <a:avLst/>
-          </a:prstGeom>
-          <a:noFill/>
-        </p:spPr>
-        <p:txBody>
-          <a:bodyPr wrap="none">
-            <a:spAutoFit/>
-          </a:bodyPr>
-          <a:lstStyle/>
-          <a:p>
-            <a:pPr algn="l">
-              <a:spcAft>
-                <a:spcPts val="1000"/>
-              </a:spcAft>
-            </a:pPr>
-            <a:r>
-              <a:rPr sz="2400" b="0">
-                <a:solidFill>
-                  <a:srgbClr val="323C50"/>
-                </a:solidFill>
-                <a:latin typeface="Microsoft YaHei"/>
-              </a:rPr>
-              <a:t>归纳复述三要素：人物、事件、结果</a:t>
-            </a:r>
-          </a:p>
-        </p:txBody>
-      </p:sp>
-      <p:sp>
-        <p:nvSpPr>
-          <p:cNvPr id="20" name="Oval 19"/>
-          <p:cNvSpPr/>
-          <p:nvPr/>
-        </p:nvSpPr>
-        <p:spPr>
-          <a:xfrm>
-            <a:off x="2255824" y="3529584"/>
-            <a:ext cx="384048" cy="384048"/>
-          </a:xfrm>
-          <a:prstGeom prst="ellipse">
-            <a:avLst/>
-          </a:prstGeom>
-          <a:solidFill>
-            <a:srgbClr val="4678B4"/>
-          </a:solidFill>
-          <a:ln>
-            <a:noFill/>
-          </a:ln>
-        </p:spPr>
-        <p:style>
-          <a:lnRef idx="1">
-            <a:schemeClr val="accent1"/>
-          </a:lnRef>
-          <a:fillRef idx="3">
-            <a:schemeClr val="accent1"/>
-          </a:fillRef>
-          <a:effectRef idx="2">
-            <a:schemeClr val="accent1"/>
-          </a:effectRef>
-          <a:fontRef idx="minor">
-            <a:schemeClr val="lt1"/>
-          </a:fontRef>
-        </p:style>
-        <p:txBody>
-          <a:bodyPr rtlCol="0" anchor="ctr"/>
-          <a:lstStyle/>
-          <a:p>
-            <a:pPr algn="ctr"/>
-          </a:p>
-        </p:txBody>
-      </p:sp>
-      <p:sp>
-        <p:nvSpPr>
-          <p:cNvPr id="21" name="TextBox 20"/>
-          <p:cNvSpPr txBox="1"/>
-          <p:nvPr/>
-        </p:nvSpPr>
-        <p:spPr>
-          <a:xfrm>
-            <a:off x="2255824" y="3547872"/>
-            <a:ext cx="384048" cy="365760"/>
-          </a:xfrm>
-          <a:prstGeom prst="rect">
-            <a:avLst/>
-          </a:prstGeom>
-          <a:noFill/>
-        </p:spPr>
-        <p:txBody>
-          <a:bodyPr wrap="none">
-            <a:spAutoFit/>
-          </a:bodyPr>
-          <a:lstStyle/>
-          <a:p>
-            <a:pPr algn="ctr">
-              <a:spcAft>
-                <a:spcPts val="1000"/>
-              </a:spcAft>
-            </a:pPr>
-            <a:r>
-              <a:rPr sz="1600" b="1">
-                <a:solidFill>
-                  <a:srgbClr val="FFFFFF"/>
-                </a:solidFill>
-                <a:latin typeface="Microsoft YaHei"/>
-              </a:rPr>
-              <a:t>4</a:t>
-            </a:r>
-          </a:p>
-        </p:txBody>
-      </p:sp>
-      <p:sp>
-        <p:nvSpPr>
-          <p:cNvPr id="22" name="TextBox 21"/>
-          <p:cNvSpPr txBox="1"/>
-          <p:nvPr/>
-        </p:nvSpPr>
-        <p:spPr>
-          <a:xfrm>
-            <a:off x="2758744" y="3511296"/>
-            <a:ext cx="7772400" cy="502920"/>
-          </a:xfrm>
-          <a:prstGeom prst="rect">
-            <a:avLst/>
-          </a:prstGeom>
-          <a:noFill/>
-        </p:spPr>
-        <p:txBody>
-          <a:bodyPr wrap="none">
-            <a:spAutoFit/>
-          </a:bodyPr>
-          <a:lstStyle/>
-          <a:p>
-            <a:pPr algn="l">
-              <a:spcAft>
-                <a:spcPts val="1000"/>
-              </a:spcAft>
-            </a:pPr>
-            <a:r>
-              <a:rPr sz="2400" b="0">
-                <a:solidFill>
-                  <a:srgbClr val="323C50"/>
-                </a:solidFill>
-                <a:latin typeface="Microsoft YaHei"/>
-              </a:rPr>
-              <a:t>同桌互评：是否说清人物、事件、结果？</a:t>
+              <a:t>从真实经验出发——伞、星星、孙悟空都连接着我们的生活</a:t>
             </a:r>
           </a:p>
         </p:txBody>
@@ -7805,7 +7409,7 @@
         <p:spPr>
           <a:xfrm>
             <a:off x="1295704" y="1645920"/>
-            <a:ext cx="9601200" cy="2240280"/>
+            <a:ext cx="9601200" cy="1837944"/>
           </a:xfrm>
           <a:prstGeom prst="roundRect">
             <a:avLst/>
@@ -7850,7 +7454,7 @@
         <p:spPr>
           <a:xfrm>
             <a:off x="2255824" y="1828800"/>
-            <a:ext cx="384048" cy="384048"/>
+            <a:ext cx="347472" cy="347472"/>
           </a:xfrm>
           <a:prstGeom prst="ellipse">
             <a:avLst/>
@@ -7893,7 +7497,7 @@
         <p:spPr>
           <a:xfrm>
             <a:off x="2255824" y="1847088"/>
-            <a:ext cx="384048" cy="365760"/>
+            <a:ext cx="347472" cy="329184"/>
           </a:xfrm>
           <a:prstGeom prst="rect">
             <a:avLst/>
@@ -7912,7 +7516,7 @@
               </a:spcAft>
             </a:pPr>
             <a:r>
-              <a:rPr sz="1600" b="1">
+              <a:rPr sz="1400" b="1">
                 <a:solidFill>
                   <a:srgbClr val="FFFFFF"/>
                 </a:solidFill>
@@ -7931,8 +7535,8 @@
         </p:nvSpPr>
         <p:spPr>
           <a:xfrm>
-            <a:off x="2758744" y="1810512"/>
-            <a:ext cx="7772400" cy="502920"/>
+            <a:off x="2713024" y="1810512"/>
+            <a:ext cx="7863840" cy="457200"/>
           </a:xfrm>
           <a:prstGeom prst="rect">
             <a:avLst/>
@@ -7951,13 +7555,13 @@
               </a:spcAft>
             </a:pPr>
             <a:r>
-              <a:rPr sz="2400" b="0">
+              <a:rPr sz="2200" b="0">
                 <a:solidFill>
                   <a:srgbClr val="323C50"/>
                 </a:solidFill>
                 <a:latin typeface="Microsoft YaHei"/>
               </a:rPr>
-              <a:t>本单元学习重点：想象与真实</a:t>
+              <a:t>四文体：神魔小说、童话、神话、寓言</a:t>
             </a:r>
           </a:p>
         </p:txBody>
@@ -7970,8 +7574,8 @@
         </p:nvSpPr>
         <p:spPr>
           <a:xfrm>
-            <a:off x="2255824" y="2395728"/>
-            <a:ext cx="384048" cy="384048"/>
+            <a:off x="2255824" y="2304288"/>
+            <a:ext cx="347472" cy="347472"/>
           </a:xfrm>
           <a:prstGeom prst="ellipse">
             <a:avLst/>
@@ -8013,8 +7617,8 @@
         </p:nvSpPr>
         <p:spPr>
           <a:xfrm>
-            <a:off x="2255824" y="2414016"/>
-            <a:ext cx="384048" cy="365760"/>
+            <a:off x="2255824" y="2322576"/>
+            <a:ext cx="347472" cy="329184"/>
           </a:xfrm>
           <a:prstGeom prst="rect">
             <a:avLst/>
@@ -8033,7 +7637,7 @@
               </a:spcAft>
             </a:pPr>
             <a:r>
-              <a:rPr sz="1600" b="1">
+              <a:rPr sz="1400" b="1">
                 <a:solidFill>
                   <a:srgbClr val="FFFFFF"/>
                 </a:solidFill>
@@ -8052,8 +7656,8 @@
         </p:nvSpPr>
         <p:spPr>
           <a:xfrm>
-            <a:off x="2758744" y="2377440"/>
-            <a:ext cx="7772400" cy="502920"/>
+            <a:off x="2713024" y="2286000"/>
+            <a:ext cx="7863840" cy="457200"/>
           </a:xfrm>
           <a:prstGeom prst="rect">
             <a:avLst/>
@@ -8072,13 +7676,13 @@
               </a:spcAft>
             </a:pPr>
             <a:r>
-              <a:rPr sz="2400" b="0">
+              <a:rPr sz="2200" b="0">
                 <a:solidFill>
                   <a:srgbClr val="323C50"/>
                 </a:solidFill>
                 <a:latin typeface="Microsoft YaHei"/>
               </a:rPr>
-              <a:t>四条策展主题：自由→真实→创造→智慧</a:t>
+              <a:t>母题链：自由→真实→创造→智慧</a:t>
             </a:r>
           </a:p>
         </p:txBody>
@@ -8091,8 +7695,8 @@
         </p:nvSpPr>
         <p:spPr>
           <a:xfrm>
-            <a:off x="2255824" y="2962656"/>
-            <a:ext cx="384048" cy="384048"/>
+            <a:off x="2255824" y="2779776"/>
+            <a:ext cx="347472" cy="347472"/>
           </a:xfrm>
           <a:prstGeom prst="ellipse">
             <a:avLst/>
@@ -8134,8 +7738,8 @@
         </p:nvSpPr>
         <p:spPr>
           <a:xfrm>
-            <a:off x="2255824" y="2980944"/>
-            <a:ext cx="384048" cy="365760"/>
+            <a:off x="2255824" y="2798064"/>
+            <a:ext cx="347472" cy="329184"/>
           </a:xfrm>
           <a:prstGeom prst="rect">
             <a:avLst/>
@@ -8154,7 +7758,7 @@
               </a:spcAft>
             </a:pPr>
             <a:r>
-              <a:rPr sz="1600" b="1">
+              <a:rPr sz="1400" b="1">
                 <a:solidFill>
                   <a:srgbClr val="FFFFFF"/>
                 </a:solidFill>
@@ -8173,8 +7777,8 @@
         </p:nvSpPr>
         <p:spPr>
           <a:xfrm>
-            <a:off x="2758744" y="2944368"/>
-            <a:ext cx="7772400" cy="502920"/>
+            <a:off x="2713024" y="2761488"/>
+            <a:ext cx="7863840" cy="457200"/>
           </a:xfrm>
           <a:prstGeom prst="rect">
             <a:avLst/>
@@ -8193,13 +7797,13 @@
               </a:spcAft>
             </a:pPr>
             <a:r>
-              <a:rPr sz="2400" b="0">
+              <a:rPr sz="2200" b="0">
                 <a:solidFill>
                   <a:srgbClr val="323C50"/>
                 </a:solidFill>
                 <a:latin typeface="Microsoft YaHei"/>
               </a:rPr>
-              <a:t>快速阅读法：人物—事件—结果</a:t>
+              <a:t>概括法：人物—事件—结果；分析法：证据—特点—作用</a:t>
             </a:r>
           </a:p>
         </p:txBody>
@@ -8510,7 +8114,7 @@
         <p:spPr>
           <a:xfrm>
             <a:off x="1295704" y="1645920"/>
-            <a:ext cx="9601200" cy="1645920"/>
+            <a:ext cx="9601200" cy="1545336"/>
           </a:xfrm>
           <a:prstGeom prst="roundRect">
             <a:avLst/>
@@ -8555,7 +8159,7 @@
         <p:spPr>
           <a:xfrm>
             <a:off x="2255824" y="1828800"/>
-            <a:ext cx="384048" cy="384048"/>
+            <a:ext cx="347472" cy="347472"/>
           </a:xfrm>
           <a:prstGeom prst="ellipse">
             <a:avLst/>
@@ -8598,7 +8202,7 @@
         <p:spPr>
           <a:xfrm>
             <a:off x="2255824" y="1847088"/>
-            <a:ext cx="384048" cy="365760"/>
+            <a:ext cx="347472" cy="329184"/>
           </a:xfrm>
           <a:prstGeom prst="rect">
             <a:avLst/>
@@ -8617,7 +8221,7 @@
               </a:spcAft>
             </a:pPr>
             <a:r>
-              <a:rPr sz="1600" b="1">
+              <a:rPr sz="1400" b="1">
                 <a:solidFill>
                   <a:srgbClr val="FFFFFF"/>
                 </a:solidFill>
@@ -8636,8 +8240,8 @@
         </p:nvSpPr>
         <p:spPr>
           <a:xfrm>
-            <a:off x="2758744" y="1810512"/>
-            <a:ext cx="7772400" cy="502920"/>
+            <a:off x="2713024" y="1810512"/>
+            <a:ext cx="7863840" cy="457200"/>
           </a:xfrm>
           <a:prstGeom prst="rect">
             <a:avLst/>
@@ -8676,7 +8280,7 @@
         <p:spPr>
           <a:xfrm>
             <a:off x="2255824" y="2395728"/>
-            <a:ext cx="384048" cy="384048"/>
+            <a:ext cx="347472" cy="347472"/>
           </a:xfrm>
           <a:prstGeom prst="ellipse">
             <a:avLst/>
@@ -8719,7 +8323,7 @@
         <p:spPr>
           <a:xfrm>
             <a:off x="2255824" y="2414016"/>
-            <a:ext cx="384048" cy="365760"/>
+            <a:ext cx="347472" cy="329184"/>
           </a:xfrm>
           <a:prstGeom prst="rect">
             <a:avLst/>
@@ -8738,7 +8342,7 @@
               </a:spcAft>
             </a:pPr>
             <a:r>
-              <a:rPr sz="1600" b="1">
+              <a:rPr sz="1400" b="1">
                 <a:solidFill>
                   <a:srgbClr val="FFFFFF"/>
                 </a:solidFill>
@@ -8757,8 +8361,8 @@
         </p:nvSpPr>
         <p:spPr>
           <a:xfrm>
-            <a:off x="2758744" y="2377440"/>
-            <a:ext cx="7772400" cy="502920"/>
+            <a:off x="2713024" y="2377440"/>
+            <a:ext cx="7863840" cy="457200"/>
           </a:xfrm>
           <a:prstGeom prst="rect">
             <a:avLst/>
@@ -8783,7 +8387,7 @@
                 </a:solidFill>
                 <a:latin typeface="Microsoft YaHei"/>
               </a:rPr>
-              <a:t>选做：记录生活中一个「如果……会怎样」的想象问题</a:t>
+              <a:t>选做：记录一个「如果……会怎样」的想象问题</a:t>
             </a:r>
           </a:p>
         </p:txBody>
